--- a/examples/self-intro/diagnostic_world_model.pptx
+++ b/examples/self-intro/diagnostic_world_model.pptx
@@ -941,7 +941,7 @@
           <a:lstStyle/>
           <a:p>
             <a:r>
-              <a:t>Use TRIANGLE as evidence that multi-agent role separation already works in a neighboring reliability task. Transition by turning from paper evidence to the roadmap for how this becomes a diagnostic world model program.</a:t>
+              <a:t>Frame TRIANGLE as adjacent evidence rather than the main RCA contribution: structured role separation already works in a neighboring reliability task. Transition by saying the next step is to turn that structured reliability reasoning into a reusable diagnostic world model.</a:t>
             </a:r>
           </a:p>
         </p:txBody>
@@ -1011,7 +1011,7 @@
           <a:lstStyle/>
           <a:p>
             <a:r>
-              <a:t>Move out of evidence-heavy slides and into the roadmap: stage one is training an agent inside a simulation-hypothesis-verify-reward loop. Transition by asking what remains after we collect many successful traces from that loop.</a:t>
+              <a:t>Build on the adjacent evidence from TRIANGLE and move into the main roadmap: stage one is training an agent inside a simulation-hypothesis-verify-reward loop. Transition by asking what remains after we collect many successful traces from that loop.</a:t>
             </a:r>
           </a:p>
         </p:txBody>
@@ -1571,7 +1571,7 @@
           <a:lstStyle/>
           <a:p>
             <a:r>
-              <a:t>Make the third premise explicit: a diagnosis should earn reward only when the causal path checks out against ground truth. Transition by using that requirement to critique how RCA has traditionally been organized and evaluated.</a:t>
+              <a:t>Make the third premise explicit: a diagnosis should earn reward only when the causal path checks out against ground truth. Transition by saying that once world-model RCA is feasible, the real bottleneck becomes how RCA is defined and evaluated today.</a:t>
             </a:r>
           </a:p>
         </p:txBody>
@@ -1641,7 +1641,7 @@
           <a:lstStyle/>
           <a:p>
             <a:r>
-              <a:t>Use the survey to argue that the classical metrics-logs-traces taxonomy mixes together studies with incompatible goals. Transition by showing the deeper systems constraint that shapes all practical RCA methods.</a:t>
+              <a:t>Use the survey to argue that the classical metrics-logs-traces taxonomy is exactly where the field drifts away from the world-model target. Transition by showing the deeper systems constraint that shapes all practical RCA methods.</a:t>
             </a:r>
           </a:p>
         </p:txBody>
@@ -4853,7 +4853,7 @@
     <p:bg>
       <p:bgPr>
         <a:solidFill>
-          <a:srgbClr val="163B65"/>
+          <a:srgbClr val="EAF0F7"/>
         </a:solidFill>
         <a:effectLst/>
       </p:bgPr>
@@ -4880,7 +4880,7 @@
             <a:avLst/>
           </a:prstGeom>
           <a:solidFill>
-            <a:srgbClr val="E67E22"/>
+            <a:srgbClr val="D69A68"/>
           </a:solidFill>
           <a:ln>
             <a:noFill/>
@@ -4943,7 +4943,7 @@
             <a:pPr algn="l">
               <a:defRPr sz="2800" b="1" i="0">
                 <a:solidFill>
-                  <a:srgbClr val="FFFFFF"/>
+                  <a:srgbClr val="5C82AD"/>
                 </a:solidFill>
                 <a:latin typeface="Liberation Sans"/>
               </a:defRPr>
@@ -4956,7 +4956,7 @@
             <a:pPr algn="l">
               <a:defRPr sz="2800" b="1" i="0">
                 <a:solidFill>
-                  <a:srgbClr val="FFFFFF"/>
+                  <a:srgbClr val="5C82AD"/>
                 </a:solidFill>
                 <a:latin typeface="Liberation Sans"/>
               </a:defRPr>
@@ -4992,7 +4992,7 @@
             <a:pPr algn="l">
               <a:defRPr sz="1800" b="0" i="0">
                 <a:solidFill>
-                  <a:srgbClr val="EEF2F7"/>
+                  <a:srgbClr val="647489"/>
                 </a:solidFill>
                 <a:latin typeface="Liberation Sans"/>
               </a:defRPr>
@@ -5028,7 +5028,7 @@
             <a:pPr algn="l">
               <a:defRPr sz="1800" b="1" i="0">
                 <a:solidFill>
-                  <a:srgbClr val="E8F1F8"/>
+                  <a:srgbClr val="D69A68"/>
                 </a:solidFill>
                 <a:latin typeface="Liberation Sans"/>
               </a:defRPr>
@@ -5054,7 +5054,7 @@
             <a:avLst/>
           </a:prstGeom>
           <a:solidFill>
-            <a:srgbClr val="C44900"/>
+            <a:srgbClr val="C98A78"/>
           </a:solidFill>
           <a:ln>
             <a:noFill/>
@@ -5117,7 +5117,7 @@
             <a:pPr algn="l">
               <a:defRPr sz="2000" b="1" i="0">
                 <a:solidFill>
-                  <a:srgbClr val="FFFFFF"/>
+                  <a:srgbClr val="223043"/>
                 </a:solidFill>
                 <a:latin typeface="Liberation Sans"/>
               </a:defRPr>
@@ -5143,7 +5143,7 @@
             <a:avLst/>
           </a:prstGeom>
           <a:solidFill>
-            <a:srgbClr val="5B84B1"/>
+            <a:srgbClr val="8FAAC8"/>
           </a:solidFill>
           <a:ln>
             <a:noFill/>
@@ -5206,7 +5206,7 @@
             <a:pPr algn="l">
               <a:defRPr sz="2000" b="1" i="0">
                 <a:solidFill>
-                  <a:srgbClr val="FFFFFF"/>
+                  <a:srgbClr val="223043"/>
                 </a:solidFill>
                 <a:latin typeface="Liberation Sans"/>
               </a:defRPr>
@@ -5232,7 +5232,7 @@
             <a:avLst/>
           </a:prstGeom>
           <a:solidFill>
-            <a:srgbClr val="1F8A70"/>
+            <a:srgbClr val="7FA195"/>
           </a:solidFill>
           <a:ln>
             <a:noFill/>
@@ -5295,7 +5295,7 @@
             <a:pPr algn="l">
               <a:defRPr sz="2000" b="1" i="0">
                 <a:solidFill>
-                  <a:srgbClr val="FFFFFF"/>
+                  <a:srgbClr val="223043"/>
                 </a:solidFill>
                 <a:latin typeface="Liberation Sans"/>
               </a:defRPr>
@@ -5331,7 +5331,7 @@
             <a:pPr algn="l">
               <a:defRPr sz="1800" b="0" i="1">
                 <a:solidFill>
-                  <a:srgbClr val="EEF2F7"/>
+                  <a:srgbClr val="647489"/>
                 </a:solidFill>
                 <a:latin typeface="Liberation Sans"/>
               </a:defRPr>
@@ -6106,7 +6106,7 @@
             <a:pPr>
               <a:defRPr sz="3200" b="1">
                 <a:solidFill>
-                  <a:srgbClr val="1F2937"/>
+                  <a:srgbClr val="223043"/>
                 </a:solidFill>
                 <a:latin typeface="Liberation Sans"/>
               </a:defRPr>
@@ -6132,7 +6132,7 @@
             <a:avLst/>
           </a:prstGeom>
           <a:solidFill>
-            <a:srgbClr val="163B65"/>
+            <a:srgbClr val="5C82AD"/>
           </a:solidFill>
           <a:ln>
             <a:noFill/>
@@ -6185,7 +6185,7 @@
             <a:pPr algn="r">
               <a:defRPr sz="1100">
                 <a:solidFill>
-                  <a:srgbClr val="9CA3AF"/>
+                  <a:srgbClr val="94A3B6"/>
                 </a:solidFill>
                 <a:latin typeface="Liberation Sans"/>
               </a:defRPr>
@@ -6211,7 +6211,7 @@
             <a:avLst/>
           </a:prstGeom>
           <a:solidFill>
-            <a:srgbClr val="C44900"/>
+            <a:srgbClr val="C98A78"/>
           </a:solidFill>
           <a:ln>
             <a:noFill/>
@@ -6264,11 +6264,11 @@
             <a:avLst/>
           </a:prstGeom>
           <a:solidFill>
-            <a:srgbClr val="C44900"/>
+            <a:srgbClr val="C98A78"/>
           </a:solidFill>
           <a:ln w="12700">
             <a:solidFill>
-              <a:srgbClr val="C44900"/>
+              <a:srgbClr val="C98A78"/>
             </a:solidFill>
           </a:ln>
         </p:spPr>
@@ -6319,7 +6319,7 @@
             <a:pPr algn="l">
               <a:defRPr sz="1800" b="1" i="0">
                 <a:solidFill>
-                  <a:srgbClr val="C44900"/>
+                  <a:srgbClr val="C98A78"/>
                 </a:solidFill>
                 <a:latin typeface="Liberation Sans"/>
               </a:defRPr>
@@ -6355,7 +6355,7 @@
             <a:pPr algn="l">
               <a:defRPr sz="1400" b="0" i="0">
                 <a:solidFill>
-                  <a:srgbClr val="1F2937"/>
+                  <a:srgbClr val="223043"/>
                 </a:solidFill>
                 <a:latin typeface="Liberation Sans"/>
               </a:defRPr>
@@ -6381,11 +6381,11 @@
             <a:avLst/>
           </a:prstGeom>
           <a:solidFill>
-            <a:srgbClr val="D97706"/>
+            <a:srgbClr val="D8A86A"/>
           </a:solidFill>
           <a:ln w="12700">
             <a:solidFill>
-              <a:srgbClr val="D97706"/>
+              <a:srgbClr val="D8A86A"/>
             </a:solidFill>
           </a:ln>
         </p:spPr>
@@ -6436,7 +6436,7 @@
             <a:pPr algn="l">
               <a:defRPr sz="1800" b="1" i="0">
                 <a:solidFill>
-                  <a:srgbClr val="D97706"/>
+                  <a:srgbClr val="D8A86A"/>
                 </a:solidFill>
                 <a:latin typeface="Liberation Sans"/>
               </a:defRPr>
@@ -6472,7 +6472,7 @@
             <a:pPr algn="l">
               <a:defRPr sz="1400" b="0" i="0">
                 <a:solidFill>
-                  <a:srgbClr val="1F2937"/>
+                  <a:srgbClr val="223043"/>
                 </a:solidFill>
                 <a:latin typeface="Liberation Sans"/>
               </a:defRPr>
@@ -6498,11 +6498,11 @@
             <a:avLst/>
           </a:prstGeom>
           <a:solidFill>
-            <a:srgbClr val="5B84B1"/>
+            <a:srgbClr val="8FAAC8"/>
           </a:solidFill>
           <a:ln w="12700">
             <a:solidFill>
-              <a:srgbClr val="5B84B1"/>
+              <a:srgbClr val="8FAAC8"/>
             </a:solidFill>
           </a:ln>
         </p:spPr>
@@ -6553,7 +6553,7 @@
             <a:pPr algn="l">
               <a:defRPr sz="1800" b="1" i="0">
                 <a:solidFill>
-                  <a:srgbClr val="5B84B1"/>
+                  <a:srgbClr val="8FAAC8"/>
                 </a:solidFill>
                 <a:latin typeface="Liberation Sans"/>
               </a:defRPr>
@@ -6589,7 +6589,7 @@
             <a:pPr algn="l">
               <a:defRPr sz="1400" b="0" i="0">
                 <a:solidFill>
-                  <a:srgbClr val="1F2937"/>
+                  <a:srgbClr val="223043"/>
                 </a:solidFill>
                 <a:latin typeface="Liberation Sans"/>
               </a:defRPr>
@@ -6625,7 +6625,7 @@
             <a:pPr algn="l">
               <a:defRPr sz="1800" b="0" i="1">
                 <a:solidFill>
-                  <a:srgbClr val="6B7280"/>
+                  <a:srgbClr val="647489"/>
                 </a:solidFill>
                 <a:latin typeface="Liberation Sans"/>
               </a:defRPr>
@@ -7904,7 +7904,7 @@
             <a:pPr>
               <a:defRPr sz="3200" b="1">
                 <a:solidFill>
-                  <a:srgbClr val="1F2937"/>
+                  <a:srgbClr val="223043"/>
                 </a:solidFill>
                 <a:latin typeface="Liberation Sans"/>
               </a:defRPr>
@@ -7930,7 +7930,7 @@
             <a:avLst/>
           </a:prstGeom>
           <a:solidFill>
-            <a:srgbClr val="163B65"/>
+            <a:srgbClr val="5C82AD"/>
           </a:solidFill>
           <a:ln>
             <a:noFill/>
@@ -7983,7 +7983,7 @@
             <a:pPr algn="r">
               <a:defRPr sz="1100">
                 <a:solidFill>
-                  <a:srgbClr val="9CA3AF"/>
+                  <a:srgbClr val="94A3B6"/>
                 </a:solidFill>
                 <a:latin typeface="Liberation Sans"/>
               </a:defRPr>
@@ -8009,11 +8009,11 @@
             <a:avLst/>
           </a:prstGeom>
           <a:solidFill>
-            <a:srgbClr val="E67E22"/>
+            <a:srgbClr val="D69A68"/>
           </a:solidFill>
           <a:ln w="12700">
             <a:solidFill>
-              <a:srgbClr val="E67E22"/>
+              <a:srgbClr val="D69A68"/>
             </a:solidFill>
           </a:ln>
         </p:spPr>
@@ -8065,7 +8065,7 @@
           </a:prstGeom>
           <a:ln w="19050">
             <a:solidFill>
-              <a:srgbClr val="163B65"/>
+              <a:srgbClr val="5C82AD"/>
             </a:solidFill>
             <a:tailEnd type="triangle" w="med" len="med"/>
           </a:ln>
@@ -8100,11 +8100,11 @@
             <a:avLst/>
           </a:prstGeom>
           <a:solidFill>
-            <a:srgbClr val="5B84B1"/>
+            <a:srgbClr val="8FAAC8"/>
           </a:solidFill>
           <a:ln w="12700">
             <a:solidFill>
-              <a:srgbClr val="5B84B1"/>
+              <a:srgbClr val="8FAAC8"/>
             </a:solidFill>
           </a:ln>
         </p:spPr>
@@ -8156,7 +8156,7 @@
           </a:prstGeom>
           <a:ln w="19050">
             <a:solidFill>
-              <a:srgbClr val="163B65"/>
+              <a:srgbClr val="5C82AD"/>
             </a:solidFill>
             <a:tailEnd type="triangle" w="med" len="med"/>
           </a:ln>
@@ -8191,11 +8191,11 @@
             <a:avLst/>
           </a:prstGeom>
           <a:solidFill>
-            <a:srgbClr val="1F8A70"/>
+            <a:srgbClr val="7FA195"/>
           </a:solidFill>
           <a:ln w="12700">
             <a:solidFill>
-              <a:srgbClr val="1F8A70"/>
+              <a:srgbClr val="7FA195"/>
             </a:solidFill>
           </a:ln>
         </p:spPr>
@@ -8246,7 +8246,7 @@
             <a:avLst/>
           </a:prstGeom>
           <a:solidFill>
-            <a:srgbClr val="C44900"/>
+            <a:srgbClr val="C98A78"/>
           </a:solidFill>
           <a:ln>
             <a:noFill/>
@@ -8309,7 +8309,7 @@
             <a:pPr algn="l">
               <a:defRPr sz="2000" b="1" i="0">
                 <a:solidFill>
-                  <a:srgbClr val="1F2937"/>
+                  <a:srgbClr val="223043"/>
                 </a:solidFill>
                 <a:latin typeface="Liberation Sans"/>
               </a:defRPr>
@@ -8335,7 +8335,7 @@
             <a:avLst/>
           </a:prstGeom>
           <a:solidFill>
-            <a:srgbClr val="D97706"/>
+            <a:srgbClr val="D8A86A"/>
           </a:solidFill>
           <a:ln>
             <a:noFill/>
@@ -8398,7 +8398,7 @@
             <a:pPr algn="l">
               <a:defRPr sz="2000" b="1" i="0">
                 <a:solidFill>
-                  <a:srgbClr val="1F2937"/>
+                  <a:srgbClr val="223043"/>
                 </a:solidFill>
                 <a:latin typeface="Liberation Sans"/>
               </a:defRPr>
@@ -8424,11 +8424,11 @@
             <a:avLst/>
           </a:prstGeom>
           <a:solidFill>
-            <a:srgbClr val="163B65"/>
+            <a:srgbClr val="5C82AD"/>
           </a:solidFill>
           <a:ln w="12700">
             <a:solidFill>
-              <a:srgbClr val="163B65"/>
+              <a:srgbClr val="5C82AD"/>
             </a:solidFill>
           </a:ln>
         </p:spPr>
@@ -8479,7 +8479,7 @@
             <a:pPr algn="l">
               <a:defRPr sz="1800" b="1" i="0">
                 <a:solidFill>
-                  <a:srgbClr val="163B65"/>
+                  <a:srgbClr val="5C82AD"/>
                 </a:solidFill>
                 <a:latin typeface="Liberation Sans"/>
               </a:defRPr>
@@ -8515,7 +8515,7 @@
             <a:pPr algn="l">
               <a:defRPr sz="1400" b="0" i="0">
                 <a:solidFill>
-                  <a:srgbClr val="1F2937"/>
+                  <a:srgbClr val="223043"/>
                 </a:solidFill>
                 <a:latin typeface="Liberation Sans"/>
               </a:defRPr>
@@ -8551,7 +8551,7 @@
             <a:pPr algn="l">
               <a:defRPr sz="1800" b="0" i="1">
                 <a:solidFill>
-                  <a:srgbClr val="6B7280"/>
+                  <a:srgbClr val="647489"/>
                 </a:solidFill>
                 <a:latin typeface="Liberation Sans"/>
               </a:defRPr>
@@ -9555,7 +9555,7 @@
             <a:pPr>
               <a:defRPr sz="3200" b="1">
                 <a:solidFill>
-                  <a:srgbClr val="1F2937"/>
+                  <a:srgbClr val="223043"/>
                 </a:solidFill>
                 <a:latin typeface="Liberation Sans"/>
               </a:defRPr>
@@ -9581,7 +9581,7 @@
             <a:avLst/>
           </a:prstGeom>
           <a:solidFill>
-            <a:srgbClr val="163B65"/>
+            <a:srgbClr val="5C82AD"/>
           </a:solidFill>
           <a:ln>
             <a:noFill/>
@@ -9634,7 +9634,7 @@
             <a:pPr algn="r">
               <a:defRPr sz="1100">
                 <a:solidFill>
-                  <a:srgbClr val="9CA3AF"/>
+                  <a:srgbClr val="94A3B6"/>
                 </a:solidFill>
                 <a:latin typeface="Liberation Sans"/>
               </a:defRPr>
@@ -9660,7 +9660,7 @@
             <a:avLst/>
           </a:prstGeom>
           <a:solidFill>
-            <a:srgbClr val="5B84B1"/>
+            <a:srgbClr val="8FAAC8"/>
           </a:solidFill>
           <a:ln>
             <a:noFill/>
@@ -9713,7 +9713,7 @@
             <a:avLst/>
           </a:prstGeom>
           <a:solidFill>
-            <a:srgbClr val="5B84B1"/>
+            <a:srgbClr val="8FAAC8"/>
           </a:solidFill>
           <a:ln>
             <a:noFill/>
@@ -9776,7 +9776,7 @@
             <a:pPr algn="l">
               <a:defRPr sz="2000" b="1" i="0">
                 <a:solidFill>
-                  <a:srgbClr val="1F2937"/>
+                  <a:srgbClr val="223043"/>
                 </a:solidFill>
                 <a:latin typeface="Liberation Sans"/>
               </a:defRPr>
@@ -9802,11 +9802,11 @@
             <a:avLst/>
           </a:prstGeom>
           <a:solidFill>
-            <a:srgbClr val="5B84B1"/>
+            <a:srgbClr val="8FAAC8"/>
           </a:solidFill>
           <a:ln w="12700">
             <a:solidFill>
-              <a:srgbClr val="5B84B1"/>
+              <a:srgbClr val="8FAAC8"/>
             </a:solidFill>
           </a:ln>
         </p:spPr>
@@ -9857,7 +9857,7 @@
             <a:pPr algn="l">
               <a:defRPr sz="1800" b="1" i="0">
                 <a:solidFill>
-                  <a:srgbClr val="5B84B1"/>
+                  <a:srgbClr val="8FAAC8"/>
                 </a:solidFill>
                 <a:latin typeface="Liberation Sans"/>
               </a:defRPr>
@@ -9893,7 +9893,7 @@
             <a:pPr algn="l">
               <a:defRPr sz="1400" b="0" i="0">
                 <a:solidFill>
-                  <a:srgbClr val="1F2937"/>
+                  <a:srgbClr val="223043"/>
                 </a:solidFill>
                 <a:latin typeface="Liberation Sans"/>
               </a:defRPr>
@@ -9919,7 +9919,7 @@
             <a:avLst/>
           </a:prstGeom>
           <a:solidFill>
-            <a:srgbClr val="D97706"/>
+            <a:srgbClr val="D8A86A"/>
           </a:solidFill>
           <a:ln>
             <a:noFill/>
@@ -9972,7 +9972,7 @@
             <a:avLst/>
           </a:prstGeom>
           <a:solidFill>
-            <a:srgbClr val="D97706"/>
+            <a:srgbClr val="D8A86A"/>
           </a:solidFill>
           <a:ln>
             <a:noFill/>
@@ -10035,7 +10035,7 @@
             <a:pPr algn="l">
               <a:defRPr sz="2000" b="1" i="0">
                 <a:solidFill>
-                  <a:srgbClr val="1F2937"/>
+                  <a:srgbClr val="223043"/>
                 </a:solidFill>
                 <a:latin typeface="Liberation Sans"/>
               </a:defRPr>
@@ -10061,11 +10061,11 @@
             <a:avLst/>
           </a:prstGeom>
           <a:solidFill>
-            <a:srgbClr val="D97706"/>
+            <a:srgbClr val="D8A86A"/>
           </a:solidFill>
           <a:ln w="12700">
             <a:solidFill>
-              <a:srgbClr val="D97706"/>
+              <a:srgbClr val="D8A86A"/>
             </a:solidFill>
           </a:ln>
         </p:spPr>
@@ -10116,7 +10116,7 @@
             <a:pPr algn="l">
               <a:defRPr sz="1800" b="1" i="0">
                 <a:solidFill>
-                  <a:srgbClr val="D97706"/>
+                  <a:srgbClr val="D8A86A"/>
                 </a:solidFill>
                 <a:latin typeface="Liberation Sans"/>
               </a:defRPr>
@@ -10152,7 +10152,7 @@
             <a:pPr algn="l">
               <a:defRPr sz="1400" b="0" i="0">
                 <a:solidFill>
-                  <a:srgbClr val="1F2937"/>
+                  <a:srgbClr val="223043"/>
                 </a:solidFill>
                 <a:latin typeface="Liberation Sans"/>
               </a:defRPr>
@@ -10178,11 +10178,11 @@
             <a:avLst/>
           </a:prstGeom>
           <a:solidFill>
-            <a:srgbClr val="C44900"/>
+            <a:srgbClr val="C98A78"/>
           </a:solidFill>
           <a:ln w="12700">
             <a:solidFill>
-              <a:srgbClr val="C44900"/>
+              <a:srgbClr val="C98A78"/>
             </a:solidFill>
           </a:ln>
         </p:spPr>
@@ -10233,7 +10233,7 @@
             <a:pPr algn="l">
               <a:defRPr sz="1800" b="1" i="0">
                 <a:solidFill>
-                  <a:srgbClr val="C44900"/>
+                  <a:srgbClr val="C98A78"/>
                 </a:solidFill>
                 <a:latin typeface="Liberation Sans"/>
               </a:defRPr>
@@ -10269,7 +10269,7 @@
             <a:pPr algn="l">
               <a:defRPr sz="1400" b="0" i="0">
                 <a:solidFill>
-                  <a:srgbClr val="1F2937"/>
+                  <a:srgbClr val="223043"/>
                 </a:solidFill>
                 <a:latin typeface="Liberation Sans"/>
               </a:defRPr>
@@ -10305,7 +10305,7 @@
             <a:pPr algn="l">
               <a:defRPr sz="1800" b="0" i="1">
                 <a:solidFill>
-                  <a:srgbClr val="6B7280"/>
+                  <a:srgbClr val="647489"/>
                 </a:solidFill>
                 <a:latin typeface="Liberation Sans"/>
               </a:defRPr>
@@ -11840,7 +11840,7 @@
             <a:pPr>
               <a:defRPr sz="3200" b="1">
                 <a:solidFill>
-                  <a:srgbClr val="1F2937"/>
+                  <a:srgbClr val="223043"/>
                 </a:solidFill>
                 <a:latin typeface="Liberation Sans"/>
               </a:defRPr>
@@ -11866,7 +11866,7 @@
             <a:avLst/>
           </a:prstGeom>
           <a:solidFill>
-            <a:srgbClr val="163B65"/>
+            <a:srgbClr val="5C82AD"/>
           </a:solidFill>
           <a:ln>
             <a:noFill/>
@@ -11919,7 +11919,7 @@
             <a:pPr algn="r">
               <a:defRPr sz="1100">
                 <a:solidFill>
-                  <a:srgbClr val="9CA3AF"/>
+                  <a:srgbClr val="94A3B6"/>
                 </a:solidFill>
                 <a:latin typeface="Liberation Sans"/>
               </a:defRPr>
@@ -11945,7 +11945,7 @@
             <a:avLst/>
           </a:prstGeom>
           <a:solidFill>
-            <a:srgbClr val="C44900"/>
+            <a:srgbClr val="C98A78"/>
           </a:solidFill>
           <a:ln>
             <a:noFill/>
@@ -11998,11 +11998,11 @@
             <a:avLst/>
           </a:prstGeom>
           <a:solidFill>
-            <a:srgbClr val="EEF2F7"/>
+            <a:srgbClr val="F1F5FA"/>
           </a:solidFill>
           <a:ln w="12700">
             <a:solidFill>
-              <a:srgbClr val="D7DFE8"/>
+              <a:srgbClr val="D8E0EA"/>
             </a:solidFill>
           </a:ln>
         </p:spPr>
@@ -12027,7 +12027,7 @@
             <a:pPr algn="ctr">
               <a:defRPr sz="1800" b="0">
                 <a:solidFill>
-                  <a:srgbClr val="1F2937"/>
+                  <a:srgbClr val="223043"/>
                 </a:solidFill>
                 <a:latin typeface="Liberation Sans"/>
               </a:defRPr>
@@ -12054,7 +12054,7 @@
           </a:prstGeom>
           <a:ln w="19050">
             <a:solidFill>
-              <a:srgbClr val="9CA3AF"/>
+              <a:srgbClr val="94A3B6"/>
             </a:solidFill>
             <a:tailEnd type="triangle" w="med" len="med"/>
           </a:ln>
@@ -12089,11 +12089,11 @@
             <a:avLst/>
           </a:prstGeom>
           <a:solidFill>
-            <a:srgbClr val="C44900"/>
+            <a:srgbClr val="C98A78"/>
           </a:solidFill>
           <a:ln w="12700">
             <a:solidFill>
-              <a:srgbClr val="D7DFE8"/>
+              <a:srgbClr val="D8E0EA"/>
             </a:solidFill>
           </a:ln>
         </p:spPr>
@@ -12118,7 +12118,7 @@
             <a:pPr algn="ctr">
               <a:defRPr sz="1800" b="0">
                 <a:solidFill>
-                  <a:srgbClr val="1F2937"/>
+                  <a:srgbClr val="223043"/>
                 </a:solidFill>
                 <a:latin typeface="Liberation Sans"/>
               </a:defRPr>
@@ -12145,7 +12145,7 @@
           </a:prstGeom>
           <a:ln w="19050">
             <a:solidFill>
-              <a:srgbClr val="9CA3AF"/>
+              <a:srgbClr val="94A3B6"/>
             </a:solidFill>
             <a:tailEnd type="triangle" w="med" len="med"/>
           </a:ln>
@@ -12180,11 +12180,11 @@
             <a:avLst/>
           </a:prstGeom>
           <a:solidFill>
-            <a:srgbClr val="EEF2F7"/>
+            <a:srgbClr val="F1F5FA"/>
           </a:solidFill>
           <a:ln w="12700">
             <a:solidFill>
-              <a:srgbClr val="D7DFE8"/>
+              <a:srgbClr val="D8E0EA"/>
             </a:solidFill>
           </a:ln>
         </p:spPr>
@@ -12209,7 +12209,7 @@
             <a:pPr algn="ctr">
               <a:defRPr sz="1800" b="0">
                 <a:solidFill>
-                  <a:srgbClr val="1F2937"/>
+                  <a:srgbClr val="223043"/>
                 </a:solidFill>
                 <a:latin typeface="Liberation Sans"/>
               </a:defRPr>
@@ -12235,11 +12235,11 @@
             <a:avLst/>
           </a:prstGeom>
           <a:solidFill>
-            <a:srgbClr val="C44900"/>
+            <a:srgbClr val="C98A78"/>
           </a:solidFill>
           <a:ln w="12700">
             <a:solidFill>
-              <a:srgbClr val="C44900"/>
+              <a:srgbClr val="C98A78"/>
             </a:solidFill>
           </a:ln>
         </p:spPr>
@@ -12290,7 +12290,7 @@
             <a:pPr algn="l">
               <a:defRPr sz="1800" b="1" i="0">
                 <a:solidFill>
-                  <a:srgbClr val="C44900"/>
+                  <a:srgbClr val="C98A78"/>
                 </a:solidFill>
                 <a:latin typeface="Liberation Sans"/>
               </a:defRPr>
@@ -12326,7 +12326,7 @@
             <a:pPr algn="l">
               <a:defRPr sz="1400" b="0" i="0">
                 <a:solidFill>
-                  <a:srgbClr val="1F2937"/>
+                  <a:srgbClr val="223043"/>
                 </a:solidFill>
                 <a:latin typeface="Liberation Sans"/>
               </a:defRPr>
@@ -12352,7 +12352,7 @@
             <a:avLst/>
           </a:prstGeom>
           <a:solidFill>
-            <a:srgbClr val="1F8A70"/>
+            <a:srgbClr val="7FA195"/>
           </a:solidFill>
           <a:ln>
             <a:noFill/>
@@ -12405,11 +12405,11 @@
             <a:avLst/>
           </a:prstGeom>
           <a:solidFill>
-            <a:srgbClr val="E67E22"/>
+            <a:srgbClr val="D69A68"/>
           </a:solidFill>
           <a:ln w="12700">
             <a:solidFill>
-              <a:srgbClr val="D7DFE8"/>
+              <a:srgbClr val="D8E0EA"/>
             </a:solidFill>
           </a:ln>
         </p:spPr>
@@ -12434,7 +12434,7 @@
             <a:pPr algn="ctr">
               <a:defRPr sz="1800" b="0">
                 <a:solidFill>
-                  <a:srgbClr val="1F2937"/>
+                  <a:srgbClr val="223043"/>
                 </a:solidFill>
                 <a:latin typeface="Liberation Sans"/>
               </a:defRPr>
@@ -12461,7 +12461,7 @@
           </a:prstGeom>
           <a:ln w="19050">
             <a:solidFill>
-              <a:srgbClr val="9CA3AF"/>
+              <a:srgbClr val="94A3B6"/>
             </a:solidFill>
             <a:tailEnd type="triangle" w="med" len="med"/>
           </a:ln>
@@ -12496,11 +12496,11 @@
             <a:avLst/>
           </a:prstGeom>
           <a:solidFill>
-            <a:srgbClr val="5B84B1"/>
+            <a:srgbClr val="8FAAC8"/>
           </a:solidFill>
           <a:ln w="12700">
             <a:solidFill>
-              <a:srgbClr val="D7DFE8"/>
+              <a:srgbClr val="D8E0EA"/>
             </a:solidFill>
           </a:ln>
         </p:spPr>
@@ -12525,7 +12525,7 @@
             <a:pPr algn="ctr">
               <a:defRPr sz="1800" b="0">
                 <a:solidFill>
-                  <a:srgbClr val="1F2937"/>
+                  <a:srgbClr val="223043"/>
                 </a:solidFill>
                 <a:latin typeface="Liberation Sans"/>
               </a:defRPr>
@@ -12552,7 +12552,7 @@
           </a:prstGeom>
           <a:ln w="19050">
             <a:solidFill>
-              <a:srgbClr val="9CA3AF"/>
+              <a:srgbClr val="94A3B6"/>
             </a:solidFill>
             <a:tailEnd type="triangle" w="med" len="med"/>
           </a:ln>
@@ -12587,11 +12587,11 @@
             <a:avLst/>
           </a:prstGeom>
           <a:solidFill>
-            <a:srgbClr val="1F8A70"/>
+            <a:srgbClr val="7FA195"/>
           </a:solidFill>
           <a:ln w="12700">
             <a:solidFill>
-              <a:srgbClr val="D7DFE8"/>
+              <a:srgbClr val="D8E0EA"/>
             </a:solidFill>
           </a:ln>
         </p:spPr>
@@ -12616,7 +12616,7 @@
             <a:pPr algn="ctr">
               <a:defRPr sz="1800" b="0">
                 <a:solidFill>
-                  <a:srgbClr val="1F2937"/>
+                  <a:srgbClr val="223043"/>
                 </a:solidFill>
                 <a:latin typeface="Liberation Sans"/>
               </a:defRPr>
@@ -12642,11 +12642,11 @@
             <a:avLst/>
           </a:prstGeom>
           <a:solidFill>
-            <a:srgbClr val="1F8A70"/>
+            <a:srgbClr val="7FA195"/>
           </a:solidFill>
           <a:ln w="12700">
             <a:solidFill>
-              <a:srgbClr val="1F8A70"/>
+              <a:srgbClr val="7FA195"/>
             </a:solidFill>
           </a:ln>
         </p:spPr>
@@ -12697,7 +12697,7 @@
             <a:pPr algn="l">
               <a:defRPr sz="1800" b="1" i="0">
                 <a:solidFill>
-                  <a:srgbClr val="1F8A70"/>
+                  <a:srgbClr val="7FA195"/>
                 </a:solidFill>
                 <a:latin typeface="Liberation Sans"/>
               </a:defRPr>
@@ -12733,7 +12733,7 @@
             <a:pPr algn="l">
               <a:defRPr sz="1400" b="0" i="0">
                 <a:solidFill>
-                  <a:srgbClr val="1F2937"/>
+                  <a:srgbClr val="223043"/>
                 </a:solidFill>
                 <a:latin typeface="Liberation Sans"/>
               </a:defRPr>
@@ -12769,7 +12769,7 @@
             <a:pPr algn="l">
               <a:defRPr sz="1800" b="0" i="1">
                 <a:solidFill>
-                  <a:srgbClr val="6B7280"/>
+                  <a:srgbClr val="647489"/>
                 </a:solidFill>
                 <a:latin typeface="Liberation Sans"/>
               </a:defRPr>
@@ -15010,7 +15010,7 @@
             <a:pPr>
               <a:defRPr sz="3200" b="1">
                 <a:solidFill>
-                  <a:srgbClr val="1F2937"/>
+                  <a:srgbClr val="223043"/>
                 </a:solidFill>
                 <a:latin typeface="Liberation Sans"/>
               </a:defRPr>
@@ -15036,7 +15036,7 @@
             <a:avLst/>
           </a:prstGeom>
           <a:solidFill>
-            <a:srgbClr val="163B65"/>
+            <a:srgbClr val="5C82AD"/>
           </a:solidFill>
           <a:ln>
             <a:noFill/>
@@ -15089,7 +15089,7 @@
             <a:pPr algn="r">
               <a:defRPr sz="1100">
                 <a:solidFill>
-                  <a:srgbClr val="9CA3AF"/>
+                  <a:srgbClr val="94A3B6"/>
                 </a:solidFill>
                 <a:latin typeface="Liberation Sans"/>
               </a:defRPr>
@@ -15115,7 +15115,7 @@
             <a:avLst/>
           </a:prstGeom>
           <a:solidFill>
-            <a:srgbClr val="163B65"/>
+            <a:srgbClr val="5C82AD"/>
           </a:solidFill>
           <a:ln>
             <a:noFill/>
@@ -15178,7 +15178,7 @@
             <a:pPr algn="l">
               <a:defRPr sz="2000" b="1" i="0">
                 <a:solidFill>
-                  <a:srgbClr val="1F2937"/>
+                  <a:srgbClr val="223043"/>
                 </a:solidFill>
                 <a:latin typeface="Liberation Sans"/>
               </a:defRPr>
@@ -15204,7 +15204,7 @@
             <a:avLst/>
           </a:prstGeom>
           <a:solidFill>
-            <a:srgbClr val="E67E22"/>
+            <a:srgbClr val="D69A68"/>
           </a:solidFill>
           <a:ln>
             <a:noFill/>
@@ -15267,7 +15267,7 @@
             <a:pPr algn="l">
               <a:defRPr sz="2000" b="1" i="0">
                 <a:solidFill>
-                  <a:srgbClr val="1F2937"/>
+                  <a:srgbClr val="223043"/>
                 </a:solidFill>
                 <a:latin typeface="Liberation Sans"/>
               </a:defRPr>
@@ -15293,7 +15293,7 @@
             <a:avLst/>
           </a:prstGeom>
           <a:solidFill>
-            <a:srgbClr val="1F8A70"/>
+            <a:srgbClr val="7FA195"/>
           </a:solidFill>
           <a:ln>
             <a:noFill/>
@@ -15356,7 +15356,7 @@
             <a:pPr algn="l">
               <a:defRPr sz="2000" b="1" i="0">
                 <a:solidFill>
-                  <a:srgbClr val="1F2937"/>
+                  <a:srgbClr val="223043"/>
                 </a:solidFill>
                 <a:latin typeface="Liberation Sans"/>
               </a:defRPr>
@@ -15382,11 +15382,11 @@
             <a:avLst/>
           </a:prstGeom>
           <a:solidFill>
-            <a:srgbClr val="E67E22"/>
+            <a:srgbClr val="D69A68"/>
           </a:solidFill>
           <a:ln w="12700">
             <a:solidFill>
-              <a:srgbClr val="D7DFE8"/>
+              <a:srgbClr val="D8E0EA"/>
             </a:solidFill>
           </a:ln>
         </p:spPr>
@@ -15411,7 +15411,7 @@
             <a:pPr algn="ctr">
               <a:defRPr sz="1800" b="0">
                 <a:solidFill>
-                  <a:srgbClr val="1F2937"/>
+                  <a:srgbClr val="223043"/>
                 </a:solidFill>
                 <a:latin typeface="Liberation Sans"/>
               </a:defRPr>
@@ -15438,7 +15438,7 @@
           </a:prstGeom>
           <a:ln w="19050">
             <a:solidFill>
-              <a:srgbClr val="9CA3AF"/>
+              <a:srgbClr val="94A3B6"/>
             </a:solidFill>
             <a:tailEnd type="triangle" w="med" len="med"/>
           </a:ln>
@@ -15473,11 +15473,11 @@
             <a:avLst/>
           </a:prstGeom>
           <a:solidFill>
-            <a:srgbClr val="5B84B1"/>
+            <a:srgbClr val="8FAAC8"/>
           </a:solidFill>
           <a:ln w="12700">
             <a:solidFill>
-              <a:srgbClr val="D7DFE8"/>
+              <a:srgbClr val="D8E0EA"/>
             </a:solidFill>
           </a:ln>
         </p:spPr>
@@ -15502,7 +15502,7 @@
             <a:pPr algn="ctr">
               <a:defRPr sz="1800" b="0">
                 <a:solidFill>
-                  <a:srgbClr val="1F2937"/>
+                  <a:srgbClr val="223043"/>
                 </a:solidFill>
                 <a:latin typeface="Liberation Sans"/>
               </a:defRPr>
@@ -15529,7 +15529,7 @@
           </a:prstGeom>
           <a:ln w="19050">
             <a:solidFill>
-              <a:srgbClr val="9CA3AF"/>
+              <a:srgbClr val="94A3B6"/>
             </a:solidFill>
             <a:tailEnd type="triangle" w="med" len="med"/>
           </a:ln>
@@ -15564,11 +15564,11 @@
             <a:avLst/>
           </a:prstGeom>
           <a:solidFill>
-            <a:srgbClr val="1F8A70"/>
+            <a:srgbClr val="7FA195"/>
           </a:solidFill>
           <a:ln w="12700">
             <a:solidFill>
-              <a:srgbClr val="D7DFE8"/>
+              <a:srgbClr val="D8E0EA"/>
             </a:solidFill>
           </a:ln>
         </p:spPr>
@@ -15593,7 +15593,7 @@
             <a:pPr algn="ctr">
               <a:defRPr sz="1800" b="0">
                 <a:solidFill>
-                  <a:srgbClr val="1F2937"/>
+                  <a:srgbClr val="223043"/>
                 </a:solidFill>
                 <a:latin typeface="Liberation Sans"/>
               </a:defRPr>
@@ -15620,7 +15620,7 @@
           </a:prstGeom>
           <a:ln w="19050">
             <a:solidFill>
-              <a:srgbClr val="9CA3AF"/>
+              <a:srgbClr val="94A3B6"/>
             </a:solidFill>
             <a:tailEnd type="triangle" w="med" len="med"/>
           </a:ln>
@@ -15655,11 +15655,11 @@
             <a:avLst/>
           </a:prstGeom>
           <a:solidFill>
-            <a:srgbClr val="163B65"/>
+            <a:srgbClr val="5C82AD"/>
           </a:solidFill>
           <a:ln w="12700">
             <a:solidFill>
-              <a:srgbClr val="D7DFE8"/>
+              <a:srgbClr val="D8E0EA"/>
             </a:solidFill>
           </a:ln>
         </p:spPr>
@@ -15684,7 +15684,7 @@
             <a:pPr algn="ctr">
               <a:defRPr sz="1800" b="0">
                 <a:solidFill>
-                  <a:srgbClr val="1F2937"/>
+                  <a:srgbClr val="223043"/>
                 </a:solidFill>
                 <a:latin typeface="Liberation Sans"/>
               </a:defRPr>
@@ -15710,11 +15710,11 @@
             <a:avLst/>
           </a:prstGeom>
           <a:solidFill>
-            <a:srgbClr val="163B65"/>
+            <a:srgbClr val="5C82AD"/>
           </a:solidFill>
           <a:ln w="12700">
             <a:solidFill>
-              <a:srgbClr val="163B65"/>
+              <a:srgbClr val="5C82AD"/>
             </a:solidFill>
           </a:ln>
         </p:spPr>
@@ -15765,7 +15765,7 @@
             <a:pPr algn="l">
               <a:defRPr sz="1800" b="1" i="0">
                 <a:solidFill>
-                  <a:srgbClr val="163B65"/>
+                  <a:srgbClr val="5C82AD"/>
                 </a:solidFill>
                 <a:latin typeface="Liberation Sans"/>
               </a:defRPr>
@@ -15801,7 +15801,7 @@
             <a:pPr algn="l">
               <a:defRPr sz="1400" b="0" i="0">
                 <a:solidFill>
-                  <a:srgbClr val="1F2937"/>
+                  <a:srgbClr val="223043"/>
                 </a:solidFill>
                 <a:latin typeface="Liberation Sans"/>
               </a:defRPr>
@@ -15837,7 +15837,7 @@
             <a:pPr algn="l">
               <a:defRPr sz="1800" b="0" i="1">
                 <a:solidFill>
-                  <a:srgbClr val="6B7280"/>
+                  <a:srgbClr val="647489"/>
                 </a:solidFill>
                 <a:latin typeface="Liberation Sans"/>
               </a:defRPr>
@@ -17062,7 +17062,7 @@
             <a:pPr>
               <a:defRPr sz="3200" b="1">
                 <a:solidFill>
-                  <a:srgbClr val="1F2937"/>
+                  <a:srgbClr val="223043"/>
                 </a:solidFill>
                 <a:latin typeface="Liberation Sans"/>
               </a:defRPr>
@@ -17088,7 +17088,7 @@
             <a:avLst/>
           </a:prstGeom>
           <a:solidFill>
-            <a:srgbClr val="163B65"/>
+            <a:srgbClr val="5C82AD"/>
           </a:solidFill>
           <a:ln>
             <a:noFill/>
@@ -17141,7 +17141,7 @@
             <a:pPr algn="r">
               <a:defRPr sz="1100">
                 <a:solidFill>
-                  <a:srgbClr val="9CA3AF"/>
+                  <a:srgbClr val="94A3B6"/>
                 </a:solidFill>
                 <a:latin typeface="Liberation Sans"/>
               </a:defRPr>
@@ -17161,17 +17161,70 @@
         <p:spPr>
           <a:xfrm>
             <a:off x="731520" y="1371600"/>
+            <a:ext cx="10728655" cy="1152144"/>
+          </a:xfrm>
+          <a:prstGeom prst="roundRect">
+            <a:avLst/>
+          </a:prstGeom>
+          <a:solidFill>
+            <a:srgbClr val="D69A68"/>
+          </a:solidFill>
+          <a:ln>
+            <a:noFill/>
+          </a:ln>
+        </p:spPr>
+        <p:style>
+          <a:lnRef idx="1">
+            <a:schemeClr val="accent1"/>
+          </a:lnRef>
+          <a:fillRef idx="3">
+            <a:schemeClr val="accent1"/>
+          </a:fillRef>
+          <a:effectRef idx="2">
+            <a:schemeClr val="accent1"/>
+          </a:effectRef>
+          <a:fontRef idx="minor">
+            <a:schemeClr val="lt1"/>
+          </a:fontRef>
+        </p:style>
+        <p:txBody>
+          <a:bodyPr rtlCol="0" anchor="ctr" wrap="square"/>
+          <a:lstStyle/>
+          <a:p>
+            <a:pPr algn="ctr">
+              <a:defRPr sz="1400" b="1">
+                <a:solidFill>
+                  <a:srgbClr val="FFFFFF"/>
+                </a:solidFill>
+                <a:latin typeface="Liberation Sans"/>
+              </a:defRPr>
+            </a:pPr>
+            <a:r>
+              <a:t>Adjacent evidence</a:t>
+            </a:r>
+          </a:p>
+        </p:txBody>
+      </p:sp>
+      <p:sp>
+        <p:nvSpPr>
+          <p:cNvPr id="6" name="Rounded Rectangle 5"/>
+          <p:cNvSpPr/>
+          <p:nvPr/>
+        </p:nvSpPr>
+        <p:spPr>
+          <a:xfrm>
+            <a:off x="731520" y="2743200"/>
             <a:ext cx="1415099" cy="1005840"/>
           </a:xfrm>
           <a:prstGeom prst="roundRect">
             <a:avLst/>
           </a:prstGeom>
           <a:solidFill>
-            <a:srgbClr val="5B84B1"/>
+            <a:srgbClr val="8FAAC8"/>
           </a:solidFill>
           <a:ln w="12700">
             <a:solidFill>
-              <a:srgbClr val="5B84B1"/>
+              <a:srgbClr val="8FAAC8"/>
             </a:solidFill>
           </a:ln>
         </p:spPr>
@@ -17209,13 +17262,13 @@
       </p:sp>
       <p:cxnSp>
         <p:nvCxnSpPr>
-          <p:cNvPr id="6" name="Connector 5"/>
+          <p:cNvPr id="7" name="Connector 6"/>
           <p:cNvCxnSpPr/>
           <p:nvPr/>
         </p:nvCxnSpPr>
         <p:spPr>
           <a:xfrm>
-            <a:off x="2146619" y="1874519"/>
+            <a:off x="2146619" y="3246120"/>
             <a:ext cx="1689419" cy="0"/>
           </a:xfrm>
           <a:prstGeom prst="line">
@@ -17223,7 +17276,7 @@
           </a:prstGeom>
           <a:ln w="19050">
             <a:solidFill>
-              <a:srgbClr val="163B65"/>
+              <a:srgbClr val="5C82AD"/>
             </a:solidFill>
             <a:tailEnd type="triangle" w="med" len="med"/>
           </a:ln>
@@ -17245,24 +17298,24 @@
       </p:cxnSp>
       <p:sp>
         <p:nvSpPr>
-          <p:cNvPr id="7" name="Rounded Rectangle 6"/>
+          <p:cNvPr id="8" name="Rounded Rectangle 7"/>
           <p:cNvSpPr/>
           <p:nvPr/>
         </p:nvSpPr>
         <p:spPr>
           <a:xfrm>
-            <a:off x="3836038" y="1371600"/>
+            <a:off x="3836038" y="2743200"/>
             <a:ext cx="1415099" cy="1005840"/>
           </a:xfrm>
           <a:prstGeom prst="roundRect">
             <a:avLst/>
           </a:prstGeom>
           <a:solidFill>
-            <a:srgbClr val="E67E22"/>
+            <a:srgbClr val="D69A68"/>
           </a:solidFill>
           <a:ln w="12700">
             <a:solidFill>
-              <a:srgbClr val="E67E22"/>
+              <a:srgbClr val="D69A68"/>
             </a:solidFill>
           </a:ln>
         </p:spPr>
@@ -17300,13 +17353,13 @@
       </p:sp>
       <p:cxnSp>
         <p:nvCxnSpPr>
-          <p:cNvPr id="8" name="Connector 7"/>
+          <p:cNvPr id="9" name="Connector 8"/>
           <p:cNvCxnSpPr/>
           <p:nvPr/>
         </p:nvCxnSpPr>
         <p:spPr>
           <a:xfrm>
-            <a:off x="5251137" y="1874519"/>
+            <a:off x="5251137" y="3246120"/>
             <a:ext cx="1689420" cy="0"/>
           </a:xfrm>
           <a:prstGeom prst="line">
@@ -17314,7 +17367,7 @@
           </a:prstGeom>
           <a:ln w="19050">
             <a:solidFill>
-              <a:srgbClr val="163B65"/>
+              <a:srgbClr val="5C82AD"/>
             </a:solidFill>
             <a:tailEnd type="triangle" w="med" len="med"/>
           </a:ln>
@@ -17336,24 +17389,24 @@
       </p:cxnSp>
       <p:sp>
         <p:nvSpPr>
-          <p:cNvPr id="9" name="Rounded Rectangle 8"/>
+          <p:cNvPr id="10" name="Rounded Rectangle 9"/>
           <p:cNvSpPr/>
           <p:nvPr/>
         </p:nvSpPr>
         <p:spPr>
           <a:xfrm>
-            <a:off x="6940557" y="1371600"/>
+            <a:off x="6940557" y="2743200"/>
             <a:ext cx="1415099" cy="1005840"/>
           </a:xfrm>
           <a:prstGeom prst="roundRect">
             <a:avLst/>
           </a:prstGeom>
           <a:solidFill>
-            <a:srgbClr val="163B65"/>
+            <a:srgbClr val="5C82AD"/>
           </a:solidFill>
           <a:ln w="12700">
             <a:solidFill>
-              <a:srgbClr val="163B65"/>
+              <a:srgbClr val="5C82AD"/>
             </a:solidFill>
           </a:ln>
         </p:spPr>
@@ -17391,13 +17444,13 @@
       </p:sp>
       <p:cxnSp>
         <p:nvCxnSpPr>
-          <p:cNvPr id="10" name="Connector 9"/>
+          <p:cNvPr id="11" name="Connector 10"/>
           <p:cNvCxnSpPr/>
           <p:nvPr/>
         </p:nvCxnSpPr>
         <p:spPr>
           <a:xfrm>
-            <a:off x="8355656" y="1874519"/>
+            <a:off x="8355656" y="3246120"/>
             <a:ext cx="1689419" cy="0"/>
           </a:xfrm>
           <a:prstGeom prst="line">
@@ -17405,7 +17458,7 @@
           </a:prstGeom>
           <a:ln w="19050">
             <a:solidFill>
-              <a:srgbClr val="163B65"/>
+              <a:srgbClr val="5C82AD"/>
             </a:solidFill>
             <a:tailEnd type="triangle" w="med" len="med"/>
           </a:ln>
@@ -17427,24 +17480,24 @@
       </p:cxnSp>
       <p:sp>
         <p:nvSpPr>
-          <p:cNvPr id="11" name="Rounded Rectangle 10"/>
+          <p:cNvPr id="12" name="Rounded Rectangle 11"/>
           <p:cNvSpPr/>
           <p:nvPr/>
         </p:nvSpPr>
         <p:spPr>
           <a:xfrm>
-            <a:off x="10045075" y="1371600"/>
+            <a:off x="10045075" y="2743200"/>
             <a:ext cx="1415099" cy="1005840"/>
           </a:xfrm>
           <a:prstGeom prst="roundRect">
             <a:avLst/>
           </a:prstGeom>
           <a:solidFill>
-            <a:srgbClr val="1F8A70"/>
+            <a:srgbClr val="7FA195"/>
           </a:solidFill>
           <a:ln w="12700">
             <a:solidFill>
-              <a:srgbClr val="1F8A70"/>
+              <a:srgbClr val="7FA195"/>
             </a:solidFill>
           </a:ln>
         </p:spPr>
@@ -17482,24 +17535,24 @@
       </p:sp>
       <p:sp>
         <p:nvSpPr>
-          <p:cNvPr id="12" name="Rectangle 11"/>
+          <p:cNvPr id="13" name="Rectangle 12"/>
           <p:cNvSpPr/>
           <p:nvPr/>
         </p:nvSpPr>
         <p:spPr>
           <a:xfrm>
-            <a:off x="731520" y="2596896"/>
-            <a:ext cx="54864" cy="1837943"/>
+            <a:off x="731520" y="3968496"/>
+            <a:ext cx="54864" cy="1152144"/>
           </a:xfrm>
           <a:prstGeom prst="rect">
             <a:avLst/>
           </a:prstGeom>
           <a:solidFill>
-            <a:srgbClr val="5B84B1"/>
+            <a:srgbClr val="8FAAC8"/>
           </a:solidFill>
           <a:ln w="12700">
             <a:solidFill>
-              <a:srgbClr val="5B84B1"/>
+              <a:srgbClr val="8FAAC8"/>
             </a:solidFill>
           </a:ln>
         </p:spPr>
@@ -17527,14 +17580,14 @@
       </p:sp>
       <p:sp>
         <p:nvSpPr>
-          <p:cNvPr id="13" name="TextBox 12"/>
+          <p:cNvPr id="14" name="TextBox 13"/>
           <p:cNvSpPr txBox="1"/>
           <p:nvPr/>
         </p:nvSpPr>
         <p:spPr>
           <a:xfrm>
-            <a:off x="923544" y="2596896"/>
-            <a:ext cx="3237890" cy="873251"/>
+            <a:off x="923544" y="3968496"/>
+            <a:ext cx="3237890" cy="530352"/>
           </a:xfrm>
           <a:prstGeom prst="rect">
             <a:avLst/>
@@ -17550,7 +17603,7 @@
             <a:pPr algn="l">
               <a:defRPr sz="1800" b="1" i="0">
                 <a:solidFill>
-                  <a:srgbClr val="5B84B1"/>
+                  <a:srgbClr val="8FAAC8"/>
                 </a:solidFill>
                 <a:latin typeface="Liberation Sans"/>
               </a:defRPr>
@@ -17563,14 +17616,14 @@
       </p:sp>
       <p:sp>
         <p:nvSpPr>
-          <p:cNvPr id="14" name="TextBox 13"/>
+          <p:cNvPr id="15" name="TextBox 14"/>
           <p:cNvSpPr txBox="1"/>
           <p:nvPr/>
         </p:nvSpPr>
         <p:spPr>
           <a:xfrm>
-            <a:off x="923544" y="3561587"/>
-            <a:ext cx="3237890" cy="873251"/>
+            <a:off x="923544" y="4590288"/>
+            <a:ext cx="3237890" cy="530352"/>
           </a:xfrm>
           <a:prstGeom prst="rect">
             <a:avLst/>
@@ -17586,7 +17639,7 @@
             <a:pPr algn="l">
               <a:defRPr sz="1400" b="0" i="0">
                 <a:solidFill>
-                  <a:srgbClr val="1F2937"/>
+                  <a:srgbClr val="223043"/>
                 </a:solidFill>
                 <a:latin typeface="Liberation Sans"/>
               </a:defRPr>
@@ -17599,24 +17652,24 @@
       </p:sp>
       <p:sp>
         <p:nvSpPr>
-          <p:cNvPr id="15" name="Rectangle 14"/>
+          <p:cNvPr id="16" name="Rectangle 15"/>
           <p:cNvSpPr/>
           <p:nvPr/>
         </p:nvSpPr>
         <p:spPr>
           <a:xfrm>
-            <a:off x="4380890" y="2596896"/>
-            <a:ext cx="54864" cy="1837943"/>
+            <a:off x="4380890" y="3968496"/>
+            <a:ext cx="54864" cy="1152144"/>
           </a:xfrm>
           <a:prstGeom prst="rect">
             <a:avLst/>
           </a:prstGeom>
           <a:solidFill>
-            <a:srgbClr val="E67E22"/>
+            <a:srgbClr val="D69A68"/>
           </a:solidFill>
           <a:ln w="12700">
             <a:solidFill>
-              <a:srgbClr val="E67E22"/>
+              <a:srgbClr val="D69A68"/>
             </a:solidFill>
           </a:ln>
         </p:spPr>
@@ -17644,14 +17697,14 @@
       </p:sp>
       <p:sp>
         <p:nvSpPr>
-          <p:cNvPr id="16" name="TextBox 15"/>
+          <p:cNvPr id="17" name="TextBox 16"/>
           <p:cNvSpPr txBox="1"/>
           <p:nvPr/>
         </p:nvSpPr>
         <p:spPr>
           <a:xfrm>
-            <a:off x="4572914" y="2596896"/>
-            <a:ext cx="3237890" cy="873251"/>
+            <a:off x="4572914" y="3968496"/>
+            <a:ext cx="3237890" cy="530352"/>
           </a:xfrm>
           <a:prstGeom prst="rect">
             <a:avLst/>
@@ -17667,7 +17720,7 @@
             <a:pPr algn="l">
               <a:defRPr sz="1800" b="1" i="0">
                 <a:solidFill>
-                  <a:srgbClr val="E67E22"/>
+                  <a:srgbClr val="D69A68"/>
                 </a:solidFill>
                 <a:latin typeface="Liberation Sans"/>
               </a:defRPr>
@@ -17680,14 +17733,14 @@
       </p:sp>
       <p:sp>
         <p:nvSpPr>
-          <p:cNvPr id="17" name="TextBox 16"/>
+          <p:cNvPr id="18" name="TextBox 17"/>
           <p:cNvSpPr txBox="1"/>
           <p:nvPr/>
         </p:nvSpPr>
         <p:spPr>
           <a:xfrm>
-            <a:off x="4572914" y="3561587"/>
-            <a:ext cx="3237890" cy="873251"/>
+            <a:off x="4572914" y="4590288"/>
+            <a:ext cx="3237890" cy="530352"/>
           </a:xfrm>
           <a:prstGeom prst="rect">
             <a:avLst/>
@@ -17703,7 +17756,7 @@
             <a:pPr algn="l">
               <a:defRPr sz="1400" b="0" i="0">
                 <a:solidFill>
-                  <a:srgbClr val="1F2937"/>
+                  <a:srgbClr val="223043"/>
                 </a:solidFill>
                 <a:latin typeface="Liberation Sans"/>
               </a:defRPr>
@@ -17716,24 +17769,24 @@
       </p:sp>
       <p:sp>
         <p:nvSpPr>
-          <p:cNvPr id="18" name="Rectangle 17"/>
+          <p:cNvPr id="19" name="Rectangle 18"/>
           <p:cNvSpPr/>
           <p:nvPr/>
         </p:nvSpPr>
         <p:spPr>
           <a:xfrm>
-            <a:off x="8030260" y="2596896"/>
-            <a:ext cx="54864" cy="1837943"/>
+            <a:off x="8030260" y="3968496"/>
+            <a:ext cx="54864" cy="1152144"/>
           </a:xfrm>
           <a:prstGeom prst="rect">
             <a:avLst/>
           </a:prstGeom>
           <a:solidFill>
-            <a:srgbClr val="1F8A70"/>
+            <a:srgbClr val="7FA195"/>
           </a:solidFill>
           <a:ln w="12700">
             <a:solidFill>
-              <a:srgbClr val="1F8A70"/>
+              <a:srgbClr val="7FA195"/>
             </a:solidFill>
           </a:ln>
         </p:spPr>
@@ -17761,14 +17814,14 @@
       </p:sp>
       <p:sp>
         <p:nvSpPr>
-          <p:cNvPr id="19" name="TextBox 18"/>
+          <p:cNvPr id="20" name="TextBox 19"/>
           <p:cNvSpPr txBox="1"/>
           <p:nvPr/>
         </p:nvSpPr>
         <p:spPr>
           <a:xfrm>
-            <a:off x="8222284" y="2596896"/>
-            <a:ext cx="3237890" cy="873251"/>
+            <a:off x="8222284" y="3968496"/>
+            <a:ext cx="3237890" cy="530352"/>
           </a:xfrm>
           <a:prstGeom prst="rect">
             <a:avLst/>
@@ -17784,7 +17837,7 @@
             <a:pPr algn="l">
               <a:defRPr sz="1800" b="1" i="0">
                 <a:solidFill>
-                  <a:srgbClr val="1F8A70"/>
+                  <a:srgbClr val="7FA195"/>
                 </a:solidFill>
                 <a:latin typeface="Liberation Sans"/>
               </a:defRPr>
@@ -17797,14 +17850,14 @@
       </p:sp>
       <p:sp>
         <p:nvSpPr>
-          <p:cNvPr id="20" name="TextBox 19"/>
+          <p:cNvPr id="21" name="TextBox 20"/>
           <p:cNvSpPr txBox="1"/>
           <p:nvPr/>
         </p:nvSpPr>
         <p:spPr>
           <a:xfrm>
-            <a:off x="8222284" y="3561587"/>
-            <a:ext cx="3237890" cy="873251"/>
+            <a:off x="8222284" y="4590288"/>
+            <a:ext cx="3237890" cy="530352"/>
           </a:xfrm>
           <a:prstGeom prst="rect">
             <a:avLst/>
@@ -17820,7 +17873,7 @@
             <a:pPr algn="l">
               <a:defRPr sz="1400" b="0" i="0">
                 <a:solidFill>
-                  <a:srgbClr val="1F2937"/>
+                  <a:srgbClr val="223043"/>
                 </a:solidFill>
                 <a:latin typeface="Liberation Sans"/>
               </a:defRPr>
@@ -17833,20 +17886,20 @@
       </p:sp>
       <p:sp>
         <p:nvSpPr>
-          <p:cNvPr id="21" name="Rounded Rectangle 20"/>
+          <p:cNvPr id="22" name="Rounded Rectangle 21"/>
           <p:cNvSpPr/>
           <p:nvPr/>
         </p:nvSpPr>
         <p:spPr>
           <a:xfrm>
-            <a:off x="731520" y="4654296"/>
-            <a:ext cx="3381146" cy="873251"/>
+            <a:off x="731520" y="5340096"/>
+            <a:ext cx="3381146" cy="530352"/>
           </a:xfrm>
           <a:prstGeom prst="roundRect">
             <a:avLst/>
           </a:prstGeom>
           <a:solidFill>
-            <a:srgbClr val="1F8A70"/>
+            <a:srgbClr val="7FA195"/>
           </a:solidFill>
           <a:ln>
             <a:noFill/>
@@ -17886,14 +17939,14 @@
       </p:sp>
       <p:sp>
         <p:nvSpPr>
-          <p:cNvPr id="22" name="TextBox 21"/>
+          <p:cNvPr id="23" name="TextBox 22"/>
           <p:cNvSpPr txBox="1"/>
           <p:nvPr/>
         </p:nvSpPr>
         <p:spPr>
           <a:xfrm>
-            <a:off x="731520" y="5618988"/>
-            <a:ext cx="3381146" cy="873251"/>
+            <a:off x="731520" y="5961888"/>
+            <a:ext cx="3381146" cy="530352"/>
           </a:xfrm>
           <a:prstGeom prst="rect">
             <a:avLst/>
@@ -17909,7 +17962,7 @@
             <a:pPr algn="l">
               <a:defRPr sz="2000" b="1" i="0">
                 <a:solidFill>
-                  <a:srgbClr val="1F2937"/>
+                  <a:srgbClr val="223043"/>
                 </a:solidFill>
                 <a:latin typeface="Liberation Sans"/>
               </a:defRPr>
@@ -17922,20 +17975,20 @@
       </p:sp>
       <p:sp>
         <p:nvSpPr>
-          <p:cNvPr id="23" name="Rounded Rectangle 22"/>
+          <p:cNvPr id="24" name="Rounded Rectangle 23"/>
           <p:cNvSpPr/>
           <p:nvPr/>
         </p:nvSpPr>
         <p:spPr>
           <a:xfrm>
-            <a:off x="4405274" y="4654296"/>
-            <a:ext cx="3381146" cy="873251"/>
+            <a:off x="4405274" y="5340096"/>
+            <a:ext cx="3381146" cy="530352"/>
           </a:xfrm>
           <a:prstGeom prst="roundRect">
             <a:avLst/>
           </a:prstGeom>
           <a:solidFill>
-            <a:srgbClr val="E67E22"/>
+            <a:srgbClr val="D69A68"/>
           </a:solidFill>
           <a:ln>
             <a:noFill/>
@@ -17975,14 +18028,14 @@
       </p:sp>
       <p:sp>
         <p:nvSpPr>
-          <p:cNvPr id="24" name="TextBox 23"/>
+          <p:cNvPr id="25" name="TextBox 24"/>
           <p:cNvSpPr txBox="1"/>
           <p:nvPr/>
         </p:nvSpPr>
         <p:spPr>
           <a:xfrm>
-            <a:off x="4405274" y="5618988"/>
-            <a:ext cx="3381146" cy="873251"/>
+            <a:off x="4405274" y="5961888"/>
+            <a:ext cx="3381146" cy="530352"/>
           </a:xfrm>
           <a:prstGeom prst="rect">
             <a:avLst/>
@@ -17998,7 +18051,7 @@
             <a:pPr algn="l">
               <a:defRPr sz="2000" b="1" i="0">
                 <a:solidFill>
-                  <a:srgbClr val="1F2937"/>
+                  <a:srgbClr val="223043"/>
                 </a:solidFill>
                 <a:latin typeface="Liberation Sans"/>
               </a:defRPr>
@@ -18011,24 +18064,24 @@
       </p:sp>
       <p:sp>
         <p:nvSpPr>
-          <p:cNvPr id="25" name="Rectangle 24"/>
+          <p:cNvPr id="26" name="Rectangle 25"/>
           <p:cNvSpPr/>
           <p:nvPr/>
         </p:nvSpPr>
         <p:spPr>
           <a:xfrm>
-            <a:off x="8079028" y="4654296"/>
-            <a:ext cx="54864" cy="1837943"/>
+            <a:off x="8079028" y="5340096"/>
+            <a:ext cx="54864" cy="1152144"/>
           </a:xfrm>
           <a:prstGeom prst="rect">
             <a:avLst/>
           </a:prstGeom>
           <a:solidFill>
-            <a:srgbClr val="163B65"/>
+            <a:srgbClr val="5C82AD"/>
           </a:solidFill>
           <a:ln w="12700">
             <a:solidFill>
-              <a:srgbClr val="163B65"/>
+              <a:srgbClr val="5C82AD"/>
             </a:solidFill>
           </a:ln>
         </p:spPr>
@@ -18056,14 +18109,14 @@
       </p:sp>
       <p:sp>
         <p:nvSpPr>
-          <p:cNvPr id="26" name="TextBox 25"/>
+          <p:cNvPr id="27" name="TextBox 26"/>
           <p:cNvSpPr txBox="1"/>
           <p:nvPr/>
         </p:nvSpPr>
         <p:spPr>
           <a:xfrm>
-            <a:off x="8271052" y="4654296"/>
-            <a:ext cx="3189122" cy="873251"/>
+            <a:off x="8271052" y="5340096"/>
+            <a:ext cx="3189122" cy="530352"/>
           </a:xfrm>
           <a:prstGeom prst="rect">
             <a:avLst/>
@@ -18079,7 +18132,7 @@
             <a:pPr algn="l">
               <a:defRPr sz="1800" b="1" i="0">
                 <a:solidFill>
-                  <a:srgbClr val="163B65"/>
+                  <a:srgbClr val="5C82AD"/>
                 </a:solidFill>
                 <a:latin typeface="Liberation Sans"/>
               </a:defRPr>
@@ -18092,14 +18145,14 @@
       </p:sp>
       <p:sp>
         <p:nvSpPr>
-          <p:cNvPr id="27" name="TextBox 26"/>
+          <p:cNvPr id="28" name="TextBox 27"/>
           <p:cNvSpPr txBox="1"/>
           <p:nvPr/>
         </p:nvSpPr>
         <p:spPr>
           <a:xfrm>
-            <a:off x="8271052" y="5618988"/>
-            <a:ext cx="3189122" cy="873251"/>
+            <a:off x="8271052" y="5961888"/>
+            <a:ext cx="3189122" cy="530352"/>
           </a:xfrm>
           <a:prstGeom prst="rect">
             <a:avLst/>
@@ -18115,7 +18168,7 @@
             <a:pPr algn="l">
               <a:defRPr sz="1400" b="0" i="0">
                 <a:solidFill>
-                  <a:srgbClr val="1F2937"/>
+                  <a:srgbClr val="223043"/>
                 </a:solidFill>
                 <a:latin typeface="Liberation Sans"/>
               </a:defRPr>
@@ -18156,7 +18209,7 @@
                               </p:stCondLst>
                             </p:cTn>
                             <p:tgtEl>
-                              <p:spTgt spid="5"/>
+                              <p:spTgt spid="6"/>
                             </p:tgtEl>
                             <p:attrNameLst>
                               <p:attrName>style.visibility</p:attrName>
@@ -18183,7 +18236,7 @@
                               </p:stCondLst>
                             </p:cTn>
                             <p:tgtEl>
-                              <p:spTgt spid="12"/>
+                              <p:spTgt spid="13"/>
                             </p:tgtEl>
                             <p:attrNameLst>
                               <p:attrName>style.visibility</p:attrName>
@@ -18210,7 +18263,7 @@
                               </p:stCondLst>
                             </p:cTn>
                             <p:tgtEl>
-                              <p:spTgt spid="6"/>
+                              <p:spTgt spid="7"/>
                             </p:tgtEl>
                             <p:attrNameLst>
                               <p:attrName>style.visibility</p:attrName>
@@ -18237,7 +18290,7 @@
                               </p:stCondLst>
                             </p:cTn>
                             <p:tgtEl>
-                              <p:spTgt spid="13"/>
+                              <p:spTgt spid="14"/>
                             </p:tgtEl>
                             <p:attrNameLst>
                               <p:attrName>style.visibility</p:attrName>
@@ -18264,7 +18317,7 @@
                               </p:stCondLst>
                             </p:cTn>
                             <p:tgtEl>
-                              <p:spTgt spid="8"/>
+                              <p:spTgt spid="9"/>
                             </p:tgtEl>
                             <p:attrNameLst>
                               <p:attrName>style.visibility</p:attrName>
@@ -18291,7 +18344,7 @@
                               </p:stCondLst>
                             </p:cTn>
                             <p:tgtEl>
-                              <p:spTgt spid="14"/>
+                              <p:spTgt spid="15"/>
                             </p:tgtEl>
                             <p:attrNameLst>
                               <p:attrName>style.visibility</p:attrName>
@@ -18318,7 +18371,7 @@
                               </p:stCondLst>
                             </p:cTn>
                             <p:tgtEl>
-                              <p:spTgt spid="5"/>
+                              <p:spTgt spid="6"/>
                             </p:tgtEl>
                             <p:attrNameLst>
                               <p:attrName>style.visibility</p:attrName>
@@ -18345,7 +18398,7 @@
                               </p:stCondLst>
                             </p:cTn>
                             <p:tgtEl>
-                              <p:spTgt spid="12"/>
+                              <p:spTgt spid="13"/>
                             </p:tgtEl>
                             <p:attrNameLst>
                               <p:attrName>style.visibility</p:attrName>
@@ -18372,7 +18425,7 @@
                               </p:stCondLst>
                             </p:cTn>
                             <p:tgtEl>
-                              <p:spTgt spid="15"/>
+                              <p:spTgt spid="16"/>
                             </p:tgtEl>
                             <p:attrNameLst>
                               <p:attrName>style.visibility</p:attrName>
@@ -18399,7 +18452,7 @@
                               </p:stCondLst>
                             </p:cTn>
                             <p:tgtEl>
-                              <p:spTgt spid="6"/>
+                              <p:spTgt spid="7"/>
                             </p:tgtEl>
                             <p:attrNameLst>
                               <p:attrName>style.visibility</p:attrName>
@@ -18426,7 +18479,7 @@
                               </p:stCondLst>
                             </p:cTn>
                             <p:tgtEl>
-                              <p:spTgt spid="13"/>
+                              <p:spTgt spid="14"/>
                             </p:tgtEl>
                             <p:attrNameLst>
                               <p:attrName>style.visibility</p:attrName>
@@ -18453,7 +18506,7 @@
                               </p:stCondLst>
                             </p:cTn>
                             <p:tgtEl>
-                              <p:spTgt spid="16"/>
+                              <p:spTgt spid="17"/>
                             </p:tgtEl>
                             <p:attrNameLst>
                               <p:attrName>style.visibility</p:attrName>
@@ -18480,7 +18533,7 @@
                               </p:stCondLst>
                             </p:cTn>
                             <p:tgtEl>
-                              <p:spTgt spid="8"/>
+                              <p:spTgt spid="9"/>
                             </p:tgtEl>
                             <p:attrNameLst>
                               <p:attrName>style.visibility</p:attrName>
@@ -18507,7 +18560,7 @@
                               </p:stCondLst>
                             </p:cTn>
                             <p:tgtEl>
-                              <p:spTgt spid="14"/>
+                              <p:spTgt spid="15"/>
                             </p:tgtEl>
                             <p:attrNameLst>
                               <p:attrName>style.visibility</p:attrName>
@@ -18534,7 +18587,7 @@
                               </p:stCondLst>
                             </p:cTn>
                             <p:tgtEl>
-                              <p:spTgt spid="17"/>
+                              <p:spTgt spid="18"/>
                             </p:tgtEl>
                             <p:attrNameLst>
                               <p:attrName>style.visibility</p:attrName>
@@ -18561,7 +18614,7 @@
                               </p:stCondLst>
                             </p:cTn>
                             <p:tgtEl>
-                              <p:spTgt spid="5"/>
+                              <p:spTgt spid="6"/>
                             </p:tgtEl>
                             <p:attrNameLst>
                               <p:attrName>style.visibility</p:attrName>
@@ -18588,7 +18641,7 @@
                               </p:stCondLst>
                             </p:cTn>
                             <p:tgtEl>
-                              <p:spTgt spid="12"/>
+                              <p:spTgt spid="13"/>
                             </p:tgtEl>
                             <p:attrNameLst>
                               <p:attrName>style.visibility</p:attrName>
@@ -18615,7 +18668,7 @@
                               </p:stCondLst>
                             </p:cTn>
                             <p:tgtEl>
-                              <p:spTgt spid="15"/>
+                              <p:spTgt spid="16"/>
                             </p:tgtEl>
                             <p:attrNameLst>
                               <p:attrName>style.visibility</p:attrName>
@@ -18642,7 +18695,7 @@
                               </p:stCondLst>
                             </p:cTn>
                             <p:tgtEl>
-                              <p:spTgt spid="18"/>
+                              <p:spTgt spid="19"/>
                             </p:tgtEl>
                             <p:attrNameLst>
                               <p:attrName>style.visibility</p:attrName>
@@ -18669,7 +18722,7 @@
                               </p:stCondLst>
                             </p:cTn>
                             <p:tgtEl>
-                              <p:spTgt spid="6"/>
+                              <p:spTgt spid="7"/>
                             </p:tgtEl>
                             <p:attrNameLst>
                               <p:attrName>style.visibility</p:attrName>
@@ -18696,7 +18749,7 @@
                               </p:stCondLst>
                             </p:cTn>
                             <p:tgtEl>
-                              <p:spTgt spid="13"/>
+                              <p:spTgt spid="14"/>
                             </p:tgtEl>
                             <p:attrNameLst>
                               <p:attrName>style.visibility</p:attrName>
@@ -18723,7 +18776,7 @@
                               </p:stCondLst>
                             </p:cTn>
                             <p:tgtEl>
-                              <p:spTgt spid="16"/>
+                              <p:spTgt spid="17"/>
                             </p:tgtEl>
                             <p:attrNameLst>
                               <p:attrName>style.visibility</p:attrName>
@@ -18750,7 +18803,7 @@
                               </p:stCondLst>
                             </p:cTn>
                             <p:tgtEl>
-                              <p:spTgt spid="19"/>
+                              <p:spTgt spid="20"/>
                             </p:tgtEl>
                             <p:attrNameLst>
                               <p:attrName>style.visibility</p:attrName>
@@ -18777,7 +18830,7 @@
                               </p:stCondLst>
                             </p:cTn>
                             <p:tgtEl>
-                              <p:spTgt spid="8"/>
+                              <p:spTgt spid="9"/>
                             </p:tgtEl>
                             <p:attrNameLst>
                               <p:attrName>style.visibility</p:attrName>
@@ -18804,7 +18857,7 @@
                               </p:stCondLst>
                             </p:cTn>
                             <p:tgtEl>
-                              <p:spTgt spid="14"/>
+                              <p:spTgt spid="15"/>
                             </p:tgtEl>
                             <p:attrNameLst>
                               <p:attrName>style.visibility</p:attrName>
@@ -18831,7 +18884,7 @@
                               </p:stCondLst>
                             </p:cTn>
                             <p:tgtEl>
-                              <p:spTgt spid="17"/>
+                              <p:spTgt spid="18"/>
                             </p:tgtEl>
                             <p:attrNameLst>
                               <p:attrName>style.visibility</p:attrName>
@@ -18858,7 +18911,7 @@
                               </p:stCondLst>
                             </p:cTn>
                             <p:tgtEl>
-                              <p:spTgt spid="20"/>
+                              <p:spTgt spid="21"/>
                             </p:tgtEl>
                             <p:attrNameLst>
                               <p:attrName>style.visibility</p:attrName>
@@ -18885,7 +18938,7 @@
                               </p:stCondLst>
                             </p:cTn>
                             <p:tgtEl>
-                              <p:spTgt spid="21"/>
+                              <p:spTgt spid="22"/>
                             </p:tgtEl>
                             <p:attrNameLst>
                               <p:attrName>style.visibility</p:attrName>
@@ -18912,7 +18965,7 @@
                               </p:stCondLst>
                             </p:cTn>
                             <p:tgtEl>
-                              <p:spTgt spid="22"/>
+                              <p:spTgt spid="23"/>
                             </p:tgtEl>
                             <p:attrNameLst>
                               <p:attrName>style.visibility</p:attrName>
@@ -18939,7 +18992,7 @@
                               </p:stCondLst>
                             </p:cTn>
                             <p:tgtEl>
-                              <p:spTgt spid="23"/>
+                              <p:spTgt spid="24"/>
                             </p:tgtEl>
                             <p:attrNameLst>
                               <p:attrName>style.visibility</p:attrName>
@@ -18966,7 +19019,7 @@
                               </p:stCondLst>
                             </p:cTn>
                             <p:tgtEl>
-                              <p:spTgt spid="24"/>
+                              <p:spTgt spid="25"/>
                             </p:tgtEl>
                             <p:attrNameLst>
                               <p:attrName>style.visibility</p:attrName>
@@ -18993,7 +19046,7 @@
                               </p:stCondLst>
                             </p:cTn>
                             <p:tgtEl>
-                              <p:spTgt spid="5"/>
+                              <p:spTgt spid="6"/>
                             </p:tgtEl>
                             <p:attrNameLst>
                               <p:attrName>style.visibility</p:attrName>
@@ -19020,7 +19073,7 @@
                               </p:stCondLst>
                             </p:cTn>
                             <p:tgtEl>
-                              <p:spTgt spid="12"/>
+                              <p:spTgt spid="13"/>
                             </p:tgtEl>
                             <p:attrNameLst>
                               <p:attrName>style.visibility</p:attrName>
@@ -19047,7 +19100,7 @@
                               </p:stCondLst>
                             </p:cTn>
                             <p:tgtEl>
-                              <p:spTgt spid="15"/>
+                              <p:spTgt spid="16"/>
                             </p:tgtEl>
                             <p:attrNameLst>
                               <p:attrName>style.visibility</p:attrName>
@@ -19074,7 +19127,7 @@
                               </p:stCondLst>
                             </p:cTn>
                             <p:tgtEl>
-                              <p:spTgt spid="18"/>
+                              <p:spTgt spid="19"/>
                             </p:tgtEl>
                             <p:attrNameLst>
                               <p:attrName>style.visibility</p:attrName>
@@ -19101,7 +19154,7 @@
                               </p:stCondLst>
                             </p:cTn>
                             <p:tgtEl>
-                              <p:spTgt spid="25"/>
+                              <p:spTgt spid="26"/>
                             </p:tgtEl>
                             <p:attrNameLst>
                               <p:attrName>style.visibility</p:attrName>
@@ -19128,7 +19181,7 @@
                               </p:stCondLst>
                             </p:cTn>
                             <p:tgtEl>
-                              <p:spTgt spid="6"/>
+                              <p:spTgt spid="7"/>
                             </p:tgtEl>
                             <p:attrNameLst>
                               <p:attrName>style.visibility</p:attrName>
@@ -19155,7 +19208,7 @@
                               </p:stCondLst>
                             </p:cTn>
                             <p:tgtEl>
-                              <p:spTgt spid="13"/>
+                              <p:spTgt spid="14"/>
                             </p:tgtEl>
                             <p:attrNameLst>
                               <p:attrName>style.visibility</p:attrName>
@@ -19182,7 +19235,7 @@
                               </p:stCondLst>
                             </p:cTn>
                             <p:tgtEl>
-                              <p:spTgt spid="16"/>
+                              <p:spTgt spid="17"/>
                             </p:tgtEl>
                             <p:attrNameLst>
                               <p:attrName>style.visibility</p:attrName>
@@ -19209,7 +19262,7 @@
                               </p:stCondLst>
                             </p:cTn>
                             <p:tgtEl>
-                              <p:spTgt spid="19"/>
+                              <p:spTgt spid="20"/>
                             </p:tgtEl>
                             <p:attrNameLst>
                               <p:attrName>style.visibility</p:attrName>
@@ -19236,7 +19289,7 @@
                               </p:stCondLst>
                             </p:cTn>
                             <p:tgtEl>
-                              <p:spTgt spid="26"/>
+                              <p:spTgt spid="27"/>
                             </p:tgtEl>
                             <p:attrNameLst>
                               <p:attrName>style.visibility</p:attrName>
@@ -19263,7 +19316,7 @@
                               </p:stCondLst>
                             </p:cTn>
                             <p:tgtEl>
-                              <p:spTgt spid="8"/>
+                              <p:spTgt spid="9"/>
                             </p:tgtEl>
                             <p:attrNameLst>
                               <p:attrName>style.visibility</p:attrName>
@@ -19290,7 +19343,7 @@
                               </p:stCondLst>
                             </p:cTn>
                             <p:tgtEl>
-                              <p:spTgt spid="14"/>
+                              <p:spTgt spid="15"/>
                             </p:tgtEl>
                             <p:attrNameLst>
                               <p:attrName>style.visibility</p:attrName>
@@ -19317,7 +19370,7 @@
                               </p:stCondLst>
                             </p:cTn>
                             <p:tgtEl>
-                              <p:spTgt spid="17"/>
+                              <p:spTgt spid="18"/>
                             </p:tgtEl>
                             <p:attrNameLst>
                               <p:attrName>style.visibility</p:attrName>
@@ -19344,7 +19397,7 @@
                               </p:stCondLst>
                             </p:cTn>
                             <p:tgtEl>
-                              <p:spTgt spid="20"/>
+                              <p:spTgt spid="21"/>
                             </p:tgtEl>
                             <p:attrNameLst>
                               <p:attrName>style.visibility</p:attrName>
@@ -19371,7 +19424,7 @@
                               </p:stCondLst>
                             </p:cTn>
                             <p:tgtEl>
-                              <p:spTgt spid="27"/>
+                              <p:spTgt spid="28"/>
                             </p:tgtEl>
                             <p:attrNameLst>
                               <p:attrName>style.visibility</p:attrName>
@@ -19647,6 +19700,41 @@
                                   </p:childTnLst>
                                 </p:cTn>
                               </p:par>
+                              <p:par>
+                                <p:cTn id="120" presetID="10" presetClass="entr" presetSubtype="0" fill="hold" grpId="0" nodeType="withEffect">
+                                  <p:stCondLst>
+                                    <p:cond delay="0"/>
+                                  </p:stCondLst>
+                                  <p:childTnLst>
+                                    <p:animEffect transition="in" filter="fade">
+                                      <p:cBhvr>
+                                        <p:cTn id="121" dur="500"/>
+                                        <p:tgtEl>
+                                          <p:spTgt spid="12"/>
+                                        </p:tgtEl>
+                                      </p:cBhvr>
+                                    </p:animEffect>
+                                    <p:set>
+                                      <p:cBhvr>
+                                        <p:cTn id="122" dur="1" fill="hold">
+                                          <p:stCondLst>
+                                            <p:cond delay="0"/>
+                                          </p:stCondLst>
+                                        </p:cTn>
+                                        <p:tgtEl>
+                                          <p:spTgt spid="12"/>
+                                        </p:tgtEl>
+                                        <p:attrNameLst>
+                                          <p:attrName>style.visibility</p:attrName>
+                                        </p:attrNameLst>
+                                      </p:cBhvr>
+                                      <p:to>
+                                        <p:strVal val="visible"/>
+                                      </p:to>
+                                    </p:set>
+                                  </p:childTnLst>
+                                </p:cTn>
+                              </p:par>
                             </p:childTnLst>
                           </p:cTn>
                         </p:par>
@@ -19654,63 +19742,28 @@
                     </p:cTn>
                   </p:par>
                   <p:par>
-                    <p:cTn id="120" fill="hold">
+                    <p:cTn id="123" fill="hold">
                       <p:stCondLst>
                         <p:cond delay="indefinite"/>
                       </p:stCondLst>
                       <p:childTnLst>
                         <p:par>
-                          <p:cTn id="121" fill="hold">
+                          <p:cTn id="124" fill="hold">
                             <p:stCondLst>
                               <p:cond delay="0"/>
                             </p:stCondLst>
                             <p:childTnLst>
                               <p:par>
-                                <p:cTn id="122" presetID="10" presetClass="entr" presetSubtype="0" fill="hold" grpId="0" nodeType="clickEffect">
+                                <p:cTn id="125" presetID="10" presetClass="entr" presetSubtype="0" fill="hold" grpId="0" nodeType="clickEffect">
                                   <p:stCondLst>
                                     <p:cond delay="0"/>
                                   </p:stCondLst>
                                   <p:childTnLst>
                                     <p:animEffect transition="in" filter="fade">
                                       <p:cBhvr>
-                                        <p:cTn id="123" dur="500"/>
-                                        <p:tgtEl>
-                                          <p:spTgt spid="5"/>
-                                        </p:tgtEl>
-                                      </p:cBhvr>
-                                    </p:animEffect>
-                                    <p:set>
-                                      <p:cBhvr>
-                                        <p:cTn id="124" dur="1" fill="hold">
-                                          <p:stCondLst>
-                                            <p:cond delay="0"/>
-                                          </p:stCondLst>
-                                        </p:cTn>
-                                        <p:tgtEl>
-                                          <p:spTgt spid="5"/>
-                                        </p:tgtEl>
-                                        <p:attrNameLst>
-                                          <p:attrName>style.visibility</p:attrName>
-                                        </p:attrNameLst>
-                                      </p:cBhvr>
-                                      <p:to>
-                                        <p:strVal val="visible"/>
-                                      </p:to>
-                                    </p:set>
-                                  </p:childTnLst>
-                                </p:cTn>
-                              </p:par>
-                              <p:par>
-                                <p:cTn id="125" presetID="10" presetClass="entr" presetSubtype="0" fill="hold" grpId="0" nodeType="withEffect">
-                                  <p:stCondLst>
-                                    <p:cond delay="0"/>
-                                  </p:stCondLst>
-                                  <p:childTnLst>
-                                    <p:animEffect transition="in" filter="fade">
-                                      <p:cBhvr>
                                         <p:cTn id="126" dur="500"/>
                                         <p:tgtEl>
-                                          <p:spTgt spid="12"/>
+                                          <p:spTgt spid="6"/>
                                         </p:tgtEl>
                                       </p:cBhvr>
                                     </p:animEffect>
@@ -19722,7 +19775,7 @@
                                           </p:stCondLst>
                                         </p:cTn>
                                         <p:tgtEl>
-                                          <p:spTgt spid="12"/>
+                                          <p:spTgt spid="6"/>
                                         </p:tgtEl>
                                         <p:attrNameLst>
                                           <p:attrName>style.visibility</p:attrName>
@@ -19745,7 +19798,7 @@
                                       <p:cBhvr>
                                         <p:cTn id="129" dur="500"/>
                                         <p:tgtEl>
-                                          <p:spTgt spid="6"/>
+                                          <p:spTgt spid="13"/>
                                         </p:tgtEl>
                                       </p:cBhvr>
                                     </p:animEffect>
@@ -19757,7 +19810,7 @@
                                           </p:stCondLst>
                                         </p:cTn>
                                         <p:tgtEl>
-                                          <p:spTgt spid="6"/>
+                                          <p:spTgt spid="13"/>
                                         </p:tgtEl>
                                         <p:attrNameLst>
                                           <p:attrName>style.visibility</p:attrName>
@@ -19780,7 +19833,7 @@
                                       <p:cBhvr>
                                         <p:cTn id="132" dur="500"/>
                                         <p:tgtEl>
-                                          <p:spTgt spid="13"/>
+                                          <p:spTgt spid="7"/>
                                         </p:tgtEl>
                                       </p:cBhvr>
                                     </p:animEffect>
@@ -19792,7 +19845,7 @@
                                           </p:stCondLst>
                                         </p:cTn>
                                         <p:tgtEl>
-                                          <p:spTgt spid="13"/>
+                                          <p:spTgt spid="7"/>
                                         </p:tgtEl>
                                         <p:attrNameLst>
                                           <p:attrName>style.visibility</p:attrName>
@@ -19815,7 +19868,7 @@
                                       <p:cBhvr>
                                         <p:cTn id="135" dur="500"/>
                                         <p:tgtEl>
-                                          <p:spTgt spid="8"/>
+                                          <p:spTgt spid="14"/>
                                         </p:tgtEl>
                                       </p:cBhvr>
                                     </p:animEffect>
@@ -19827,7 +19880,7 @@
                                           </p:stCondLst>
                                         </p:cTn>
                                         <p:tgtEl>
-                                          <p:spTgt spid="8"/>
+                                          <p:spTgt spid="14"/>
                                         </p:tgtEl>
                                         <p:attrNameLst>
                                           <p:attrName>style.visibility</p:attrName>
@@ -19850,7 +19903,7 @@
                                       <p:cBhvr>
                                         <p:cTn id="138" dur="500"/>
                                         <p:tgtEl>
-                                          <p:spTgt spid="14"/>
+                                          <p:spTgt spid="9"/>
                                         </p:tgtEl>
                                       </p:cBhvr>
                                     </p:animEffect>
@@ -19862,7 +19915,7 @@
                                           </p:stCondLst>
                                         </p:cTn>
                                         <p:tgtEl>
-                                          <p:spTgt spid="14"/>
+                                          <p:spTgt spid="9"/>
                                         </p:tgtEl>
                                         <p:attrNameLst>
                                           <p:attrName>style.visibility</p:attrName>
@@ -19885,7 +19938,7 @@
                                       <p:cBhvr>
                                         <p:cTn id="141" dur="500"/>
                                         <p:tgtEl>
-                                          <p:spTgt spid="5"/>
+                                          <p:spTgt spid="15"/>
                                         </p:tgtEl>
                                       </p:cBhvr>
                                     </p:animEffect>
@@ -19897,7 +19950,7 @@
                                           </p:stCondLst>
                                         </p:cTn>
                                         <p:tgtEl>
-                                          <p:spTgt spid="5"/>
+                                          <p:spTgt spid="15"/>
                                         </p:tgtEl>
                                         <p:attrNameLst>
                                           <p:attrName>style.visibility</p:attrName>
@@ -19920,7 +19973,7 @@
                                       <p:cBhvr>
                                         <p:cTn id="144" dur="500"/>
                                         <p:tgtEl>
-                                          <p:spTgt spid="12"/>
+                                          <p:spTgt spid="6"/>
                                         </p:tgtEl>
                                       </p:cBhvr>
                                     </p:animEffect>
@@ -19932,7 +19985,7 @@
                                           </p:stCondLst>
                                         </p:cTn>
                                         <p:tgtEl>
-                                          <p:spTgt spid="12"/>
+                                          <p:spTgt spid="6"/>
                                         </p:tgtEl>
                                         <p:attrNameLst>
                                           <p:attrName>style.visibility</p:attrName>
@@ -19955,7 +20008,7 @@
                                       <p:cBhvr>
                                         <p:cTn id="147" dur="500"/>
                                         <p:tgtEl>
-                                          <p:spTgt spid="15"/>
+                                          <p:spTgt spid="13"/>
                                         </p:tgtEl>
                                       </p:cBhvr>
                                     </p:animEffect>
@@ -19967,7 +20020,7 @@
                                           </p:stCondLst>
                                         </p:cTn>
                                         <p:tgtEl>
-                                          <p:spTgt spid="15"/>
+                                          <p:spTgt spid="13"/>
                                         </p:tgtEl>
                                         <p:attrNameLst>
                                           <p:attrName>style.visibility</p:attrName>
@@ -19990,7 +20043,7 @@
                                       <p:cBhvr>
                                         <p:cTn id="150" dur="500"/>
                                         <p:tgtEl>
-                                          <p:spTgt spid="6"/>
+                                          <p:spTgt spid="16"/>
                                         </p:tgtEl>
                                       </p:cBhvr>
                                     </p:animEffect>
@@ -20002,7 +20055,7 @@
                                           </p:stCondLst>
                                         </p:cTn>
                                         <p:tgtEl>
-                                          <p:spTgt spid="6"/>
+                                          <p:spTgt spid="16"/>
                                         </p:tgtEl>
                                         <p:attrNameLst>
                                           <p:attrName>style.visibility</p:attrName>
@@ -20025,7 +20078,7 @@
                                       <p:cBhvr>
                                         <p:cTn id="153" dur="500"/>
                                         <p:tgtEl>
-                                          <p:spTgt spid="13"/>
+                                          <p:spTgt spid="7"/>
                                         </p:tgtEl>
                                       </p:cBhvr>
                                     </p:animEffect>
@@ -20037,7 +20090,7 @@
                                           </p:stCondLst>
                                         </p:cTn>
                                         <p:tgtEl>
-                                          <p:spTgt spid="13"/>
+                                          <p:spTgt spid="7"/>
                                         </p:tgtEl>
                                         <p:attrNameLst>
                                           <p:attrName>style.visibility</p:attrName>
@@ -20060,7 +20113,7 @@
                                       <p:cBhvr>
                                         <p:cTn id="156" dur="500"/>
                                         <p:tgtEl>
-                                          <p:spTgt spid="16"/>
+                                          <p:spTgt spid="14"/>
                                         </p:tgtEl>
                                       </p:cBhvr>
                                     </p:animEffect>
@@ -20072,7 +20125,7 @@
                                           </p:stCondLst>
                                         </p:cTn>
                                         <p:tgtEl>
-                                          <p:spTgt spid="16"/>
+                                          <p:spTgt spid="14"/>
                                         </p:tgtEl>
                                         <p:attrNameLst>
                                           <p:attrName>style.visibility</p:attrName>
@@ -20095,7 +20148,7 @@
                                       <p:cBhvr>
                                         <p:cTn id="159" dur="500"/>
                                         <p:tgtEl>
-                                          <p:spTgt spid="8"/>
+                                          <p:spTgt spid="17"/>
                                         </p:tgtEl>
                                       </p:cBhvr>
                                     </p:animEffect>
@@ -20107,7 +20160,7 @@
                                           </p:stCondLst>
                                         </p:cTn>
                                         <p:tgtEl>
-                                          <p:spTgt spid="8"/>
+                                          <p:spTgt spid="17"/>
                                         </p:tgtEl>
                                         <p:attrNameLst>
                                           <p:attrName>style.visibility</p:attrName>
@@ -20130,7 +20183,7 @@
                                       <p:cBhvr>
                                         <p:cTn id="162" dur="500"/>
                                         <p:tgtEl>
-                                          <p:spTgt spid="14"/>
+                                          <p:spTgt spid="9"/>
                                         </p:tgtEl>
                                       </p:cBhvr>
                                     </p:animEffect>
@@ -20142,7 +20195,7 @@
                                           </p:stCondLst>
                                         </p:cTn>
                                         <p:tgtEl>
-                                          <p:spTgt spid="14"/>
+                                          <p:spTgt spid="9"/>
                                         </p:tgtEl>
                                         <p:attrNameLst>
                                           <p:attrName>style.visibility</p:attrName>
@@ -20165,7 +20218,7 @@
                                       <p:cBhvr>
                                         <p:cTn id="165" dur="500"/>
                                         <p:tgtEl>
-                                          <p:spTgt spid="17"/>
+                                          <p:spTgt spid="15"/>
                                         </p:tgtEl>
                                       </p:cBhvr>
                                     </p:animEffect>
@@ -20177,7 +20230,7 @@
                                           </p:stCondLst>
                                         </p:cTn>
                                         <p:tgtEl>
-                                          <p:spTgt spid="17"/>
+                                          <p:spTgt spid="15"/>
                                         </p:tgtEl>
                                         <p:attrNameLst>
                                           <p:attrName>style.visibility</p:attrName>
@@ -20200,7 +20253,7 @@
                                       <p:cBhvr>
                                         <p:cTn id="168" dur="500"/>
                                         <p:tgtEl>
-                                          <p:spTgt spid="5"/>
+                                          <p:spTgt spid="18"/>
                                         </p:tgtEl>
                                       </p:cBhvr>
                                     </p:animEffect>
@@ -20212,7 +20265,7 @@
                                           </p:stCondLst>
                                         </p:cTn>
                                         <p:tgtEl>
-                                          <p:spTgt spid="5"/>
+                                          <p:spTgt spid="18"/>
                                         </p:tgtEl>
                                         <p:attrNameLst>
                                           <p:attrName>style.visibility</p:attrName>
@@ -20235,7 +20288,7 @@
                                       <p:cBhvr>
                                         <p:cTn id="171" dur="500"/>
                                         <p:tgtEl>
-                                          <p:spTgt spid="12"/>
+                                          <p:spTgt spid="6"/>
                                         </p:tgtEl>
                                       </p:cBhvr>
                                     </p:animEffect>
@@ -20247,7 +20300,7 @@
                                           </p:stCondLst>
                                         </p:cTn>
                                         <p:tgtEl>
-                                          <p:spTgt spid="12"/>
+                                          <p:spTgt spid="6"/>
                                         </p:tgtEl>
                                         <p:attrNameLst>
                                           <p:attrName>style.visibility</p:attrName>
@@ -20270,7 +20323,7 @@
                                       <p:cBhvr>
                                         <p:cTn id="174" dur="500"/>
                                         <p:tgtEl>
-                                          <p:spTgt spid="15"/>
+                                          <p:spTgt spid="13"/>
                                         </p:tgtEl>
                                       </p:cBhvr>
                                     </p:animEffect>
@@ -20282,7 +20335,7 @@
                                           </p:stCondLst>
                                         </p:cTn>
                                         <p:tgtEl>
-                                          <p:spTgt spid="15"/>
+                                          <p:spTgt spid="13"/>
                                         </p:tgtEl>
                                         <p:attrNameLst>
                                           <p:attrName>style.visibility</p:attrName>
@@ -20305,7 +20358,7 @@
                                       <p:cBhvr>
                                         <p:cTn id="177" dur="500"/>
                                         <p:tgtEl>
-                                          <p:spTgt spid="18"/>
+                                          <p:spTgt spid="16"/>
                                         </p:tgtEl>
                                       </p:cBhvr>
                                     </p:animEffect>
@@ -20317,7 +20370,7 @@
                                           </p:stCondLst>
                                         </p:cTn>
                                         <p:tgtEl>
-                                          <p:spTgt spid="18"/>
+                                          <p:spTgt spid="16"/>
                                         </p:tgtEl>
                                         <p:attrNameLst>
                                           <p:attrName>style.visibility</p:attrName>
@@ -20340,7 +20393,7 @@
                                       <p:cBhvr>
                                         <p:cTn id="180" dur="500"/>
                                         <p:tgtEl>
-                                          <p:spTgt spid="6"/>
+                                          <p:spTgt spid="19"/>
                                         </p:tgtEl>
                                       </p:cBhvr>
                                     </p:animEffect>
@@ -20352,7 +20405,7 @@
                                           </p:stCondLst>
                                         </p:cTn>
                                         <p:tgtEl>
-                                          <p:spTgt spid="6"/>
+                                          <p:spTgt spid="19"/>
                                         </p:tgtEl>
                                         <p:attrNameLst>
                                           <p:attrName>style.visibility</p:attrName>
@@ -20375,7 +20428,7 @@
                                       <p:cBhvr>
                                         <p:cTn id="183" dur="500"/>
                                         <p:tgtEl>
-                                          <p:spTgt spid="13"/>
+                                          <p:spTgt spid="7"/>
                                         </p:tgtEl>
                                       </p:cBhvr>
                                     </p:animEffect>
@@ -20387,7 +20440,7 @@
                                           </p:stCondLst>
                                         </p:cTn>
                                         <p:tgtEl>
-                                          <p:spTgt spid="13"/>
+                                          <p:spTgt spid="7"/>
                                         </p:tgtEl>
                                         <p:attrNameLst>
                                           <p:attrName>style.visibility</p:attrName>
@@ -20410,7 +20463,7 @@
                                       <p:cBhvr>
                                         <p:cTn id="186" dur="500"/>
                                         <p:tgtEl>
-                                          <p:spTgt spid="16"/>
+                                          <p:spTgt spid="14"/>
                                         </p:tgtEl>
                                       </p:cBhvr>
                                     </p:animEffect>
@@ -20422,7 +20475,7 @@
                                           </p:stCondLst>
                                         </p:cTn>
                                         <p:tgtEl>
-                                          <p:spTgt spid="16"/>
+                                          <p:spTgt spid="14"/>
                                         </p:tgtEl>
                                         <p:attrNameLst>
                                           <p:attrName>style.visibility</p:attrName>
@@ -20445,7 +20498,7 @@
                                       <p:cBhvr>
                                         <p:cTn id="189" dur="500"/>
                                         <p:tgtEl>
-                                          <p:spTgt spid="19"/>
+                                          <p:spTgt spid="17"/>
                                         </p:tgtEl>
                                       </p:cBhvr>
                                     </p:animEffect>
@@ -20457,7 +20510,7 @@
                                           </p:stCondLst>
                                         </p:cTn>
                                         <p:tgtEl>
-                                          <p:spTgt spid="19"/>
+                                          <p:spTgt spid="17"/>
                                         </p:tgtEl>
                                         <p:attrNameLst>
                                           <p:attrName>style.visibility</p:attrName>
@@ -20480,7 +20533,7 @@
                                       <p:cBhvr>
                                         <p:cTn id="192" dur="500"/>
                                         <p:tgtEl>
-                                          <p:spTgt spid="8"/>
+                                          <p:spTgt spid="20"/>
                                         </p:tgtEl>
                                       </p:cBhvr>
                                     </p:animEffect>
@@ -20492,7 +20545,7 @@
                                           </p:stCondLst>
                                         </p:cTn>
                                         <p:tgtEl>
-                                          <p:spTgt spid="8"/>
+                                          <p:spTgt spid="20"/>
                                         </p:tgtEl>
                                         <p:attrNameLst>
                                           <p:attrName>style.visibility</p:attrName>
@@ -20515,7 +20568,7 @@
                                       <p:cBhvr>
                                         <p:cTn id="195" dur="500"/>
                                         <p:tgtEl>
-                                          <p:spTgt spid="14"/>
+                                          <p:spTgt spid="9"/>
                                         </p:tgtEl>
                                       </p:cBhvr>
                                     </p:animEffect>
@@ -20527,7 +20580,7 @@
                                           </p:stCondLst>
                                         </p:cTn>
                                         <p:tgtEl>
-                                          <p:spTgt spid="14"/>
+                                          <p:spTgt spid="9"/>
                                         </p:tgtEl>
                                         <p:attrNameLst>
                                           <p:attrName>style.visibility</p:attrName>
@@ -20550,7 +20603,7 @@
                                       <p:cBhvr>
                                         <p:cTn id="198" dur="500"/>
                                         <p:tgtEl>
-                                          <p:spTgt spid="17"/>
+                                          <p:spTgt spid="15"/>
                                         </p:tgtEl>
                                       </p:cBhvr>
                                     </p:animEffect>
@@ -20562,7 +20615,7 @@
                                           </p:stCondLst>
                                         </p:cTn>
                                         <p:tgtEl>
-                                          <p:spTgt spid="17"/>
+                                          <p:spTgt spid="15"/>
                                         </p:tgtEl>
                                         <p:attrNameLst>
                                           <p:attrName>style.visibility</p:attrName>
@@ -20585,7 +20638,7 @@
                                       <p:cBhvr>
                                         <p:cTn id="201" dur="500"/>
                                         <p:tgtEl>
-                                          <p:spTgt spid="20"/>
+                                          <p:spTgt spid="18"/>
                                         </p:tgtEl>
                                       </p:cBhvr>
                                     </p:animEffect>
@@ -20597,7 +20650,42 @@
                                           </p:stCondLst>
                                         </p:cTn>
                                         <p:tgtEl>
-                                          <p:spTgt spid="20"/>
+                                          <p:spTgt spid="18"/>
+                                        </p:tgtEl>
+                                        <p:attrNameLst>
+                                          <p:attrName>style.visibility</p:attrName>
+                                        </p:attrNameLst>
+                                      </p:cBhvr>
+                                      <p:to>
+                                        <p:strVal val="visible"/>
+                                      </p:to>
+                                    </p:set>
+                                  </p:childTnLst>
+                                </p:cTn>
+                              </p:par>
+                              <p:par>
+                                <p:cTn id="203" presetID="10" presetClass="entr" presetSubtype="0" fill="hold" grpId="0" nodeType="withEffect">
+                                  <p:stCondLst>
+                                    <p:cond delay="0"/>
+                                  </p:stCondLst>
+                                  <p:childTnLst>
+                                    <p:animEffect transition="in" filter="fade">
+                                      <p:cBhvr>
+                                        <p:cTn id="204" dur="500"/>
+                                        <p:tgtEl>
+                                          <p:spTgt spid="21"/>
+                                        </p:tgtEl>
+                                      </p:cBhvr>
+                                    </p:animEffect>
+                                    <p:set>
+                                      <p:cBhvr>
+                                        <p:cTn id="205" dur="1" fill="hold">
+                                          <p:stCondLst>
+                                            <p:cond delay="0"/>
+                                          </p:stCondLst>
+                                        </p:cTn>
+                                        <p:tgtEl>
+                                          <p:spTgt spid="21"/>
                                         </p:tgtEl>
                                         <p:attrNameLst>
                                           <p:attrName>style.visibility</p:attrName>
@@ -20617,54 +20705,19 @@
                     </p:cTn>
                   </p:par>
                   <p:par>
-                    <p:cTn id="203" fill="hold">
+                    <p:cTn id="206" fill="hold">
                       <p:stCondLst>
                         <p:cond delay="indefinite"/>
                       </p:stCondLst>
                       <p:childTnLst>
                         <p:par>
-                          <p:cTn id="204" fill="hold">
+                          <p:cTn id="207" fill="hold">
                             <p:stCondLst>
                               <p:cond delay="0"/>
                             </p:stCondLst>
                             <p:childTnLst>
                               <p:par>
-                                <p:cTn id="205" presetID="10" presetClass="entr" presetSubtype="0" fill="hold" grpId="0" nodeType="clickEffect">
-                                  <p:stCondLst>
-                                    <p:cond delay="0"/>
-                                  </p:stCondLst>
-                                  <p:childTnLst>
-                                    <p:animEffect transition="in" filter="fade">
-                                      <p:cBhvr>
-                                        <p:cTn id="206" dur="500"/>
-                                        <p:tgtEl>
-                                          <p:spTgt spid="21"/>
-                                        </p:tgtEl>
-                                      </p:cBhvr>
-                                    </p:animEffect>
-                                    <p:set>
-                                      <p:cBhvr>
-                                        <p:cTn id="207" dur="1" fill="hold">
-                                          <p:stCondLst>
-                                            <p:cond delay="0"/>
-                                          </p:stCondLst>
-                                        </p:cTn>
-                                        <p:tgtEl>
-                                          <p:spTgt spid="21"/>
-                                        </p:tgtEl>
-                                        <p:attrNameLst>
-                                          <p:attrName>style.visibility</p:attrName>
-                                        </p:attrNameLst>
-                                      </p:cBhvr>
-                                      <p:to>
-                                        <p:strVal val="visible"/>
-                                      </p:to>
-                                    </p:set>
-                                  </p:childTnLst>
-                                </p:cTn>
-                              </p:par>
-                              <p:par>
-                                <p:cTn id="208" presetID="10" presetClass="entr" presetSubtype="0" fill="hold" grpId="0" nodeType="withEffect">
+                                <p:cTn id="208" presetID="10" presetClass="entr" presetSubtype="0" fill="hold" grpId="0" nodeType="clickEffect">
                                   <p:stCondLst>
                                     <p:cond delay="0"/>
                                   </p:stCondLst>
@@ -20778,7 +20831,7 @@
                                       <p:cBhvr>
                                         <p:cTn id="218" dur="500"/>
                                         <p:tgtEl>
-                                          <p:spTgt spid="5"/>
+                                          <p:spTgt spid="25"/>
                                         </p:tgtEl>
                                       </p:cBhvr>
                                     </p:animEffect>
@@ -20790,7 +20843,7 @@
                                           </p:stCondLst>
                                         </p:cTn>
                                         <p:tgtEl>
-                                          <p:spTgt spid="5"/>
+                                          <p:spTgt spid="25"/>
                                         </p:tgtEl>
                                         <p:attrNameLst>
                                           <p:attrName>style.visibility</p:attrName>
@@ -20813,7 +20866,7 @@
                                       <p:cBhvr>
                                         <p:cTn id="221" dur="500"/>
                                         <p:tgtEl>
-                                          <p:spTgt spid="12"/>
+                                          <p:spTgt spid="6"/>
                                         </p:tgtEl>
                                       </p:cBhvr>
                                     </p:animEffect>
@@ -20825,7 +20878,7 @@
                                           </p:stCondLst>
                                         </p:cTn>
                                         <p:tgtEl>
-                                          <p:spTgt spid="12"/>
+                                          <p:spTgt spid="6"/>
                                         </p:tgtEl>
                                         <p:attrNameLst>
                                           <p:attrName>style.visibility</p:attrName>
@@ -20848,7 +20901,7 @@
                                       <p:cBhvr>
                                         <p:cTn id="224" dur="500"/>
                                         <p:tgtEl>
-                                          <p:spTgt spid="15"/>
+                                          <p:spTgt spid="13"/>
                                         </p:tgtEl>
                                       </p:cBhvr>
                                     </p:animEffect>
@@ -20860,7 +20913,7 @@
                                           </p:stCondLst>
                                         </p:cTn>
                                         <p:tgtEl>
-                                          <p:spTgt spid="15"/>
+                                          <p:spTgt spid="13"/>
                                         </p:tgtEl>
                                         <p:attrNameLst>
                                           <p:attrName>style.visibility</p:attrName>
@@ -20883,7 +20936,7 @@
                                       <p:cBhvr>
                                         <p:cTn id="227" dur="500"/>
                                         <p:tgtEl>
-                                          <p:spTgt spid="18"/>
+                                          <p:spTgt spid="16"/>
                                         </p:tgtEl>
                                       </p:cBhvr>
                                     </p:animEffect>
@@ -20895,7 +20948,7 @@
                                           </p:stCondLst>
                                         </p:cTn>
                                         <p:tgtEl>
-                                          <p:spTgt spid="18"/>
+                                          <p:spTgt spid="16"/>
                                         </p:tgtEl>
                                         <p:attrNameLst>
                                           <p:attrName>style.visibility</p:attrName>
@@ -20918,7 +20971,7 @@
                                       <p:cBhvr>
                                         <p:cTn id="230" dur="500"/>
                                         <p:tgtEl>
-                                          <p:spTgt spid="25"/>
+                                          <p:spTgt spid="19"/>
                                         </p:tgtEl>
                                       </p:cBhvr>
                                     </p:animEffect>
@@ -20930,7 +20983,7 @@
                                           </p:stCondLst>
                                         </p:cTn>
                                         <p:tgtEl>
-                                          <p:spTgt spid="25"/>
+                                          <p:spTgt spid="19"/>
                                         </p:tgtEl>
                                         <p:attrNameLst>
                                           <p:attrName>style.visibility</p:attrName>
@@ -20953,7 +21006,7 @@
                                       <p:cBhvr>
                                         <p:cTn id="233" dur="500"/>
                                         <p:tgtEl>
-                                          <p:spTgt spid="6"/>
+                                          <p:spTgt spid="26"/>
                                         </p:tgtEl>
                                       </p:cBhvr>
                                     </p:animEffect>
@@ -20965,7 +21018,7 @@
                                           </p:stCondLst>
                                         </p:cTn>
                                         <p:tgtEl>
-                                          <p:spTgt spid="6"/>
+                                          <p:spTgt spid="26"/>
                                         </p:tgtEl>
                                         <p:attrNameLst>
                                           <p:attrName>style.visibility</p:attrName>
@@ -20988,7 +21041,7 @@
                                       <p:cBhvr>
                                         <p:cTn id="236" dur="500"/>
                                         <p:tgtEl>
-                                          <p:spTgt spid="13"/>
+                                          <p:spTgt spid="7"/>
                                         </p:tgtEl>
                                       </p:cBhvr>
                                     </p:animEffect>
@@ -21000,7 +21053,7 @@
                                           </p:stCondLst>
                                         </p:cTn>
                                         <p:tgtEl>
-                                          <p:spTgt spid="13"/>
+                                          <p:spTgt spid="7"/>
                                         </p:tgtEl>
                                         <p:attrNameLst>
                                           <p:attrName>style.visibility</p:attrName>
@@ -21023,7 +21076,7 @@
                                       <p:cBhvr>
                                         <p:cTn id="239" dur="500"/>
                                         <p:tgtEl>
-                                          <p:spTgt spid="16"/>
+                                          <p:spTgt spid="14"/>
                                         </p:tgtEl>
                                       </p:cBhvr>
                                     </p:animEffect>
@@ -21035,7 +21088,7 @@
                                           </p:stCondLst>
                                         </p:cTn>
                                         <p:tgtEl>
-                                          <p:spTgt spid="16"/>
+                                          <p:spTgt spid="14"/>
                                         </p:tgtEl>
                                         <p:attrNameLst>
                                           <p:attrName>style.visibility</p:attrName>
@@ -21058,7 +21111,7 @@
                                       <p:cBhvr>
                                         <p:cTn id="242" dur="500"/>
                                         <p:tgtEl>
-                                          <p:spTgt spid="19"/>
+                                          <p:spTgt spid="17"/>
                                         </p:tgtEl>
                                       </p:cBhvr>
                                     </p:animEffect>
@@ -21070,7 +21123,7 @@
                                           </p:stCondLst>
                                         </p:cTn>
                                         <p:tgtEl>
-                                          <p:spTgt spid="19"/>
+                                          <p:spTgt spid="17"/>
                                         </p:tgtEl>
                                         <p:attrNameLst>
                                           <p:attrName>style.visibility</p:attrName>
@@ -21093,7 +21146,7 @@
                                       <p:cBhvr>
                                         <p:cTn id="245" dur="500"/>
                                         <p:tgtEl>
-                                          <p:spTgt spid="26"/>
+                                          <p:spTgt spid="20"/>
                                         </p:tgtEl>
                                       </p:cBhvr>
                                     </p:animEffect>
@@ -21105,7 +21158,7 @@
                                           </p:stCondLst>
                                         </p:cTn>
                                         <p:tgtEl>
-                                          <p:spTgt spid="26"/>
+                                          <p:spTgt spid="20"/>
                                         </p:tgtEl>
                                         <p:attrNameLst>
                                           <p:attrName>style.visibility</p:attrName>
@@ -21128,7 +21181,7 @@
                                       <p:cBhvr>
                                         <p:cTn id="248" dur="500"/>
                                         <p:tgtEl>
-                                          <p:spTgt spid="8"/>
+                                          <p:spTgt spid="27"/>
                                         </p:tgtEl>
                                       </p:cBhvr>
                                     </p:animEffect>
@@ -21140,7 +21193,7 @@
                                           </p:stCondLst>
                                         </p:cTn>
                                         <p:tgtEl>
-                                          <p:spTgt spid="8"/>
+                                          <p:spTgt spid="27"/>
                                         </p:tgtEl>
                                         <p:attrNameLst>
                                           <p:attrName>style.visibility</p:attrName>
@@ -21163,7 +21216,7 @@
                                       <p:cBhvr>
                                         <p:cTn id="251" dur="500"/>
                                         <p:tgtEl>
-                                          <p:spTgt spid="14"/>
+                                          <p:spTgt spid="9"/>
                                         </p:tgtEl>
                                       </p:cBhvr>
                                     </p:animEffect>
@@ -21175,7 +21228,7 @@
                                           </p:stCondLst>
                                         </p:cTn>
                                         <p:tgtEl>
-                                          <p:spTgt spid="14"/>
+                                          <p:spTgt spid="9"/>
                                         </p:tgtEl>
                                         <p:attrNameLst>
                                           <p:attrName>style.visibility</p:attrName>
@@ -21198,7 +21251,7 @@
                                       <p:cBhvr>
                                         <p:cTn id="254" dur="500"/>
                                         <p:tgtEl>
-                                          <p:spTgt spid="17"/>
+                                          <p:spTgt spid="15"/>
                                         </p:tgtEl>
                                       </p:cBhvr>
                                     </p:animEffect>
@@ -21210,7 +21263,7 @@
                                           </p:stCondLst>
                                         </p:cTn>
                                         <p:tgtEl>
-                                          <p:spTgt spid="17"/>
+                                          <p:spTgt spid="15"/>
                                         </p:tgtEl>
                                         <p:attrNameLst>
                                           <p:attrName>style.visibility</p:attrName>
@@ -21233,7 +21286,7 @@
                                       <p:cBhvr>
                                         <p:cTn id="257" dur="500"/>
                                         <p:tgtEl>
-                                          <p:spTgt spid="20"/>
+                                          <p:spTgt spid="18"/>
                                         </p:tgtEl>
                                       </p:cBhvr>
                                     </p:animEffect>
@@ -21245,7 +21298,7 @@
                                           </p:stCondLst>
                                         </p:cTn>
                                         <p:tgtEl>
-                                          <p:spTgt spid="20"/>
+                                          <p:spTgt spid="18"/>
                                         </p:tgtEl>
                                         <p:attrNameLst>
                                           <p:attrName>style.visibility</p:attrName>
@@ -21268,7 +21321,7 @@
                                       <p:cBhvr>
                                         <p:cTn id="260" dur="500"/>
                                         <p:tgtEl>
-                                          <p:spTgt spid="27"/>
+                                          <p:spTgt spid="21"/>
                                         </p:tgtEl>
                                       </p:cBhvr>
                                     </p:animEffect>
@@ -21280,7 +21333,42 @@
                                           </p:stCondLst>
                                         </p:cTn>
                                         <p:tgtEl>
-                                          <p:spTgt spid="27"/>
+                                          <p:spTgt spid="21"/>
+                                        </p:tgtEl>
+                                        <p:attrNameLst>
+                                          <p:attrName>style.visibility</p:attrName>
+                                        </p:attrNameLst>
+                                      </p:cBhvr>
+                                      <p:to>
+                                        <p:strVal val="visible"/>
+                                      </p:to>
+                                    </p:set>
+                                  </p:childTnLst>
+                                </p:cTn>
+                              </p:par>
+                              <p:par>
+                                <p:cTn id="262" presetID="10" presetClass="entr" presetSubtype="0" fill="hold" grpId="0" nodeType="withEffect">
+                                  <p:stCondLst>
+                                    <p:cond delay="0"/>
+                                  </p:stCondLst>
+                                  <p:childTnLst>
+                                    <p:animEffect transition="in" filter="fade">
+                                      <p:cBhvr>
+                                        <p:cTn id="263" dur="500"/>
+                                        <p:tgtEl>
+                                          <p:spTgt spid="28"/>
+                                        </p:tgtEl>
+                                      </p:cBhvr>
+                                    </p:animEffect>
+                                    <p:set>
+                                      <p:cBhvr>
+                                        <p:cTn id="264" dur="1" fill="hold">
+                                          <p:stCondLst>
+                                            <p:cond delay="0"/>
+                                          </p:stCondLst>
+                                        </p:cTn>
+                                        <p:tgtEl>
+                                          <p:spTgt spid="28"/>
                                         </p:tgtEl>
                                         <p:attrNameLst>
                                           <p:attrName>style.visibility</p:attrName>
@@ -21359,7 +21447,7 @@
             <a:pPr>
               <a:defRPr sz="3200" b="1">
                 <a:solidFill>
-                  <a:srgbClr val="1F2937"/>
+                  <a:srgbClr val="223043"/>
                 </a:solidFill>
                 <a:latin typeface="Liberation Sans"/>
               </a:defRPr>
@@ -21385,7 +21473,7 @@
             <a:avLst/>
           </a:prstGeom>
           <a:solidFill>
-            <a:srgbClr val="163B65"/>
+            <a:srgbClr val="5C82AD"/>
           </a:solidFill>
           <a:ln>
             <a:noFill/>
@@ -21428,7 +21516,7 @@
             <a:avLst/>
           </a:prstGeom>
           <a:solidFill>
-            <a:srgbClr val="E67E22"/>
+            <a:srgbClr val="D69A68"/>
           </a:solidFill>
           <a:ln>
             <a:noFill/>
@@ -21481,11 +21569,11 @@
             <a:avLst/>
           </a:prstGeom>
           <a:solidFill>
-            <a:srgbClr val="E67E22"/>
+            <a:srgbClr val="D69A68"/>
           </a:solidFill>
           <a:ln w="12700">
             <a:solidFill>
-              <a:srgbClr val="D7DFE8"/>
+              <a:srgbClr val="D8E0EA"/>
             </a:solidFill>
           </a:ln>
         </p:spPr>
@@ -21510,7 +21598,7 @@
             <a:pPr algn="ctr">
               <a:defRPr sz="1800" b="0">
                 <a:solidFill>
-                  <a:srgbClr val="1F2937"/>
+                  <a:srgbClr val="223043"/>
                 </a:solidFill>
                 <a:latin typeface="Liberation Sans"/>
               </a:defRPr>
@@ -21537,7 +21625,7 @@
           </a:prstGeom>
           <a:ln w="19050">
             <a:solidFill>
-              <a:srgbClr val="9CA3AF"/>
+              <a:srgbClr val="94A3B6"/>
             </a:solidFill>
             <a:tailEnd type="triangle" w="med" len="med"/>
           </a:ln>
@@ -21572,11 +21660,11 @@
             <a:avLst/>
           </a:prstGeom>
           <a:solidFill>
-            <a:srgbClr val="5B84B1"/>
+            <a:srgbClr val="8FAAC8"/>
           </a:solidFill>
           <a:ln w="12700">
             <a:solidFill>
-              <a:srgbClr val="D7DFE8"/>
+              <a:srgbClr val="D8E0EA"/>
             </a:solidFill>
           </a:ln>
         </p:spPr>
@@ -21601,7 +21689,7 @@
             <a:pPr algn="ctr">
               <a:defRPr sz="1800" b="0">
                 <a:solidFill>
-                  <a:srgbClr val="1F2937"/>
+                  <a:srgbClr val="223043"/>
                 </a:solidFill>
                 <a:latin typeface="Liberation Sans"/>
               </a:defRPr>
@@ -21628,7 +21716,7 @@
           </a:prstGeom>
           <a:ln w="19050">
             <a:solidFill>
-              <a:srgbClr val="9CA3AF"/>
+              <a:srgbClr val="94A3B6"/>
             </a:solidFill>
             <a:tailEnd type="triangle" w="med" len="med"/>
           </a:ln>
@@ -21663,11 +21751,11 @@
             <a:avLst/>
           </a:prstGeom>
           <a:solidFill>
-            <a:srgbClr val="1F8A70"/>
+            <a:srgbClr val="7FA195"/>
           </a:solidFill>
           <a:ln w="12700">
             <a:solidFill>
-              <a:srgbClr val="D7DFE8"/>
+              <a:srgbClr val="D8E0EA"/>
             </a:solidFill>
           </a:ln>
         </p:spPr>
@@ -21692,7 +21780,7 @@
             <a:pPr algn="ctr">
               <a:defRPr sz="1800" b="0">
                 <a:solidFill>
-                  <a:srgbClr val="1F2937"/>
+                  <a:srgbClr val="223043"/>
                 </a:solidFill>
                 <a:latin typeface="Liberation Sans"/>
               </a:defRPr>
@@ -21719,7 +21807,7 @@
           </a:prstGeom>
           <a:ln w="19050">
             <a:solidFill>
-              <a:srgbClr val="9CA3AF"/>
+              <a:srgbClr val="94A3B6"/>
             </a:solidFill>
             <a:tailEnd type="triangle" w="med" len="med"/>
           </a:ln>
@@ -21754,11 +21842,11 @@
             <a:avLst/>
           </a:prstGeom>
           <a:solidFill>
-            <a:srgbClr val="D97706"/>
+            <a:srgbClr val="D8A86A"/>
           </a:solidFill>
           <a:ln w="12700">
             <a:solidFill>
-              <a:srgbClr val="D7DFE8"/>
+              <a:srgbClr val="D8E0EA"/>
             </a:solidFill>
           </a:ln>
         </p:spPr>
@@ -21783,7 +21871,7 @@
             <a:pPr algn="ctr">
               <a:defRPr sz="1800" b="0">
                 <a:solidFill>
-                  <a:srgbClr val="1F2937"/>
+                  <a:srgbClr val="223043"/>
                 </a:solidFill>
                 <a:latin typeface="Liberation Sans"/>
               </a:defRPr>
@@ -21809,11 +21897,11 @@
             <a:avLst/>
           </a:prstGeom>
           <a:solidFill>
-            <a:srgbClr val="163B65"/>
+            <a:srgbClr val="5C82AD"/>
           </a:solidFill>
           <a:ln w="12700">
             <a:solidFill>
-              <a:srgbClr val="163B65"/>
+              <a:srgbClr val="5C82AD"/>
             </a:solidFill>
           </a:ln>
         </p:spPr>
@@ -21864,7 +21952,7 @@
             <a:pPr algn="l">
               <a:defRPr sz="1800" b="1" i="0">
                 <a:solidFill>
-                  <a:srgbClr val="163B65"/>
+                  <a:srgbClr val="5C82AD"/>
                 </a:solidFill>
                 <a:latin typeface="Liberation Sans"/>
               </a:defRPr>
@@ -21900,7 +21988,7 @@
             <a:pPr algn="l">
               <a:defRPr sz="1400" b="0" i="0">
                 <a:solidFill>
-                  <a:srgbClr val="1F2937"/>
+                  <a:srgbClr val="223043"/>
                 </a:solidFill>
                 <a:latin typeface="Liberation Sans"/>
               </a:defRPr>
@@ -21936,7 +22024,7 @@
             <a:pPr algn="l">
               <a:defRPr sz="1800" b="0" i="1">
                 <a:solidFill>
-                  <a:srgbClr val="6B7280"/>
+                  <a:srgbClr val="647489"/>
                 </a:solidFill>
                 <a:latin typeface="Liberation Sans"/>
               </a:defRPr>
@@ -22797,7 +22885,7 @@
             <a:pPr>
               <a:defRPr sz="3200" b="1">
                 <a:solidFill>
-                  <a:srgbClr val="1F2937"/>
+                  <a:srgbClr val="223043"/>
                 </a:solidFill>
                 <a:latin typeface="Liberation Sans"/>
               </a:defRPr>
@@ -22823,7 +22911,7 @@
             <a:avLst/>
           </a:prstGeom>
           <a:solidFill>
-            <a:srgbClr val="163B65"/>
+            <a:srgbClr val="5C82AD"/>
           </a:solidFill>
           <a:ln>
             <a:noFill/>
@@ -22866,11 +22954,11 @@
             <a:avLst/>
           </a:prstGeom>
           <a:solidFill>
-            <a:srgbClr val="5B84B1"/>
+            <a:srgbClr val="8FAAC8"/>
           </a:solidFill>
           <a:ln w="12700">
             <a:solidFill>
-              <a:srgbClr val="D7DFE8"/>
+              <a:srgbClr val="D8E0EA"/>
             </a:solidFill>
           </a:ln>
         </p:spPr>
@@ -22895,7 +22983,7 @@
             <a:pPr algn="ctr">
               <a:defRPr sz="1800" b="0">
                 <a:solidFill>
-                  <a:srgbClr val="1F2937"/>
+                  <a:srgbClr val="223043"/>
                 </a:solidFill>
                 <a:latin typeface="Liberation Sans"/>
               </a:defRPr>
@@ -22922,7 +23010,7 @@
           </a:prstGeom>
           <a:ln w="19050">
             <a:solidFill>
-              <a:srgbClr val="9CA3AF"/>
+              <a:srgbClr val="94A3B6"/>
             </a:solidFill>
             <a:tailEnd type="triangle" w="med" len="med"/>
           </a:ln>
@@ -22957,11 +23045,11 @@
             <a:avLst/>
           </a:prstGeom>
           <a:solidFill>
-            <a:srgbClr val="E67E22"/>
+            <a:srgbClr val="D69A68"/>
           </a:solidFill>
           <a:ln w="12700">
             <a:solidFill>
-              <a:srgbClr val="D7DFE8"/>
+              <a:srgbClr val="D8E0EA"/>
             </a:solidFill>
           </a:ln>
         </p:spPr>
@@ -22986,7 +23074,7 @@
             <a:pPr algn="ctr">
               <a:defRPr sz="1800" b="0">
                 <a:solidFill>
-                  <a:srgbClr val="1F2937"/>
+                  <a:srgbClr val="223043"/>
                 </a:solidFill>
                 <a:latin typeface="Liberation Sans"/>
               </a:defRPr>
@@ -23013,7 +23101,7 @@
           </a:prstGeom>
           <a:ln w="19050">
             <a:solidFill>
-              <a:srgbClr val="9CA3AF"/>
+              <a:srgbClr val="94A3B6"/>
             </a:solidFill>
             <a:tailEnd type="triangle" w="med" len="med"/>
           </a:ln>
@@ -23048,11 +23136,11 @@
             <a:avLst/>
           </a:prstGeom>
           <a:solidFill>
-            <a:srgbClr val="163B65"/>
+            <a:srgbClr val="5C82AD"/>
           </a:solidFill>
           <a:ln w="12700">
             <a:solidFill>
-              <a:srgbClr val="D7DFE8"/>
+              <a:srgbClr val="D8E0EA"/>
             </a:solidFill>
           </a:ln>
         </p:spPr>
@@ -23077,7 +23165,7 @@
             <a:pPr algn="ctr">
               <a:defRPr sz="1800" b="0">
                 <a:solidFill>
-                  <a:srgbClr val="1F2937"/>
+                  <a:srgbClr val="223043"/>
                 </a:solidFill>
                 <a:latin typeface="Liberation Sans"/>
               </a:defRPr>
@@ -23103,7 +23191,7 @@
             <a:avLst/>
           </a:prstGeom>
           <a:solidFill>
-            <a:srgbClr val="5B84B1"/>
+            <a:srgbClr val="8FAAC8"/>
           </a:solidFill>
           <a:ln>
             <a:noFill/>
@@ -23156,11 +23244,11 @@
             <a:avLst/>
           </a:prstGeom>
           <a:solidFill>
-            <a:srgbClr val="EEF2F7"/>
+            <a:srgbClr val="F1F5FA"/>
           </a:solidFill>
           <a:ln w="12700">
             <a:solidFill>
-              <a:srgbClr val="D7DFE8"/>
+              <a:srgbClr val="D8E0EA"/>
             </a:solidFill>
           </a:ln>
         </p:spPr>
@@ -23185,7 +23273,7 @@
             <a:pPr algn="ctr">
               <a:defRPr sz="1800" b="0">
                 <a:solidFill>
-                  <a:srgbClr val="1F2937"/>
+                  <a:srgbClr val="223043"/>
                 </a:solidFill>
                 <a:latin typeface="Liberation Sans"/>
               </a:defRPr>
@@ -23211,11 +23299,11 @@
             <a:avLst/>
           </a:prstGeom>
           <a:solidFill>
-            <a:srgbClr val="EEF2F7"/>
+            <a:srgbClr val="F1F5FA"/>
           </a:solidFill>
           <a:ln w="12700">
             <a:solidFill>
-              <a:srgbClr val="D7DFE8"/>
+              <a:srgbClr val="D8E0EA"/>
             </a:solidFill>
           </a:ln>
         </p:spPr>
@@ -23240,7 +23328,7 @@
             <a:pPr algn="ctr">
               <a:defRPr sz="1800" b="0">
                 <a:solidFill>
-                  <a:srgbClr val="1F2937"/>
+                  <a:srgbClr val="223043"/>
                 </a:solidFill>
                 <a:latin typeface="Liberation Sans"/>
               </a:defRPr>
@@ -23266,11 +23354,11 @@
             <a:avLst/>
           </a:prstGeom>
           <a:solidFill>
-            <a:srgbClr val="EEF2F7"/>
+            <a:srgbClr val="F1F5FA"/>
           </a:solidFill>
           <a:ln w="12700">
             <a:solidFill>
-              <a:srgbClr val="D7DFE8"/>
+              <a:srgbClr val="D8E0EA"/>
             </a:solidFill>
           </a:ln>
         </p:spPr>
@@ -23295,7 +23383,7 @@
             <a:pPr algn="ctr">
               <a:defRPr sz="1800" b="0">
                 <a:solidFill>
-                  <a:srgbClr val="1F2937"/>
+                  <a:srgbClr val="223043"/>
                 </a:solidFill>
                 <a:latin typeface="Liberation Sans"/>
               </a:defRPr>
@@ -23321,7 +23409,7 @@
             <a:avLst/>
           </a:prstGeom>
           <a:solidFill>
-            <a:srgbClr val="163B65"/>
+            <a:srgbClr val="5C82AD"/>
           </a:solidFill>
           <a:ln>
             <a:noFill/>
@@ -23374,7 +23462,7 @@
             <a:avLst/>
           </a:prstGeom>
           <a:solidFill>
-            <a:srgbClr val="163B65"/>
+            <a:srgbClr val="5C82AD"/>
           </a:solidFill>
           <a:ln>
             <a:noFill/>
@@ -23441,7 +23529,7 @@
             <a:pPr algn="l">
               <a:defRPr sz="1800" b="0" i="0">
                 <a:solidFill>
-                  <a:srgbClr val="1F2937"/>
+                  <a:srgbClr val="223043"/>
                 </a:solidFill>
                 <a:latin typeface="Liberation Sans"/>
               </a:defRPr>
@@ -24197,7 +24285,7 @@
             <a:pPr>
               <a:defRPr sz="3200" b="1">
                 <a:solidFill>
-                  <a:srgbClr val="1F2937"/>
+                  <a:srgbClr val="223043"/>
                 </a:solidFill>
                 <a:latin typeface="Liberation Sans"/>
               </a:defRPr>
@@ -24223,7 +24311,7 @@
             <a:avLst/>
           </a:prstGeom>
           <a:solidFill>
-            <a:srgbClr val="163B65"/>
+            <a:srgbClr val="5C82AD"/>
           </a:solidFill>
           <a:ln>
             <a:noFill/>
@@ -24266,11 +24354,11 @@
             <a:avLst/>
           </a:prstGeom>
           <a:solidFill>
-            <a:srgbClr val="163B65"/>
+            <a:srgbClr val="5C82AD"/>
           </a:solidFill>
           <a:ln w="12700">
             <a:solidFill>
-              <a:srgbClr val="163B65"/>
+              <a:srgbClr val="5C82AD"/>
             </a:solidFill>
           </a:ln>
         </p:spPr>
@@ -24322,7 +24410,7 @@
           </a:prstGeom>
           <a:ln w="19050">
             <a:solidFill>
-              <a:srgbClr val="163B65"/>
+              <a:srgbClr val="5C82AD"/>
             </a:solidFill>
             <a:tailEnd type="triangle" w="med" len="med"/>
           </a:ln>
@@ -24357,11 +24445,11 @@
             <a:avLst/>
           </a:prstGeom>
           <a:solidFill>
-            <a:srgbClr val="1F8A70"/>
+            <a:srgbClr val="7FA195"/>
           </a:solidFill>
           <a:ln w="12700">
             <a:solidFill>
-              <a:srgbClr val="1F8A70"/>
+              <a:srgbClr val="7FA195"/>
             </a:solidFill>
           </a:ln>
         </p:spPr>
@@ -24413,7 +24501,7 @@
           </a:prstGeom>
           <a:ln w="19050">
             <a:solidFill>
-              <a:srgbClr val="163B65"/>
+              <a:srgbClr val="5C82AD"/>
             </a:solidFill>
             <a:tailEnd type="triangle" w="med" len="med"/>
           </a:ln>
@@ -24448,11 +24536,11 @@
             <a:avLst/>
           </a:prstGeom>
           <a:solidFill>
-            <a:srgbClr val="5B84B1"/>
+            <a:srgbClr val="8FAAC8"/>
           </a:solidFill>
           <a:ln w="12700">
             <a:solidFill>
-              <a:srgbClr val="5B84B1"/>
+              <a:srgbClr val="8FAAC8"/>
             </a:solidFill>
           </a:ln>
         </p:spPr>
@@ -24504,7 +24592,7 @@
           </a:prstGeom>
           <a:ln w="19050">
             <a:solidFill>
-              <a:srgbClr val="163B65"/>
+              <a:srgbClr val="5C82AD"/>
             </a:solidFill>
             <a:tailEnd type="triangle" w="med" len="med"/>
           </a:ln>
@@ -24539,11 +24627,11 @@
             <a:avLst/>
           </a:prstGeom>
           <a:solidFill>
-            <a:srgbClr val="E67E22"/>
+            <a:srgbClr val="D69A68"/>
           </a:solidFill>
           <a:ln w="12700">
             <a:solidFill>
-              <a:srgbClr val="E67E22"/>
+              <a:srgbClr val="D69A68"/>
             </a:solidFill>
           </a:ln>
         </p:spPr>
@@ -24594,11 +24682,11 @@
             <a:avLst/>
           </a:prstGeom>
           <a:solidFill>
-            <a:srgbClr val="163B65"/>
+            <a:srgbClr val="5C82AD"/>
           </a:solidFill>
           <a:ln w="12700">
             <a:solidFill>
-              <a:srgbClr val="163B65"/>
+              <a:srgbClr val="5C82AD"/>
             </a:solidFill>
           </a:ln>
         </p:spPr>
@@ -24649,7 +24737,7 @@
             <a:pPr algn="l">
               <a:defRPr sz="1800" b="1" i="0">
                 <a:solidFill>
-                  <a:srgbClr val="163B65"/>
+                  <a:srgbClr val="5C82AD"/>
                 </a:solidFill>
                 <a:latin typeface="Liberation Sans"/>
               </a:defRPr>
@@ -24685,7 +24773,7 @@
             <a:pPr algn="l">
               <a:defRPr sz="1400" b="0" i="0">
                 <a:solidFill>
-                  <a:srgbClr val="1F2937"/>
+                  <a:srgbClr val="223043"/>
                 </a:solidFill>
                 <a:latin typeface="Liberation Sans"/>
               </a:defRPr>
@@ -24721,7 +24809,7 @@
             <a:pPr algn="l">
               <a:defRPr sz="1800" b="0" i="1">
                 <a:solidFill>
-                  <a:srgbClr val="6B7280"/>
+                  <a:srgbClr val="647489"/>
                 </a:solidFill>
                 <a:latin typeface="Liberation Sans"/>
               </a:defRPr>
@@ -25547,7 +25635,7 @@
             <a:pPr>
               <a:defRPr sz="3200" b="1">
                 <a:solidFill>
-                  <a:srgbClr val="1F2937"/>
+                  <a:srgbClr val="223043"/>
                 </a:solidFill>
                 <a:latin typeface="Liberation Sans"/>
               </a:defRPr>
@@ -25573,7 +25661,7 @@
             <a:avLst/>
           </a:prstGeom>
           <a:solidFill>
-            <a:srgbClr val="163B65"/>
+            <a:srgbClr val="5C82AD"/>
           </a:solidFill>
           <a:ln>
             <a:noFill/>
@@ -25616,7 +25704,7 @@
             <a:avLst/>
           </a:prstGeom>
           <a:solidFill>
-            <a:srgbClr val="163B65"/>
+            <a:srgbClr val="5C82AD"/>
           </a:solidFill>
           <a:ln>
             <a:noFill/>
@@ -25669,11 +25757,11 @@
             <a:avLst/>
           </a:prstGeom>
           <a:solidFill>
-            <a:srgbClr val="5B84B1"/>
+            <a:srgbClr val="8FAAC8"/>
           </a:solidFill>
           <a:ln w="12700">
             <a:solidFill>
-              <a:srgbClr val="5B84B1"/>
+              <a:srgbClr val="8FAAC8"/>
             </a:solidFill>
           </a:ln>
         </p:spPr>
@@ -25724,7 +25812,7 @@
             <a:pPr algn="l">
               <a:defRPr sz="1800" b="1" i="0">
                 <a:solidFill>
-                  <a:srgbClr val="5B84B1"/>
+                  <a:srgbClr val="8FAAC8"/>
                 </a:solidFill>
                 <a:latin typeface="Liberation Sans"/>
               </a:defRPr>
@@ -25760,7 +25848,7 @@
             <a:pPr algn="l">
               <a:defRPr sz="1400" b="0" i="0">
                 <a:solidFill>
-                  <a:srgbClr val="1F2937"/>
+                  <a:srgbClr val="223043"/>
                 </a:solidFill>
                 <a:latin typeface="Liberation Sans"/>
               </a:defRPr>
@@ -25786,11 +25874,11 @@
             <a:avLst/>
           </a:prstGeom>
           <a:solidFill>
-            <a:srgbClr val="E67E22"/>
+            <a:srgbClr val="D69A68"/>
           </a:solidFill>
           <a:ln w="12700">
             <a:solidFill>
-              <a:srgbClr val="E67E22"/>
+              <a:srgbClr val="D69A68"/>
             </a:solidFill>
           </a:ln>
         </p:spPr>
@@ -25841,7 +25929,7 @@
             <a:pPr algn="l">
               <a:defRPr sz="1800" b="1" i="0">
                 <a:solidFill>
-                  <a:srgbClr val="E67E22"/>
+                  <a:srgbClr val="D69A68"/>
                 </a:solidFill>
                 <a:latin typeface="Liberation Sans"/>
               </a:defRPr>
@@ -25877,7 +25965,7 @@
             <a:pPr algn="l">
               <a:defRPr sz="1400" b="0" i="0">
                 <a:solidFill>
-                  <a:srgbClr val="1F2937"/>
+                  <a:srgbClr val="223043"/>
                 </a:solidFill>
                 <a:latin typeface="Liberation Sans"/>
               </a:defRPr>
@@ -25903,11 +25991,11 @@
             <a:avLst/>
           </a:prstGeom>
           <a:solidFill>
-            <a:srgbClr val="1F8A70"/>
+            <a:srgbClr val="7FA195"/>
           </a:solidFill>
           <a:ln w="12700">
             <a:solidFill>
-              <a:srgbClr val="1F8A70"/>
+              <a:srgbClr val="7FA195"/>
             </a:solidFill>
           </a:ln>
         </p:spPr>
@@ -25958,7 +26046,7 @@
             <a:pPr algn="l">
               <a:defRPr sz="1800" b="1" i="0">
                 <a:solidFill>
-                  <a:srgbClr val="1F8A70"/>
+                  <a:srgbClr val="7FA195"/>
                 </a:solidFill>
                 <a:latin typeface="Liberation Sans"/>
               </a:defRPr>
@@ -25994,7 +26082,7 @@
             <a:pPr algn="l">
               <a:defRPr sz="1400" b="0" i="0">
                 <a:solidFill>
-                  <a:srgbClr val="1F2937"/>
+                  <a:srgbClr val="223043"/>
                 </a:solidFill>
                 <a:latin typeface="Liberation Sans"/>
               </a:defRPr>
@@ -26030,7 +26118,7 @@
             <a:pPr algn="l">
               <a:defRPr sz="1800" b="0" i="1">
                 <a:solidFill>
-                  <a:srgbClr val="6B7280"/>
+                  <a:srgbClr val="647489"/>
                 </a:solidFill>
                 <a:latin typeface="Liberation Sans"/>
               </a:defRPr>
@@ -27390,7 +27478,7 @@
             <a:pPr>
               <a:defRPr sz="3200" b="1">
                 <a:solidFill>
-                  <a:srgbClr val="1F2937"/>
+                  <a:srgbClr val="223043"/>
                 </a:solidFill>
                 <a:latin typeface="Liberation Sans"/>
               </a:defRPr>
@@ -27416,7 +27504,7 @@
             <a:avLst/>
           </a:prstGeom>
           <a:solidFill>
-            <a:srgbClr val="163B65"/>
+            <a:srgbClr val="5C82AD"/>
           </a:solidFill>
           <a:ln>
             <a:noFill/>
@@ -27469,7 +27557,7 @@
             <a:pPr algn="r">
               <a:defRPr sz="1100">
                 <a:solidFill>
-                  <a:srgbClr val="9CA3AF"/>
+                  <a:srgbClr val="94A3B6"/>
                 </a:solidFill>
                 <a:latin typeface="Liberation Sans"/>
               </a:defRPr>
@@ -27495,7 +27583,7 @@
             <a:avLst/>
           </a:prstGeom>
           <a:solidFill>
-            <a:srgbClr val="C44900"/>
+            <a:srgbClr val="C98A78"/>
           </a:solidFill>
           <a:ln>
             <a:noFill/>
@@ -27548,11 +27636,11 @@
             <a:avLst/>
           </a:prstGeom>
           <a:solidFill>
-            <a:srgbClr val="EEF2F7"/>
+            <a:srgbClr val="F1F5FA"/>
           </a:solidFill>
           <a:ln w="12700">
             <a:solidFill>
-              <a:srgbClr val="D7DFE8"/>
+              <a:srgbClr val="D8E0EA"/>
             </a:solidFill>
           </a:ln>
         </p:spPr>
@@ -27577,7 +27665,7 @@
             <a:pPr algn="ctr">
               <a:defRPr sz="1800" b="0">
                 <a:solidFill>
-                  <a:srgbClr val="1F2937"/>
+                  <a:srgbClr val="223043"/>
                 </a:solidFill>
                 <a:latin typeface="Liberation Sans"/>
               </a:defRPr>
@@ -27604,7 +27692,7 @@
           </a:prstGeom>
           <a:ln w="19050">
             <a:solidFill>
-              <a:srgbClr val="9CA3AF"/>
+              <a:srgbClr val="94A3B6"/>
             </a:solidFill>
             <a:tailEnd type="triangle" w="med" len="med"/>
           </a:ln>
@@ -27639,11 +27727,11 @@
             <a:avLst/>
           </a:prstGeom>
           <a:solidFill>
-            <a:srgbClr val="C44900"/>
+            <a:srgbClr val="C98A78"/>
           </a:solidFill>
           <a:ln w="12700">
             <a:solidFill>
-              <a:srgbClr val="D7DFE8"/>
+              <a:srgbClr val="D8E0EA"/>
             </a:solidFill>
           </a:ln>
         </p:spPr>
@@ -27668,7 +27756,7 @@
             <a:pPr algn="ctr">
               <a:defRPr sz="1800" b="0">
                 <a:solidFill>
-                  <a:srgbClr val="1F2937"/>
+                  <a:srgbClr val="223043"/>
                 </a:solidFill>
                 <a:latin typeface="Liberation Sans"/>
               </a:defRPr>
@@ -27695,7 +27783,7 @@
           </a:prstGeom>
           <a:ln w="19050">
             <a:solidFill>
-              <a:srgbClr val="9CA3AF"/>
+              <a:srgbClr val="94A3B6"/>
             </a:solidFill>
             <a:tailEnd type="triangle" w="med" len="med"/>
           </a:ln>
@@ -27730,11 +27818,11 @@
             <a:avLst/>
           </a:prstGeom>
           <a:solidFill>
-            <a:srgbClr val="EEF2F7"/>
+            <a:srgbClr val="F1F5FA"/>
           </a:solidFill>
           <a:ln w="12700">
             <a:solidFill>
-              <a:srgbClr val="D7DFE8"/>
+              <a:srgbClr val="D8E0EA"/>
             </a:solidFill>
           </a:ln>
         </p:spPr>
@@ -27759,7 +27847,7 @@
             <a:pPr algn="ctr">
               <a:defRPr sz="1800" b="0">
                 <a:solidFill>
-                  <a:srgbClr val="1F2937"/>
+                  <a:srgbClr val="223043"/>
                 </a:solidFill>
                 <a:latin typeface="Liberation Sans"/>
               </a:defRPr>
@@ -27785,11 +27873,11 @@
             <a:avLst/>
           </a:prstGeom>
           <a:solidFill>
-            <a:srgbClr val="C44900"/>
+            <a:srgbClr val="C98A78"/>
           </a:solidFill>
           <a:ln w="12700">
             <a:solidFill>
-              <a:srgbClr val="C44900"/>
+              <a:srgbClr val="C98A78"/>
             </a:solidFill>
           </a:ln>
         </p:spPr>
@@ -27840,7 +27928,7 @@
             <a:pPr algn="l">
               <a:defRPr sz="1800" b="1" i="0">
                 <a:solidFill>
-                  <a:srgbClr val="C44900"/>
+                  <a:srgbClr val="C98A78"/>
                 </a:solidFill>
                 <a:latin typeface="Liberation Sans"/>
               </a:defRPr>
@@ -27876,7 +27964,7 @@
             <a:pPr algn="l">
               <a:defRPr sz="1400" b="0" i="0">
                 <a:solidFill>
-                  <a:srgbClr val="1F2937"/>
+                  <a:srgbClr val="223043"/>
                 </a:solidFill>
                 <a:latin typeface="Liberation Sans"/>
               </a:defRPr>
@@ -27902,7 +27990,7 @@
             <a:avLst/>
           </a:prstGeom>
           <a:solidFill>
-            <a:srgbClr val="1F8A70"/>
+            <a:srgbClr val="7FA195"/>
           </a:solidFill>
           <a:ln>
             <a:noFill/>
@@ -27955,11 +28043,11 @@
             <a:avLst/>
           </a:prstGeom>
           <a:solidFill>
-            <a:srgbClr val="EEF2F7"/>
+            <a:srgbClr val="F1F5FA"/>
           </a:solidFill>
           <a:ln w="12700">
             <a:solidFill>
-              <a:srgbClr val="D7DFE8"/>
+              <a:srgbClr val="D8E0EA"/>
             </a:solidFill>
           </a:ln>
         </p:spPr>
@@ -27984,7 +28072,7 @@
             <a:pPr algn="ctr">
               <a:defRPr sz="1800" b="0">
                 <a:solidFill>
-                  <a:srgbClr val="1F2937"/>
+                  <a:srgbClr val="223043"/>
                 </a:solidFill>
                 <a:latin typeface="Liberation Sans"/>
               </a:defRPr>
@@ -28011,7 +28099,7 @@
           </a:prstGeom>
           <a:ln w="19050">
             <a:solidFill>
-              <a:srgbClr val="9CA3AF"/>
+              <a:srgbClr val="94A3B6"/>
             </a:solidFill>
             <a:tailEnd type="triangle" w="med" len="med"/>
           </a:ln>
@@ -28046,11 +28134,11 @@
             <a:avLst/>
           </a:prstGeom>
           <a:solidFill>
-            <a:srgbClr val="5B84B1"/>
+            <a:srgbClr val="8FAAC8"/>
           </a:solidFill>
           <a:ln w="12700">
             <a:solidFill>
-              <a:srgbClr val="D7DFE8"/>
+              <a:srgbClr val="D8E0EA"/>
             </a:solidFill>
           </a:ln>
         </p:spPr>
@@ -28075,7 +28163,7 @@
             <a:pPr algn="ctr">
               <a:defRPr sz="1800" b="0">
                 <a:solidFill>
-                  <a:srgbClr val="1F2937"/>
+                  <a:srgbClr val="223043"/>
                 </a:solidFill>
                 <a:latin typeface="Liberation Sans"/>
               </a:defRPr>
@@ -28102,7 +28190,7 @@
           </a:prstGeom>
           <a:ln w="19050">
             <a:solidFill>
-              <a:srgbClr val="9CA3AF"/>
+              <a:srgbClr val="94A3B6"/>
             </a:solidFill>
             <a:tailEnd type="triangle" w="med" len="med"/>
           </a:ln>
@@ -28137,11 +28225,11 @@
             <a:avLst/>
           </a:prstGeom>
           <a:solidFill>
-            <a:srgbClr val="E67E22"/>
+            <a:srgbClr val="D69A68"/>
           </a:solidFill>
           <a:ln w="12700">
             <a:solidFill>
-              <a:srgbClr val="D7DFE8"/>
+              <a:srgbClr val="D8E0EA"/>
             </a:solidFill>
           </a:ln>
         </p:spPr>
@@ -28166,7 +28254,7 @@
             <a:pPr algn="ctr">
               <a:defRPr sz="1800" b="0">
                 <a:solidFill>
-                  <a:srgbClr val="1F2937"/>
+                  <a:srgbClr val="223043"/>
                 </a:solidFill>
                 <a:latin typeface="Liberation Sans"/>
               </a:defRPr>
@@ -28193,7 +28281,7 @@
           </a:prstGeom>
           <a:ln w="19050">
             <a:solidFill>
-              <a:srgbClr val="9CA3AF"/>
+              <a:srgbClr val="94A3B6"/>
             </a:solidFill>
             <a:tailEnd type="triangle" w="med" len="med"/>
           </a:ln>
@@ -28228,11 +28316,11 @@
             <a:avLst/>
           </a:prstGeom>
           <a:solidFill>
-            <a:srgbClr val="1F8A70"/>
+            <a:srgbClr val="7FA195"/>
           </a:solidFill>
           <a:ln w="12700">
             <a:solidFill>
-              <a:srgbClr val="D7DFE8"/>
+              <a:srgbClr val="D8E0EA"/>
             </a:solidFill>
           </a:ln>
         </p:spPr>
@@ -28257,7 +28345,7 @@
             <a:pPr algn="ctr">
               <a:defRPr sz="1800" b="0">
                 <a:solidFill>
-                  <a:srgbClr val="1F2937"/>
+                  <a:srgbClr val="223043"/>
                 </a:solidFill>
                 <a:latin typeface="Liberation Sans"/>
               </a:defRPr>
@@ -28283,11 +28371,11 @@
             <a:avLst/>
           </a:prstGeom>
           <a:solidFill>
-            <a:srgbClr val="1F8A70"/>
+            <a:srgbClr val="7FA195"/>
           </a:solidFill>
           <a:ln w="12700">
             <a:solidFill>
-              <a:srgbClr val="1F8A70"/>
+              <a:srgbClr val="7FA195"/>
             </a:solidFill>
           </a:ln>
         </p:spPr>
@@ -28338,7 +28426,7 @@
             <a:pPr algn="l">
               <a:defRPr sz="1800" b="1" i="0">
                 <a:solidFill>
-                  <a:srgbClr val="1F8A70"/>
+                  <a:srgbClr val="7FA195"/>
                 </a:solidFill>
                 <a:latin typeface="Liberation Sans"/>
               </a:defRPr>
@@ -28374,7 +28462,7 @@
             <a:pPr algn="l">
               <a:defRPr sz="1400" b="0" i="0">
                 <a:solidFill>
-                  <a:srgbClr val="1F2937"/>
+                  <a:srgbClr val="223043"/>
                 </a:solidFill>
                 <a:latin typeface="Liberation Sans"/>
               </a:defRPr>
@@ -28410,7 +28498,7 @@
             <a:pPr algn="l">
               <a:defRPr sz="1800" b="0" i="1">
                 <a:solidFill>
-                  <a:srgbClr val="6B7280"/>
+                  <a:srgbClr val="647489"/>
                 </a:solidFill>
                 <a:latin typeface="Liberation Sans"/>
               </a:defRPr>
@@ -29808,7 +29896,7 @@
     <p:bg>
       <p:bgPr>
         <a:solidFill>
-          <a:srgbClr val="163B65"/>
+          <a:srgbClr val="EAF0F7"/>
         </a:solidFill>
         <a:effectLst/>
       </p:bgPr>
@@ -29845,7 +29933,7 @@
             <a:pPr algn="l">
               <a:defRPr sz="3000" b="1" i="0">
                 <a:solidFill>
-                  <a:srgbClr val="FFFFFF"/>
+                  <a:srgbClr val="5C82AD"/>
                 </a:solidFill>
                 <a:latin typeface="Liberation Sans"/>
               </a:defRPr>
@@ -29881,7 +29969,7 @@
             <a:pPr algn="l">
               <a:defRPr sz="1800" b="0" i="0">
                 <a:solidFill>
-                  <a:srgbClr val="EEF2F7"/>
+                  <a:srgbClr val="647489"/>
                 </a:solidFill>
                 <a:latin typeface="Liberation Sans"/>
               </a:defRPr>
@@ -29917,7 +30005,7 @@
             <a:pPr algn="l">
               <a:defRPr sz="3000" b="1" i="0">
                 <a:solidFill>
-                  <a:srgbClr val="E67E22"/>
+                  <a:srgbClr val="D69A68"/>
                 </a:solidFill>
                 <a:latin typeface="Liberation Sans"/>
               </a:defRPr>
@@ -29953,7 +30041,7 @@
             <a:pPr algn="l">
               <a:defRPr sz="1800" b="1" i="0">
                 <a:solidFill>
-                  <a:srgbClr val="FFFFFF"/>
+                  <a:srgbClr val="223043"/>
                 </a:solidFill>
                 <a:latin typeface="Liberation Sans"/>
               </a:defRPr>
@@ -29989,7 +30077,7 @@
             <a:pPr algn="l">
               <a:defRPr sz="3000" b="1" i="0">
                 <a:solidFill>
-                  <a:srgbClr val="E8F1F8"/>
+                  <a:srgbClr val="8FAAC8"/>
                 </a:solidFill>
                 <a:latin typeface="Liberation Sans"/>
               </a:defRPr>
@@ -30025,7 +30113,7 @@
             <a:pPr algn="l">
               <a:defRPr sz="1800" b="1" i="0">
                 <a:solidFill>
-                  <a:srgbClr val="FFFFFF"/>
+                  <a:srgbClr val="223043"/>
                 </a:solidFill>
                 <a:latin typeface="Liberation Sans"/>
               </a:defRPr>
@@ -30061,7 +30149,7 @@
             <a:pPr algn="l">
               <a:defRPr sz="3000" b="1" i="0">
                 <a:solidFill>
-                  <a:srgbClr val="1F8A70"/>
+                  <a:srgbClr val="7FA195"/>
                 </a:solidFill>
                 <a:latin typeface="Liberation Sans"/>
               </a:defRPr>
@@ -30097,7 +30185,7 @@
             <a:pPr algn="l">
               <a:defRPr sz="1800" b="1" i="0">
                 <a:solidFill>
-                  <a:srgbClr val="FFFFFF"/>
+                  <a:srgbClr val="223043"/>
                 </a:solidFill>
                 <a:latin typeface="Liberation Sans"/>
               </a:defRPr>
@@ -30133,7 +30221,7 @@
             <a:pPr algn="ctr">
               <a:defRPr sz="2200" b="1" i="0">
                 <a:solidFill>
-                  <a:srgbClr val="E8F1F8"/>
+                  <a:srgbClr val="5C82AD"/>
                 </a:solidFill>
                 <a:latin typeface="Liberation Sans"/>
               </a:defRPr>
@@ -30784,7 +30872,7 @@
             <a:pPr>
               <a:defRPr sz="3200" b="1">
                 <a:solidFill>
-                  <a:srgbClr val="1F2937"/>
+                  <a:srgbClr val="223043"/>
                 </a:solidFill>
                 <a:latin typeface="Liberation Sans"/>
               </a:defRPr>
@@ -30810,7 +30898,7 @@
             <a:avLst/>
           </a:prstGeom>
           <a:solidFill>
-            <a:srgbClr val="163B65"/>
+            <a:srgbClr val="5C82AD"/>
           </a:solidFill>
           <a:ln>
             <a:noFill/>
@@ -30863,7 +30951,7 @@
             <a:pPr algn="r">
               <a:defRPr sz="1100">
                 <a:solidFill>
-                  <a:srgbClr val="9CA3AF"/>
+                  <a:srgbClr val="94A3B6"/>
                 </a:solidFill>
                 <a:latin typeface="Liberation Sans"/>
               </a:defRPr>
@@ -30889,11 +30977,11 @@
             <a:avLst/>
           </a:prstGeom>
           <a:solidFill>
-            <a:srgbClr val="5B84B1"/>
+            <a:srgbClr val="8FAAC8"/>
           </a:solidFill>
           <a:ln w="12700">
             <a:solidFill>
-              <a:srgbClr val="5B84B1"/>
+              <a:srgbClr val="8FAAC8"/>
             </a:solidFill>
           </a:ln>
         </p:spPr>
@@ -30944,7 +31032,7 @@
             <a:pPr algn="l">
               <a:defRPr sz="1800" b="1" i="0">
                 <a:solidFill>
-                  <a:srgbClr val="5B84B1"/>
+                  <a:srgbClr val="8FAAC8"/>
                 </a:solidFill>
                 <a:latin typeface="Liberation Sans"/>
               </a:defRPr>
@@ -30980,7 +31068,7 @@
             <a:pPr algn="l">
               <a:defRPr sz="1400" b="0" i="0">
                 <a:solidFill>
-                  <a:srgbClr val="1F2937"/>
+                  <a:srgbClr val="223043"/>
                 </a:solidFill>
                 <a:latin typeface="Liberation Sans"/>
               </a:defRPr>
@@ -31006,11 +31094,11 @@
             <a:avLst/>
           </a:prstGeom>
           <a:solidFill>
-            <a:srgbClr val="5B84B1"/>
+            <a:srgbClr val="8FAAC8"/>
           </a:solidFill>
           <a:ln w="12700">
             <a:solidFill>
-              <a:srgbClr val="D7DFE8"/>
+              <a:srgbClr val="D8E0EA"/>
             </a:solidFill>
           </a:ln>
         </p:spPr>
@@ -31035,7 +31123,7 @@
             <a:pPr algn="ctr">
               <a:defRPr sz="1800" b="0">
                 <a:solidFill>
-                  <a:srgbClr val="1F2937"/>
+                  <a:srgbClr val="223043"/>
                 </a:solidFill>
                 <a:latin typeface="Liberation Sans"/>
               </a:defRPr>
@@ -31062,7 +31150,7 @@
           </a:prstGeom>
           <a:ln w="19050">
             <a:solidFill>
-              <a:srgbClr val="9CA3AF"/>
+              <a:srgbClr val="94A3B6"/>
             </a:solidFill>
             <a:tailEnd type="triangle" w="med" len="med"/>
           </a:ln>
@@ -31097,11 +31185,11 @@
             <a:avLst/>
           </a:prstGeom>
           <a:solidFill>
-            <a:srgbClr val="EEF2F7"/>
+            <a:srgbClr val="F1F5FA"/>
           </a:solidFill>
           <a:ln w="12700">
             <a:solidFill>
-              <a:srgbClr val="D7DFE8"/>
+              <a:srgbClr val="D8E0EA"/>
             </a:solidFill>
           </a:ln>
         </p:spPr>
@@ -31126,7 +31214,7 @@
             <a:pPr algn="ctr">
               <a:defRPr sz="1800" b="0">
                 <a:solidFill>
-                  <a:srgbClr val="1F2937"/>
+                  <a:srgbClr val="223043"/>
                 </a:solidFill>
                 <a:latin typeface="Liberation Sans"/>
               </a:defRPr>
@@ -31153,7 +31241,7 @@
           </a:prstGeom>
           <a:ln w="19050">
             <a:solidFill>
-              <a:srgbClr val="9CA3AF"/>
+              <a:srgbClr val="94A3B6"/>
             </a:solidFill>
             <a:tailEnd type="triangle" w="med" len="med"/>
           </a:ln>
@@ -31188,11 +31276,11 @@
             <a:avLst/>
           </a:prstGeom>
           <a:solidFill>
-            <a:srgbClr val="E67E22"/>
+            <a:srgbClr val="D69A68"/>
           </a:solidFill>
           <a:ln w="12700">
             <a:solidFill>
-              <a:srgbClr val="D7DFE8"/>
+              <a:srgbClr val="D8E0EA"/>
             </a:solidFill>
           </a:ln>
         </p:spPr>
@@ -31217,7 +31305,7 @@
             <a:pPr algn="ctr">
               <a:defRPr sz="1800" b="0">
                 <a:solidFill>
-                  <a:srgbClr val="1F2937"/>
+                  <a:srgbClr val="223043"/>
                 </a:solidFill>
                 <a:latin typeface="Liberation Sans"/>
               </a:defRPr>
@@ -31243,11 +31331,11 @@
             <a:avLst/>
           </a:prstGeom>
           <a:solidFill>
-            <a:srgbClr val="EEF2F7"/>
+            <a:srgbClr val="F1F5FA"/>
           </a:solidFill>
           <a:ln w="12700">
             <a:solidFill>
-              <a:srgbClr val="D7DFE8"/>
+              <a:srgbClr val="D8E0EA"/>
             </a:solidFill>
           </a:ln>
         </p:spPr>
@@ -31272,7 +31360,7 @@
             <a:pPr algn="ctr">
               <a:defRPr sz="1800" b="0">
                 <a:solidFill>
-                  <a:srgbClr val="1F2937"/>
+                  <a:srgbClr val="223043"/>
                 </a:solidFill>
                 <a:latin typeface="Liberation Sans"/>
               </a:defRPr>
@@ -31298,11 +31386,11 @@
             <a:avLst/>
           </a:prstGeom>
           <a:solidFill>
-            <a:srgbClr val="EEF2F7"/>
+            <a:srgbClr val="F1F5FA"/>
           </a:solidFill>
           <a:ln w="12700">
             <a:solidFill>
-              <a:srgbClr val="D7DFE8"/>
+              <a:srgbClr val="D8E0EA"/>
             </a:solidFill>
           </a:ln>
         </p:spPr>
@@ -31327,7 +31415,7 @@
             <a:pPr algn="ctr">
               <a:defRPr sz="1800" b="0">
                 <a:solidFill>
-                  <a:srgbClr val="1F2937"/>
+                  <a:srgbClr val="223043"/>
                 </a:solidFill>
                 <a:latin typeface="Liberation Sans"/>
               </a:defRPr>
@@ -31353,11 +31441,11 @@
             <a:avLst/>
           </a:prstGeom>
           <a:solidFill>
-            <a:srgbClr val="EEF2F7"/>
+            <a:srgbClr val="F1F5FA"/>
           </a:solidFill>
           <a:ln w="12700">
             <a:solidFill>
-              <a:srgbClr val="D7DFE8"/>
+              <a:srgbClr val="D8E0EA"/>
             </a:solidFill>
           </a:ln>
         </p:spPr>
@@ -31382,7 +31470,7 @@
             <a:pPr algn="ctr">
               <a:defRPr sz="1800" b="0">
                 <a:solidFill>
-                  <a:srgbClr val="1F2937"/>
+                  <a:srgbClr val="223043"/>
                 </a:solidFill>
                 <a:latin typeface="Liberation Sans"/>
               </a:defRPr>
@@ -31408,11 +31496,11 @@
             <a:avLst/>
           </a:prstGeom>
           <a:solidFill>
-            <a:srgbClr val="EEF2F7"/>
+            <a:srgbClr val="F1F5FA"/>
           </a:solidFill>
           <a:ln w="12700">
             <a:solidFill>
-              <a:srgbClr val="D7DFE8"/>
+              <a:srgbClr val="D8E0EA"/>
             </a:solidFill>
           </a:ln>
         </p:spPr>
@@ -31437,7 +31525,7 @@
             <a:pPr algn="ctr">
               <a:defRPr sz="1800" b="0">
                 <a:solidFill>
-                  <a:srgbClr val="1F2937"/>
+                  <a:srgbClr val="223043"/>
                 </a:solidFill>
                 <a:latin typeface="Liberation Sans"/>
               </a:defRPr>
@@ -31463,11 +31551,11 @@
             <a:avLst/>
           </a:prstGeom>
           <a:solidFill>
-            <a:srgbClr val="EEF2F7"/>
+            <a:srgbClr val="F1F5FA"/>
           </a:solidFill>
           <a:ln w="12700">
             <a:solidFill>
-              <a:srgbClr val="D7DFE8"/>
+              <a:srgbClr val="D8E0EA"/>
             </a:solidFill>
           </a:ln>
         </p:spPr>
@@ -31492,7 +31580,7 @@
             <a:pPr algn="ctr">
               <a:defRPr sz="1800" b="0">
                 <a:solidFill>
-                  <a:srgbClr val="1F2937"/>
+                  <a:srgbClr val="223043"/>
                 </a:solidFill>
                 <a:latin typeface="Liberation Sans"/>
               </a:defRPr>
@@ -31518,11 +31606,11 @@
             <a:avLst/>
           </a:prstGeom>
           <a:solidFill>
-            <a:srgbClr val="EEF2F7"/>
+            <a:srgbClr val="F1F5FA"/>
           </a:solidFill>
           <a:ln w="12700">
             <a:solidFill>
-              <a:srgbClr val="D7DFE8"/>
+              <a:srgbClr val="D8E0EA"/>
             </a:solidFill>
           </a:ln>
         </p:spPr>
@@ -31547,7 +31635,7 @@
             <a:pPr algn="ctr">
               <a:defRPr sz="1800" b="0">
                 <a:solidFill>
-                  <a:srgbClr val="1F2937"/>
+                  <a:srgbClr val="223043"/>
                 </a:solidFill>
                 <a:latin typeface="Liberation Sans"/>
               </a:defRPr>
@@ -31583,7 +31671,7 @@
             <a:pPr algn="l">
               <a:defRPr sz="1800" b="0" i="1">
                 <a:solidFill>
-                  <a:srgbClr val="6B7280"/>
+                  <a:srgbClr val="647489"/>
                 </a:solidFill>
                 <a:latin typeface="Liberation Sans"/>
               </a:defRPr>
@@ -32579,7 +32667,7 @@
             <a:pPr>
               <a:defRPr sz="3200" b="1">
                 <a:solidFill>
-                  <a:srgbClr val="1F2937"/>
+                  <a:srgbClr val="223043"/>
                 </a:solidFill>
                 <a:latin typeface="Liberation Sans"/>
               </a:defRPr>
@@ -32605,7 +32693,7 @@
             <a:avLst/>
           </a:prstGeom>
           <a:solidFill>
-            <a:srgbClr val="163B65"/>
+            <a:srgbClr val="5C82AD"/>
           </a:solidFill>
           <a:ln>
             <a:noFill/>
@@ -32658,7 +32746,7 @@
             <a:pPr algn="r">
               <a:defRPr sz="1100">
                 <a:solidFill>
-                  <a:srgbClr val="9CA3AF"/>
+                  <a:srgbClr val="94A3B6"/>
                 </a:solidFill>
                 <a:latin typeface="Liberation Sans"/>
               </a:defRPr>
@@ -32684,11 +32772,11 @@
             <a:avLst/>
           </a:prstGeom>
           <a:solidFill>
-            <a:srgbClr val="E67E22"/>
+            <a:srgbClr val="D69A68"/>
           </a:solidFill>
           <a:ln w="12700">
             <a:solidFill>
-              <a:srgbClr val="E67E22"/>
+              <a:srgbClr val="D69A68"/>
             </a:solidFill>
           </a:ln>
         </p:spPr>
@@ -32740,7 +32828,7 @@
           </a:prstGeom>
           <a:ln w="19050">
             <a:solidFill>
-              <a:srgbClr val="163B65"/>
+              <a:srgbClr val="5C82AD"/>
             </a:solidFill>
             <a:tailEnd type="triangle" w="med" len="med"/>
           </a:ln>
@@ -32775,11 +32863,11 @@
             <a:avLst/>
           </a:prstGeom>
           <a:solidFill>
-            <a:srgbClr val="5B84B1"/>
+            <a:srgbClr val="8FAAC8"/>
           </a:solidFill>
           <a:ln w="12700">
             <a:solidFill>
-              <a:srgbClr val="5B84B1"/>
+              <a:srgbClr val="8FAAC8"/>
             </a:solidFill>
           </a:ln>
         </p:spPr>
@@ -32831,7 +32919,7 @@
           </a:prstGeom>
           <a:ln w="19050">
             <a:solidFill>
-              <a:srgbClr val="163B65"/>
+              <a:srgbClr val="5C82AD"/>
             </a:solidFill>
             <a:tailEnd type="triangle" w="med" len="med"/>
           </a:ln>
@@ -32866,11 +32954,11 @@
             <a:avLst/>
           </a:prstGeom>
           <a:solidFill>
-            <a:srgbClr val="163B65"/>
+            <a:srgbClr val="5C82AD"/>
           </a:solidFill>
           <a:ln w="12700">
             <a:solidFill>
-              <a:srgbClr val="163B65"/>
+              <a:srgbClr val="5C82AD"/>
             </a:solidFill>
           </a:ln>
         </p:spPr>
@@ -32922,7 +33010,7 @@
           </a:prstGeom>
           <a:ln w="19050">
             <a:solidFill>
-              <a:srgbClr val="163B65"/>
+              <a:srgbClr val="5C82AD"/>
             </a:solidFill>
             <a:tailEnd type="triangle" w="med" len="med"/>
           </a:ln>
@@ -32957,11 +33045,11 @@
             <a:avLst/>
           </a:prstGeom>
           <a:solidFill>
-            <a:srgbClr val="1F8A70"/>
+            <a:srgbClr val="7FA195"/>
           </a:solidFill>
           <a:ln w="12700">
             <a:solidFill>
-              <a:srgbClr val="1F8A70"/>
+              <a:srgbClr val="7FA195"/>
             </a:solidFill>
           </a:ln>
         </p:spPr>
@@ -33012,11 +33100,11 @@
             <a:avLst/>
           </a:prstGeom>
           <a:solidFill>
-            <a:srgbClr val="5B84B1"/>
+            <a:srgbClr val="8FAAC8"/>
           </a:solidFill>
           <a:ln w="12700">
             <a:solidFill>
-              <a:srgbClr val="5B84B1"/>
+              <a:srgbClr val="8FAAC8"/>
             </a:solidFill>
           </a:ln>
         </p:spPr>
@@ -33067,7 +33155,7 @@
             <a:pPr algn="l">
               <a:defRPr sz="1800" b="1" i="0">
                 <a:solidFill>
-                  <a:srgbClr val="5B84B1"/>
+                  <a:srgbClr val="8FAAC8"/>
                 </a:solidFill>
                 <a:latin typeface="Liberation Sans"/>
               </a:defRPr>
@@ -33103,7 +33191,7 @@
             <a:pPr algn="l">
               <a:defRPr sz="1400" b="0" i="0">
                 <a:solidFill>
-                  <a:srgbClr val="1F2937"/>
+                  <a:srgbClr val="223043"/>
                 </a:solidFill>
                 <a:latin typeface="Liberation Sans"/>
               </a:defRPr>
@@ -33129,11 +33217,11 @@
             <a:avLst/>
           </a:prstGeom>
           <a:solidFill>
-            <a:srgbClr val="1F8A70"/>
+            <a:srgbClr val="7FA195"/>
           </a:solidFill>
           <a:ln w="12700">
             <a:solidFill>
-              <a:srgbClr val="1F8A70"/>
+              <a:srgbClr val="7FA195"/>
             </a:solidFill>
           </a:ln>
         </p:spPr>
@@ -33184,7 +33272,7 @@
             <a:pPr algn="l">
               <a:defRPr sz="1800" b="1" i="0">
                 <a:solidFill>
-                  <a:srgbClr val="1F8A70"/>
+                  <a:srgbClr val="7FA195"/>
                 </a:solidFill>
                 <a:latin typeface="Liberation Sans"/>
               </a:defRPr>
@@ -33220,7 +33308,7 @@
             <a:pPr algn="l">
               <a:defRPr sz="1400" b="0" i="0">
                 <a:solidFill>
-                  <a:srgbClr val="1F2937"/>
+                  <a:srgbClr val="223043"/>
                 </a:solidFill>
                 <a:latin typeface="Liberation Sans"/>
               </a:defRPr>
@@ -33246,11 +33334,11 @@
             <a:avLst/>
           </a:prstGeom>
           <a:solidFill>
-            <a:srgbClr val="E67E22"/>
+            <a:srgbClr val="D69A68"/>
           </a:solidFill>
           <a:ln w="12700">
             <a:solidFill>
-              <a:srgbClr val="E67E22"/>
+              <a:srgbClr val="D69A68"/>
             </a:solidFill>
           </a:ln>
         </p:spPr>
@@ -33301,7 +33389,7 @@
             <a:pPr algn="l">
               <a:defRPr sz="1800" b="1" i="0">
                 <a:solidFill>
-                  <a:srgbClr val="E67E22"/>
+                  <a:srgbClr val="D69A68"/>
                 </a:solidFill>
                 <a:latin typeface="Liberation Sans"/>
               </a:defRPr>
@@ -33337,7 +33425,7 @@
             <a:pPr algn="l">
               <a:defRPr sz="1400" b="0" i="0">
                 <a:solidFill>
-                  <a:srgbClr val="1F2937"/>
+                  <a:srgbClr val="223043"/>
                 </a:solidFill>
                 <a:latin typeface="Liberation Sans"/>
               </a:defRPr>
@@ -33373,7 +33461,7 @@
             <a:pPr algn="l">
               <a:defRPr sz="1800" b="0" i="1">
                 <a:solidFill>
-                  <a:srgbClr val="6B7280"/>
+                  <a:srgbClr val="647489"/>
                 </a:solidFill>
                 <a:latin typeface="Liberation Sans"/>
               </a:defRPr>
@@ -34819,7 +34907,7 @@
             <a:pPr>
               <a:defRPr sz="3200" b="1">
                 <a:solidFill>
-                  <a:srgbClr val="1F2937"/>
+                  <a:srgbClr val="223043"/>
                 </a:solidFill>
                 <a:latin typeface="Liberation Sans"/>
               </a:defRPr>
@@ -34845,7 +34933,7 @@
             <a:avLst/>
           </a:prstGeom>
           <a:solidFill>
-            <a:srgbClr val="163B65"/>
+            <a:srgbClr val="5C82AD"/>
           </a:solidFill>
           <a:ln>
             <a:noFill/>
@@ -34898,7 +34986,7 @@
             <a:pPr algn="r">
               <a:defRPr sz="1100">
                 <a:solidFill>
-                  <a:srgbClr val="9CA3AF"/>
+                  <a:srgbClr val="94A3B6"/>
                 </a:solidFill>
                 <a:latin typeface="Liberation Sans"/>
               </a:defRPr>
@@ -34924,11 +35012,11 @@
             <a:avLst/>
           </a:prstGeom>
           <a:solidFill>
-            <a:srgbClr val="EEF2F7"/>
+            <a:srgbClr val="F1F5FA"/>
           </a:solidFill>
           <a:ln w="12700">
             <a:solidFill>
-              <a:srgbClr val="D7DFE8"/>
+              <a:srgbClr val="D8E0EA"/>
             </a:solidFill>
           </a:ln>
         </p:spPr>
@@ -34953,7 +35041,7 @@
             <a:pPr algn="ctr">
               <a:defRPr sz="1800" b="0">
                 <a:solidFill>
-                  <a:srgbClr val="1F2937"/>
+                  <a:srgbClr val="223043"/>
                 </a:solidFill>
                 <a:latin typeface="Liberation Sans"/>
               </a:defRPr>
@@ -34980,7 +35068,7 @@
           </a:prstGeom>
           <a:ln w="19050">
             <a:solidFill>
-              <a:srgbClr val="9CA3AF"/>
+              <a:srgbClr val="94A3B6"/>
             </a:solidFill>
             <a:tailEnd type="triangle" w="med" len="med"/>
           </a:ln>
@@ -35015,11 +35103,11 @@
             <a:avLst/>
           </a:prstGeom>
           <a:solidFill>
-            <a:srgbClr val="5B84B1"/>
+            <a:srgbClr val="8FAAC8"/>
           </a:solidFill>
           <a:ln w="12700">
             <a:solidFill>
-              <a:srgbClr val="D7DFE8"/>
+              <a:srgbClr val="D8E0EA"/>
             </a:solidFill>
           </a:ln>
         </p:spPr>
@@ -35044,7 +35132,7 @@
             <a:pPr algn="ctr">
               <a:defRPr sz="1800" b="0">
                 <a:solidFill>
-                  <a:srgbClr val="1F2937"/>
+                  <a:srgbClr val="223043"/>
                 </a:solidFill>
                 <a:latin typeface="Liberation Sans"/>
               </a:defRPr>
@@ -35071,7 +35159,7 @@
           </a:prstGeom>
           <a:ln w="19050">
             <a:solidFill>
-              <a:srgbClr val="9CA3AF"/>
+              <a:srgbClr val="94A3B6"/>
             </a:solidFill>
             <a:tailEnd type="triangle" w="med" len="med"/>
           </a:ln>
@@ -35106,11 +35194,11 @@
             <a:avLst/>
           </a:prstGeom>
           <a:solidFill>
-            <a:srgbClr val="E67E22"/>
+            <a:srgbClr val="D69A68"/>
           </a:solidFill>
           <a:ln w="12700">
             <a:solidFill>
-              <a:srgbClr val="D7DFE8"/>
+              <a:srgbClr val="D8E0EA"/>
             </a:solidFill>
           </a:ln>
         </p:spPr>
@@ -35135,7 +35223,7 @@
             <a:pPr algn="ctr">
               <a:defRPr sz="1800" b="0">
                 <a:solidFill>
-                  <a:srgbClr val="1F2937"/>
+                  <a:srgbClr val="223043"/>
                 </a:solidFill>
                 <a:latin typeface="Liberation Sans"/>
               </a:defRPr>
@@ -35162,7 +35250,7 @@
           </a:prstGeom>
           <a:ln w="19050">
             <a:solidFill>
-              <a:srgbClr val="9CA3AF"/>
+              <a:srgbClr val="94A3B6"/>
             </a:solidFill>
             <a:tailEnd type="triangle" w="med" len="med"/>
           </a:ln>
@@ -35197,11 +35285,11 @@
             <a:avLst/>
           </a:prstGeom>
           <a:solidFill>
-            <a:srgbClr val="1F8A70"/>
+            <a:srgbClr val="7FA195"/>
           </a:solidFill>
           <a:ln w="12700">
             <a:solidFill>
-              <a:srgbClr val="D7DFE8"/>
+              <a:srgbClr val="D8E0EA"/>
             </a:solidFill>
           </a:ln>
         </p:spPr>
@@ -35226,7 +35314,7 @@
             <a:pPr algn="ctr">
               <a:defRPr sz="1800" b="0">
                 <a:solidFill>
-                  <a:srgbClr val="1F2937"/>
+                  <a:srgbClr val="223043"/>
                 </a:solidFill>
                 <a:latin typeface="Liberation Sans"/>
               </a:defRPr>
@@ -35252,11 +35340,11 @@
             <a:avLst/>
           </a:prstGeom>
           <a:solidFill>
-            <a:srgbClr val="1F8A70"/>
+            <a:srgbClr val="7FA195"/>
           </a:solidFill>
           <a:ln w="12700">
             <a:solidFill>
-              <a:srgbClr val="1F8A70"/>
+              <a:srgbClr val="7FA195"/>
             </a:solidFill>
           </a:ln>
         </p:spPr>
@@ -35307,7 +35395,7 @@
             <a:pPr algn="l">
               <a:defRPr sz="1800" b="1" i="0">
                 <a:solidFill>
-                  <a:srgbClr val="1F8A70"/>
+                  <a:srgbClr val="7FA195"/>
                 </a:solidFill>
                 <a:latin typeface="Liberation Sans"/>
               </a:defRPr>
@@ -35343,7 +35431,7 @@
             <a:pPr algn="l">
               <a:defRPr sz="1400" b="0" i="0">
                 <a:solidFill>
-                  <a:srgbClr val="1F2937"/>
+                  <a:srgbClr val="223043"/>
                 </a:solidFill>
                 <a:latin typeface="Liberation Sans"/>
               </a:defRPr>
@@ -35379,7 +35467,7 @@
             <a:pPr algn="l">
               <a:defRPr sz="1800" b="0" i="1">
                 <a:solidFill>
-                  <a:srgbClr val="6B7280"/>
+                  <a:srgbClr val="647489"/>
                 </a:solidFill>
                 <a:latin typeface="Liberation Sans"/>
               </a:defRPr>
@@ -36019,7 +36107,7 @@
             <a:pPr>
               <a:defRPr sz="3200" b="1">
                 <a:solidFill>
-                  <a:srgbClr val="1F2937"/>
+                  <a:srgbClr val="223043"/>
                 </a:solidFill>
                 <a:latin typeface="Liberation Sans"/>
               </a:defRPr>
@@ -36045,7 +36133,7 @@
             <a:avLst/>
           </a:prstGeom>
           <a:solidFill>
-            <a:srgbClr val="163B65"/>
+            <a:srgbClr val="5C82AD"/>
           </a:solidFill>
           <a:ln>
             <a:noFill/>
@@ -36098,7 +36186,7 @@
             <a:pPr algn="r">
               <a:defRPr sz="1100">
                 <a:solidFill>
-                  <a:srgbClr val="9CA3AF"/>
+                  <a:srgbClr val="94A3B6"/>
                 </a:solidFill>
                 <a:latin typeface="Liberation Sans"/>
               </a:defRPr>
@@ -36124,7 +36212,7 @@
             <a:avLst/>
           </a:prstGeom>
           <a:solidFill>
-            <a:srgbClr val="C44900"/>
+            <a:srgbClr val="C98A78"/>
           </a:solidFill>
           <a:ln>
             <a:noFill/>
@@ -36177,11 +36265,11 @@
             <a:avLst/>
           </a:prstGeom>
           <a:solidFill>
-            <a:srgbClr val="EEF2F7"/>
+            <a:srgbClr val="F1F5FA"/>
           </a:solidFill>
           <a:ln w="12700">
             <a:solidFill>
-              <a:srgbClr val="D7DFE8"/>
+              <a:srgbClr val="D8E0EA"/>
             </a:solidFill>
           </a:ln>
         </p:spPr>
@@ -36206,7 +36294,7 @@
             <a:pPr algn="ctr">
               <a:defRPr sz="1800" b="0">
                 <a:solidFill>
-                  <a:srgbClr val="1F2937"/>
+                  <a:srgbClr val="223043"/>
                 </a:solidFill>
                 <a:latin typeface="Liberation Sans"/>
               </a:defRPr>
@@ -36242,7 +36330,7 @@
             <a:pPr algn="l">
               <a:defRPr sz="1800" b="0" i="0">
                 <a:solidFill>
-                  <a:srgbClr val="1F2937"/>
+                  <a:srgbClr val="223043"/>
                 </a:solidFill>
                 <a:latin typeface="Liberation Sans"/>
               </a:defRPr>
@@ -36278,7 +36366,7 @@
             <a:pPr algn="l">
               <a:defRPr sz="1400" b="0" i="0">
                 <a:solidFill>
-                  <a:srgbClr val="6B7280"/>
+                  <a:srgbClr val="647489"/>
                 </a:solidFill>
                 <a:latin typeface="Liberation Sans"/>
               </a:defRPr>
@@ -36304,7 +36392,7 @@
             <a:avLst/>
           </a:prstGeom>
           <a:solidFill>
-            <a:srgbClr val="1F8A70"/>
+            <a:srgbClr val="7FA195"/>
           </a:solidFill>
           <a:ln>
             <a:noFill/>
@@ -36357,11 +36445,11 @@
             <a:avLst/>
           </a:prstGeom>
           <a:solidFill>
-            <a:srgbClr val="5B84B1"/>
+            <a:srgbClr val="8FAAC8"/>
           </a:solidFill>
           <a:ln w="12700">
             <a:solidFill>
-              <a:srgbClr val="D7DFE8"/>
+              <a:srgbClr val="D8E0EA"/>
             </a:solidFill>
           </a:ln>
         </p:spPr>
@@ -36386,7 +36474,7 @@
             <a:pPr algn="ctr">
               <a:defRPr sz="1800" b="0">
                 <a:solidFill>
-                  <a:srgbClr val="1F2937"/>
+                  <a:srgbClr val="223043"/>
                 </a:solidFill>
                 <a:latin typeface="Liberation Sans"/>
               </a:defRPr>
@@ -36413,7 +36501,7 @@
           </a:prstGeom>
           <a:ln w="19050">
             <a:solidFill>
-              <a:srgbClr val="9CA3AF"/>
+              <a:srgbClr val="94A3B6"/>
             </a:solidFill>
             <a:tailEnd type="triangle" w="med" len="med"/>
           </a:ln>
@@ -36448,11 +36536,11 @@
             <a:avLst/>
           </a:prstGeom>
           <a:solidFill>
-            <a:srgbClr val="E67E22"/>
+            <a:srgbClr val="D69A68"/>
           </a:solidFill>
           <a:ln w="12700">
             <a:solidFill>
-              <a:srgbClr val="D7DFE8"/>
+              <a:srgbClr val="D8E0EA"/>
             </a:solidFill>
           </a:ln>
         </p:spPr>
@@ -36477,7 +36565,7 @@
             <a:pPr algn="ctr">
               <a:defRPr sz="1800" b="0">
                 <a:solidFill>
-                  <a:srgbClr val="1F2937"/>
+                  <a:srgbClr val="223043"/>
                 </a:solidFill>
                 <a:latin typeface="Liberation Sans"/>
               </a:defRPr>
@@ -36504,7 +36592,7 @@
           </a:prstGeom>
           <a:ln w="19050">
             <a:solidFill>
-              <a:srgbClr val="9CA3AF"/>
+              <a:srgbClr val="94A3B6"/>
             </a:solidFill>
             <a:tailEnd type="triangle" w="med" len="med"/>
           </a:ln>
@@ -36539,11 +36627,11 @@
             <a:avLst/>
           </a:prstGeom>
           <a:solidFill>
-            <a:srgbClr val="1F8A70"/>
+            <a:srgbClr val="7FA195"/>
           </a:solidFill>
           <a:ln w="12700">
             <a:solidFill>
-              <a:srgbClr val="D7DFE8"/>
+              <a:srgbClr val="D8E0EA"/>
             </a:solidFill>
           </a:ln>
         </p:spPr>
@@ -36568,7 +36656,7 @@
             <a:pPr algn="ctr">
               <a:defRPr sz="1800" b="0">
                 <a:solidFill>
-                  <a:srgbClr val="1F2937"/>
+                  <a:srgbClr val="223043"/>
                 </a:solidFill>
                 <a:latin typeface="Liberation Sans"/>
               </a:defRPr>
@@ -36594,11 +36682,11 @@
             <a:avLst/>
           </a:prstGeom>
           <a:solidFill>
-            <a:srgbClr val="1F8A70"/>
+            <a:srgbClr val="7FA195"/>
           </a:solidFill>
           <a:ln w="12700">
             <a:solidFill>
-              <a:srgbClr val="1F8A70"/>
+              <a:srgbClr val="7FA195"/>
             </a:solidFill>
           </a:ln>
         </p:spPr>
@@ -36649,7 +36737,7 @@
             <a:pPr algn="l">
               <a:defRPr sz="1800" b="1" i="0">
                 <a:solidFill>
-                  <a:srgbClr val="1F8A70"/>
+                  <a:srgbClr val="7FA195"/>
                 </a:solidFill>
                 <a:latin typeface="Liberation Sans"/>
               </a:defRPr>
@@ -36685,7 +36773,7 @@
             <a:pPr algn="l">
               <a:defRPr sz="1400" b="0" i="0">
                 <a:solidFill>
-                  <a:srgbClr val="1F2937"/>
+                  <a:srgbClr val="223043"/>
                 </a:solidFill>
                 <a:latin typeface="Liberation Sans"/>
               </a:defRPr>
@@ -36721,7 +36809,7 @@
             <a:pPr algn="l">
               <a:defRPr sz="1800" b="0" i="1">
                 <a:solidFill>
-                  <a:srgbClr val="6B7280"/>
+                  <a:srgbClr val="647489"/>
                 </a:solidFill>
                 <a:latin typeface="Liberation Sans"/>
               </a:defRPr>
@@ -37628,7 +37716,7 @@
             <a:pPr>
               <a:defRPr sz="3200" b="1">
                 <a:solidFill>
-                  <a:srgbClr val="1F2937"/>
+                  <a:srgbClr val="223043"/>
                 </a:solidFill>
                 <a:latin typeface="Liberation Sans"/>
               </a:defRPr>
@@ -37654,7 +37742,7 @@
             <a:avLst/>
           </a:prstGeom>
           <a:solidFill>
-            <a:srgbClr val="163B65"/>
+            <a:srgbClr val="5C82AD"/>
           </a:solidFill>
           <a:ln>
             <a:noFill/>
@@ -37707,7 +37795,7 @@
             <a:pPr algn="r">
               <a:defRPr sz="1100">
                 <a:solidFill>
-                  <a:srgbClr val="9CA3AF"/>
+                  <a:srgbClr val="94A3B6"/>
                 </a:solidFill>
                 <a:latin typeface="Liberation Sans"/>
               </a:defRPr>
@@ -37733,7 +37821,7 @@
             <a:avLst/>
           </a:prstGeom>
           <a:solidFill>
-            <a:srgbClr val="163B65"/>
+            <a:srgbClr val="5C82AD"/>
           </a:solidFill>
           <a:ln>
             <a:noFill/>
@@ -37786,7 +37874,7 @@
             <a:avLst/>
           </a:prstGeom>
           <a:solidFill>
-            <a:srgbClr val="5B84B1"/>
+            <a:srgbClr val="8FAAC8"/>
           </a:solidFill>
           <a:ln>
             <a:noFill/>
@@ -37839,7 +37927,7 @@
             <a:avLst/>
           </a:prstGeom>
           <a:solidFill>
-            <a:srgbClr val="D97706"/>
+            <a:srgbClr val="D8A86A"/>
           </a:solidFill>
           <a:ln>
             <a:noFill/>
@@ -37892,11 +37980,11 @@
             <a:avLst/>
           </a:prstGeom>
           <a:solidFill>
-            <a:srgbClr val="163B65"/>
+            <a:srgbClr val="5C82AD"/>
           </a:solidFill>
           <a:ln w="12700">
             <a:solidFill>
-              <a:srgbClr val="163B65"/>
+              <a:srgbClr val="5C82AD"/>
             </a:solidFill>
           </a:ln>
         </p:spPr>
@@ -37947,7 +38035,7 @@
             <a:pPr algn="l">
               <a:defRPr sz="1800" b="1" i="0">
                 <a:solidFill>
-                  <a:srgbClr val="163B65"/>
+                  <a:srgbClr val="5C82AD"/>
                 </a:solidFill>
                 <a:latin typeface="Liberation Sans"/>
               </a:defRPr>
@@ -37983,7 +38071,7 @@
             <a:pPr algn="l">
               <a:defRPr sz="1400" b="0" i="0">
                 <a:solidFill>
-                  <a:srgbClr val="1F2937"/>
+                  <a:srgbClr val="223043"/>
                 </a:solidFill>
                 <a:latin typeface="Liberation Sans"/>
               </a:defRPr>
@@ -38009,11 +38097,11 @@
             <a:avLst/>
           </a:prstGeom>
           <a:solidFill>
-            <a:srgbClr val="5B84B1"/>
+            <a:srgbClr val="8FAAC8"/>
           </a:solidFill>
           <a:ln w="12700">
             <a:solidFill>
-              <a:srgbClr val="5B84B1"/>
+              <a:srgbClr val="8FAAC8"/>
             </a:solidFill>
           </a:ln>
         </p:spPr>
@@ -38064,7 +38152,7 @@
             <a:pPr algn="l">
               <a:defRPr sz="1800" b="1" i="0">
                 <a:solidFill>
-                  <a:srgbClr val="5B84B1"/>
+                  <a:srgbClr val="8FAAC8"/>
                 </a:solidFill>
                 <a:latin typeface="Liberation Sans"/>
               </a:defRPr>
@@ -38100,7 +38188,7 @@
             <a:pPr algn="l">
               <a:defRPr sz="1400" b="0" i="0">
                 <a:solidFill>
-                  <a:srgbClr val="1F2937"/>
+                  <a:srgbClr val="223043"/>
                 </a:solidFill>
                 <a:latin typeface="Liberation Sans"/>
               </a:defRPr>
@@ -38126,11 +38214,11 @@
             <a:avLst/>
           </a:prstGeom>
           <a:solidFill>
-            <a:srgbClr val="D97706"/>
+            <a:srgbClr val="D8A86A"/>
           </a:solidFill>
           <a:ln w="12700">
             <a:solidFill>
-              <a:srgbClr val="D97706"/>
+              <a:srgbClr val="D8A86A"/>
             </a:solidFill>
           </a:ln>
         </p:spPr>
@@ -38181,7 +38269,7 @@
             <a:pPr algn="l">
               <a:defRPr sz="1800" b="1" i="0">
                 <a:solidFill>
-                  <a:srgbClr val="D97706"/>
+                  <a:srgbClr val="D8A86A"/>
                 </a:solidFill>
                 <a:latin typeface="Liberation Sans"/>
               </a:defRPr>
@@ -38217,7 +38305,7 @@
             <a:pPr algn="l">
               <a:defRPr sz="1400" b="0" i="0">
                 <a:solidFill>
-                  <a:srgbClr val="1F2937"/>
+                  <a:srgbClr val="223043"/>
                 </a:solidFill>
                 <a:latin typeface="Liberation Sans"/>
               </a:defRPr>
@@ -38253,7 +38341,7 @@
             <a:pPr algn="l">
               <a:defRPr sz="1800" b="0" i="1">
                 <a:solidFill>
-                  <a:srgbClr val="6B7280"/>
+                  <a:srgbClr val="647489"/>
                 </a:solidFill>
                 <a:latin typeface="Liberation Sans"/>
               </a:defRPr>
@@ -38279,11 +38367,11 @@
             <a:avLst/>
           </a:prstGeom>
           <a:solidFill>
-            <a:srgbClr val="D97706"/>
+            <a:srgbClr val="D8A86A"/>
           </a:solidFill>
           <a:ln w="12700">
             <a:solidFill>
-              <a:srgbClr val="D97706"/>
+              <a:srgbClr val="D8A86A"/>
             </a:solidFill>
           </a:ln>
         </p:spPr>
@@ -38334,7 +38422,7 @@
             <a:pPr algn="l">
               <a:defRPr sz="1800" b="1" i="0">
                 <a:solidFill>
-                  <a:srgbClr val="D97706"/>
+                  <a:srgbClr val="D8A86A"/>
                 </a:solidFill>
                 <a:latin typeface="Liberation Sans"/>
               </a:defRPr>
@@ -38370,7 +38458,7 @@
             <a:pPr algn="l">
               <a:defRPr sz="1400" b="0" i="0">
                 <a:solidFill>
-                  <a:srgbClr val="1F2937"/>
+                  <a:srgbClr val="223043"/>
                 </a:solidFill>
                 <a:latin typeface="Liberation Sans"/>
               </a:defRPr>
@@ -40350,7 +40438,7 @@
             <a:pPr>
               <a:defRPr sz="3200" b="1">
                 <a:solidFill>
-                  <a:srgbClr val="1F2937"/>
+                  <a:srgbClr val="223043"/>
                 </a:solidFill>
                 <a:latin typeface="Liberation Sans"/>
               </a:defRPr>
@@ -40376,7 +40464,7 @@
             <a:avLst/>
           </a:prstGeom>
           <a:solidFill>
-            <a:srgbClr val="163B65"/>
+            <a:srgbClr val="5C82AD"/>
           </a:solidFill>
           <a:ln>
             <a:noFill/>
@@ -40429,7 +40517,7 @@
             <a:pPr algn="r">
               <a:defRPr sz="1100">
                 <a:solidFill>
-                  <a:srgbClr val="9CA3AF"/>
+                  <a:srgbClr val="94A3B6"/>
                 </a:solidFill>
                 <a:latin typeface="Liberation Sans"/>
               </a:defRPr>
@@ -40465,7 +40553,7 @@
             <a:pPr algn="ctr">
               <a:defRPr sz="3000" b="1" i="0">
                 <a:solidFill>
-                  <a:srgbClr val="163B65"/>
+                  <a:srgbClr val="5C82AD"/>
                 </a:solidFill>
                 <a:latin typeface="Liberation Sans"/>
               </a:defRPr>
@@ -40491,11 +40579,11 @@
             <a:avLst/>
           </a:prstGeom>
           <a:solidFill>
-            <a:srgbClr val="EEF2F7"/>
+            <a:srgbClr val="F1F5FA"/>
           </a:solidFill>
           <a:ln w="12700">
             <a:solidFill>
-              <a:srgbClr val="D7DFE8"/>
+              <a:srgbClr val="D8E0EA"/>
             </a:solidFill>
           </a:ln>
         </p:spPr>
@@ -40520,7 +40608,7 @@
             <a:pPr algn="ctr">
               <a:defRPr sz="1800" b="0">
                 <a:solidFill>
-                  <a:srgbClr val="1F2937"/>
+                  <a:srgbClr val="223043"/>
                 </a:solidFill>
                 <a:latin typeface="Liberation Sans"/>
               </a:defRPr>
@@ -40547,7 +40635,7 @@
           </a:prstGeom>
           <a:ln w="19050">
             <a:solidFill>
-              <a:srgbClr val="9CA3AF"/>
+              <a:srgbClr val="94A3B6"/>
             </a:solidFill>
             <a:tailEnd type="triangle" w="med" len="med"/>
           </a:ln>
@@ -40582,11 +40670,11 @@
             <a:avLst/>
           </a:prstGeom>
           <a:solidFill>
-            <a:srgbClr val="5B84B1"/>
+            <a:srgbClr val="8FAAC8"/>
           </a:solidFill>
           <a:ln w="12700">
             <a:solidFill>
-              <a:srgbClr val="D7DFE8"/>
+              <a:srgbClr val="D8E0EA"/>
             </a:solidFill>
           </a:ln>
         </p:spPr>
@@ -40611,7 +40699,7 @@
             <a:pPr algn="ctr">
               <a:defRPr sz="1800" b="0">
                 <a:solidFill>
-                  <a:srgbClr val="1F2937"/>
+                  <a:srgbClr val="223043"/>
                 </a:solidFill>
                 <a:latin typeface="Liberation Sans"/>
               </a:defRPr>
@@ -40638,7 +40726,7 @@
           </a:prstGeom>
           <a:ln w="19050">
             <a:solidFill>
-              <a:srgbClr val="9CA3AF"/>
+              <a:srgbClr val="94A3B6"/>
             </a:solidFill>
             <a:tailEnd type="triangle" w="med" len="med"/>
           </a:ln>
@@ -40673,11 +40761,11 @@
             <a:avLst/>
           </a:prstGeom>
           <a:solidFill>
-            <a:srgbClr val="1F8A70"/>
+            <a:srgbClr val="7FA195"/>
           </a:solidFill>
           <a:ln w="12700">
             <a:solidFill>
-              <a:srgbClr val="D7DFE8"/>
+              <a:srgbClr val="D8E0EA"/>
             </a:solidFill>
           </a:ln>
         </p:spPr>
@@ -40702,7 +40790,7 @@
             <a:pPr algn="ctr">
               <a:defRPr sz="1800" b="0">
                 <a:solidFill>
-                  <a:srgbClr val="1F2937"/>
+                  <a:srgbClr val="223043"/>
                 </a:solidFill>
                 <a:latin typeface="Liberation Sans"/>
               </a:defRPr>
@@ -40728,11 +40816,11 @@
             <a:avLst/>
           </a:prstGeom>
           <a:solidFill>
-            <a:srgbClr val="5B84B1"/>
+            <a:srgbClr val="8FAAC8"/>
           </a:solidFill>
           <a:ln w="12700">
             <a:solidFill>
-              <a:srgbClr val="5B84B1"/>
+              <a:srgbClr val="8FAAC8"/>
             </a:solidFill>
           </a:ln>
         </p:spPr>
@@ -40783,7 +40871,7 @@
             <a:pPr algn="l">
               <a:defRPr sz="1800" b="1" i="0">
                 <a:solidFill>
-                  <a:srgbClr val="5B84B1"/>
+                  <a:srgbClr val="8FAAC8"/>
                 </a:solidFill>
                 <a:latin typeface="Liberation Sans"/>
               </a:defRPr>
@@ -40819,7 +40907,7 @@
             <a:pPr algn="l">
               <a:defRPr sz="1400" b="0" i="0">
                 <a:solidFill>
-                  <a:srgbClr val="1F2937"/>
+                  <a:srgbClr val="223043"/>
                 </a:solidFill>
                 <a:latin typeface="Liberation Sans"/>
               </a:defRPr>
@@ -40845,11 +40933,11 @@
             <a:avLst/>
           </a:prstGeom>
           <a:solidFill>
-            <a:srgbClr val="1F8A70"/>
+            <a:srgbClr val="7FA195"/>
           </a:solidFill>
           <a:ln w="12700">
             <a:solidFill>
-              <a:srgbClr val="1F8A70"/>
+              <a:srgbClr val="7FA195"/>
             </a:solidFill>
           </a:ln>
         </p:spPr>
@@ -40900,7 +40988,7 @@
             <a:pPr algn="l">
               <a:defRPr sz="1800" b="1" i="0">
                 <a:solidFill>
-                  <a:srgbClr val="1F8A70"/>
+                  <a:srgbClr val="7FA195"/>
                 </a:solidFill>
                 <a:latin typeface="Liberation Sans"/>
               </a:defRPr>
@@ -40936,7 +41024,7 @@
             <a:pPr algn="l">
               <a:defRPr sz="1400" b="0" i="0">
                 <a:solidFill>
-                  <a:srgbClr val="1F2937"/>
+                  <a:srgbClr val="223043"/>
                 </a:solidFill>
                 <a:latin typeface="Liberation Sans"/>
               </a:defRPr>
@@ -40972,7 +41060,7 @@
             <a:pPr algn="l">
               <a:defRPr sz="1800" b="0" i="1">
                 <a:solidFill>
-                  <a:srgbClr val="6B7280"/>
+                  <a:srgbClr val="647489"/>
                 </a:solidFill>
                 <a:latin typeface="Liberation Sans"/>
               </a:defRPr>
@@ -42084,7 +42172,7 @@
             <a:pPr>
               <a:defRPr sz="3200" b="1">
                 <a:solidFill>
-                  <a:srgbClr val="1F2937"/>
+                  <a:srgbClr val="223043"/>
                 </a:solidFill>
                 <a:latin typeface="Liberation Sans"/>
               </a:defRPr>
@@ -42110,7 +42198,7 @@
             <a:avLst/>
           </a:prstGeom>
           <a:solidFill>
-            <a:srgbClr val="163B65"/>
+            <a:srgbClr val="5C82AD"/>
           </a:solidFill>
           <a:ln>
             <a:noFill/>
@@ -42163,7 +42251,7 @@
             <a:pPr algn="r">
               <a:defRPr sz="1100">
                 <a:solidFill>
-                  <a:srgbClr val="9CA3AF"/>
+                  <a:srgbClr val="94A3B6"/>
                 </a:solidFill>
                 <a:latin typeface="Liberation Sans"/>
               </a:defRPr>
@@ -42189,7 +42277,7 @@
             <a:avLst/>
           </a:prstGeom>
           <a:solidFill>
-            <a:srgbClr val="E67E22"/>
+            <a:srgbClr val="D69A68"/>
           </a:solidFill>
           <a:ln>
             <a:noFill/>
@@ -42242,11 +42330,11 @@
             <a:avLst/>
           </a:prstGeom>
           <a:solidFill>
-            <a:srgbClr val="EEF2F7"/>
+            <a:srgbClr val="F1F5FA"/>
           </a:solidFill>
           <a:ln w="12700">
             <a:solidFill>
-              <a:srgbClr val="D7DFE8"/>
+              <a:srgbClr val="D8E0EA"/>
             </a:solidFill>
           </a:ln>
         </p:spPr>
@@ -42271,7 +42359,7 @@
             <a:pPr algn="ctr">
               <a:defRPr sz="1800" b="0">
                 <a:solidFill>
-                  <a:srgbClr val="1F2937"/>
+                  <a:srgbClr val="223043"/>
                 </a:solidFill>
                 <a:latin typeface="Liberation Sans"/>
               </a:defRPr>
@@ -42311,7 +42399,7 @@
             <a:pPr algn="l">
               <a:defRPr sz="1800" b="0" i="0">
                 <a:solidFill>
-                  <a:srgbClr val="1F2937"/>
+                  <a:srgbClr val="223043"/>
                 </a:solidFill>
                 <a:latin typeface="Liberation Sans"/>
               </a:defRPr>
@@ -42337,7 +42425,7 @@
             <a:avLst/>
           </a:prstGeom>
           <a:solidFill>
-            <a:srgbClr val="163B65"/>
+            <a:srgbClr val="5C82AD"/>
           </a:solidFill>
           <a:ln>
             <a:noFill/>
@@ -42390,11 +42478,11 @@
             <a:avLst/>
           </a:prstGeom>
           <a:solidFill>
-            <a:srgbClr val="EEF2F7"/>
+            <a:srgbClr val="F1F5FA"/>
           </a:solidFill>
           <a:ln w="12700">
             <a:solidFill>
-              <a:srgbClr val="D7DFE8"/>
+              <a:srgbClr val="D8E0EA"/>
             </a:solidFill>
           </a:ln>
         </p:spPr>
@@ -42419,7 +42507,7 @@
             <a:pPr algn="ctr">
               <a:defRPr sz="1800" b="0">
                 <a:solidFill>
-                  <a:srgbClr val="1F2937"/>
+                  <a:srgbClr val="223043"/>
                 </a:solidFill>
                 <a:latin typeface="Liberation Sans"/>
               </a:defRPr>
@@ -42463,7 +42551,7 @@
             <a:pPr algn="l">
               <a:defRPr sz="1800" b="0" i="0">
                 <a:solidFill>
-                  <a:srgbClr val="1F2937"/>
+                  <a:srgbClr val="223043"/>
                 </a:solidFill>
                 <a:latin typeface="Liberation Sans"/>
               </a:defRPr>
@@ -42489,11 +42577,11 @@
             <a:avLst/>
           </a:prstGeom>
           <a:solidFill>
-            <a:srgbClr val="C44900"/>
+            <a:srgbClr val="C98A78"/>
           </a:solidFill>
           <a:ln w="12700">
             <a:solidFill>
-              <a:srgbClr val="C44900"/>
+              <a:srgbClr val="C98A78"/>
             </a:solidFill>
           </a:ln>
         </p:spPr>
@@ -42544,7 +42632,7 @@
             <a:pPr algn="l">
               <a:defRPr sz="1800" b="1" i="0">
                 <a:solidFill>
-                  <a:srgbClr val="C44900"/>
+                  <a:srgbClr val="C98A78"/>
                 </a:solidFill>
                 <a:latin typeface="Liberation Sans"/>
               </a:defRPr>
@@ -42580,7 +42668,7 @@
             <a:pPr algn="l">
               <a:defRPr sz="1400" b="0" i="0">
                 <a:solidFill>
-                  <a:srgbClr val="1F2937"/>
+                  <a:srgbClr val="223043"/>
                 </a:solidFill>
                 <a:latin typeface="Liberation Sans"/>
               </a:defRPr>

--- a/examples/self-intro/diagnostic_world_model.pptx
+++ b/examples/self-intro/diagnostic_world_model.pptx
@@ -4873,8 +4873,8 @@
         </p:nvSpPr>
         <p:spPr>
           <a:xfrm>
-            <a:off x="3483457" y="1446022"/>
-            <a:ext cx="1567180" cy="377444"/>
+            <a:off x="3388842" y="1594612"/>
+            <a:ext cx="1756410" cy="377444"/>
           </a:xfrm>
           <a:prstGeom prst="roundRect">
             <a:avLst/>
@@ -4926,7 +4926,7 @@
         </p:nvSpPr>
         <p:spPr>
           <a:xfrm>
-            <a:off x="975207" y="1988058"/>
+            <a:off x="975207" y="2136648"/>
             <a:ext cx="6583680" cy="1052576"/>
           </a:xfrm>
           <a:prstGeom prst="rect">
@@ -4975,8 +4975,8 @@
         </p:nvSpPr>
         <p:spPr>
           <a:xfrm>
-            <a:off x="975207" y="3205226"/>
-            <a:ext cx="6583680" cy="722376"/>
+            <a:off x="975207" y="3353816"/>
+            <a:ext cx="6583680" cy="425196"/>
           </a:xfrm>
           <a:prstGeom prst="rect">
             <a:avLst/>
@@ -5011,7 +5011,7 @@
         </p:nvSpPr>
         <p:spPr>
           <a:xfrm>
-            <a:off x="975207" y="4092193"/>
+            <a:off x="975207" y="3943604"/>
             <a:ext cx="6583680" cy="425196"/>
           </a:xfrm>
           <a:prstGeom prst="rect">
@@ -5047,8 +5047,8 @@
         </p:nvSpPr>
         <p:spPr>
           <a:xfrm>
-            <a:off x="9214967" y="1371600"/>
-            <a:ext cx="894080" cy="377444"/>
+            <a:off x="9107652" y="1371600"/>
+            <a:ext cx="1108710" cy="377444"/>
           </a:xfrm>
           <a:prstGeom prst="roundRect">
             <a:avLst/>
@@ -5075,7 +5075,7 @@
           </a:fontRef>
         </p:style>
         <p:txBody>
-          <a:bodyPr rtlCol="0" anchor="ctr" wrap="square"/>
+          <a:bodyPr rtlCol="0" anchor="ctr" wrap="none"/>
           <a:lstStyle/>
           <a:p>
             <a:pPr algn="ctr">
@@ -5136,8 +5136,8 @@
         </p:nvSpPr>
         <p:spPr>
           <a:xfrm>
-            <a:off x="9253067" y="2518156"/>
-            <a:ext cx="817879" cy="377444"/>
+            <a:off x="9136227" y="2518156"/>
+            <a:ext cx="1051560" cy="377444"/>
           </a:xfrm>
           <a:prstGeom prst="roundRect">
             <a:avLst/>
@@ -5164,7 +5164,7 @@
           </a:fontRef>
         </p:style>
         <p:txBody>
-          <a:bodyPr rtlCol="0" anchor="ctr" wrap="square"/>
+          <a:bodyPr rtlCol="0" anchor="ctr" wrap="none"/>
           <a:lstStyle/>
           <a:p>
             <a:pPr algn="ctr">
@@ -5225,8 +5225,8 @@
         </p:nvSpPr>
         <p:spPr>
           <a:xfrm>
-            <a:off x="9373717" y="3664712"/>
-            <a:ext cx="576580" cy="377444"/>
+            <a:off x="9288627" y="3664712"/>
+            <a:ext cx="746760" cy="377444"/>
           </a:xfrm>
           <a:prstGeom prst="roundRect">
             <a:avLst/>
@@ -5253,7 +5253,7 @@
           </a:fontRef>
         </p:style>
         <p:txBody>
-          <a:bodyPr rtlCol="0" anchor="ctr" wrap="square"/>
+          <a:bodyPr rtlCol="0" anchor="ctr" wrap="none"/>
           <a:lstStyle/>
           <a:p>
             <a:pPr algn="ctr">
@@ -5315,7 +5315,7 @@
         <p:spPr>
           <a:xfrm>
             <a:off x="731520" y="4957572"/>
-            <a:ext cx="10728655" cy="722376"/>
+            <a:ext cx="10728655" cy="425196"/>
           </a:xfrm>
           <a:prstGeom prst="rect">
             <a:avLst/>
@@ -6204,8 +6204,8 @@
         </p:nvSpPr>
         <p:spPr>
           <a:xfrm>
-            <a:off x="4404207" y="1371600"/>
-            <a:ext cx="3383280" cy="377444"/>
+            <a:off x="4236567" y="1371600"/>
+            <a:ext cx="3718560" cy="377444"/>
           </a:xfrm>
           <a:prstGeom prst="roundRect">
             <a:avLst/>
@@ -6257,8 +6257,8 @@
         </p:nvSpPr>
         <p:spPr>
           <a:xfrm>
-            <a:off x="731520" y="2427224"/>
-            <a:ext cx="27431" cy="457200"/>
+            <a:off x="731520" y="1986788"/>
+            <a:ext cx="27431" cy="1106932"/>
           </a:xfrm>
           <a:prstGeom prst="rect">
             <a:avLst/>
@@ -6339,7 +6339,7 @@
         <p:spPr>
           <a:xfrm>
             <a:off x="896112" y="2503424"/>
-            <a:ext cx="3289706" cy="821436"/>
+            <a:ext cx="3289706" cy="590296"/>
           </a:xfrm>
           <a:prstGeom prst="rect">
             <a:avLst/>
@@ -6374,8 +6374,8 @@
         </p:nvSpPr>
         <p:spPr>
           <a:xfrm>
-            <a:off x="4368698" y="2427224"/>
-            <a:ext cx="27431" cy="457200"/>
+            <a:off x="4368698" y="1986788"/>
+            <a:ext cx="27431" cy="1106932"/>
           </a:xfrm>
           <a:prstGeom prst="rect">
             <a:avLst/>
@@ -6456,7 +6456,7 @@
         <p:spPr>
           <a:xfrm>
             <a:off x="4533290" y="2503424"/>
-            <a:ext cx="3289706" cy="821436"/>
+            <a:ext cx="3289706" cy="590296"/>
           </a:xfrm>
           <a:prstGeom prst="rect">
             <a:avLst/>
@@ -6491,8 +6491,8 @@
         </p:nvSpPr>
         <p:spPr>
           <a:xfrm>
-            <a:off x="8005876" y="2427224"/>
-            <a:ext cx="27431" cy="457200"/>
+            <a:off x="8005876" y="1986788"/>
+            <a:ext cx="27431" cy="1106932"/>
           </a:xfrm>
           <a:prstGeom prst="rect">
             <a:avLst/>
@@ -6573,7 +6573,7 @@
         <p:spPr>
           <a:xfrm>
             <a:off x="8170468" y="2503424"/>
-            <a:ext cx="3289706" cy="821436"/>
+            <a:ext cx="3289706" cy="590296"/>
           </a:xfrm>
           <a:prstGeom prst="rect">
             <a:avLst/>
@@ -6608,8 +6608,8 @@
         </p:nvSpPr>
         <p:spPr>
           <a:xfrm>
-            <a:off x="731520" y="3562604"/>
-            <a:ext cx="10728655" cy="722376"/>
+            <a:off x="731520" y="3331464"/>
+            <a:ext cx="10728655" cy="425196"/>
           </a:xfrm>
           <a:prstGeom prst="rect">
             <a:avLst/>
@@ -8002,8 +8002,8 @@
         </p:nvSpPr>
         <p:spPr>
           <a:xfrm>
-            <a:off x="3270097" y="1371600"/>
-            <a:ext cx="1514652" cy="960120"/>
+            <a:off x="3531717" y="1371600"/>
+            <a:ext cx="1407972" cy="960120"/>
           </a:xfrm>
           <a:prstGeom prst="roundRect">
             <a:avLst/>
@@ -8057,7 +8057,7 @@
         </p:nvCxnSpPr>
         <p:spPr>
           <a:xfrm>
-            <a:off x="4784750" y="1851660"/>
+            <a:off x="4939690" y="1851660"/>
             <a:ext cx="395021" cy="0"/>
           </a:xfrm>
           <a:prstGeom prst="line">
@@ -8093,8 +8093,8 @@
         </p:nvSpPr>
         <p:spPr>
           <a:xfrm>
-            <a:off x="5179771" y="1371600"/>
-            <a:ext cx="2009952" cy="960120"/>
+            <a:off x="5334711" y="1371600"/>
+            <a:ext cx="1687372" cy="960120"/>
           </a:xfrm>
           <a:prstGeom prst="roundRect">
             <a:avLst/>
@@ -8148,7 +8148,7 @@
         </p:nvCxnSpPr>
         <p:spPr>
           <a:xfrm>
-            <a:off x="7189724" y="1851660"/>
+            <a:off x="7022084" y="1851660"/>
             <a:ext cx="395020" cy="0"/>
           </a:xfrm>
           <a:prstGeom prst="line">
@@ -8184,8 +8184,8 @@
         </p:nvSpPr>
         <p:spPr>
           <a:xfrm>
-            <a:off x="7584744" y="1371600"/>
-            <a:ext cx="1336852" cy="960120"/>
+            <a:off x="7417104" y="1371600"/>
+            <a:ext cx="1242872" cy="960120"/>
           </a:xfrm>
           <a:prstGeom prst="roundRect">
             <a:avLst/>
@@ -8239,8 +8239,8 @@
         </p:nvSpPr>
         <p:spPr>
           <a:xfrm>
-            <a:off x="1651711" y="2829814"/>
-            <a:ext cx="1516380" cy="377444"/>
+            <a:off x="1531696" y="2829814"/>
+            <a:ext cx="1756410" cy="377444"/>
           </a:xfrm>
           <a:prstGeom prst="roundRect">
             <a:avLst/>
@@ -8267,7 +8267,7 @@
           </a:fontRef>
         </p:style>
         <p:txBody>
-          <a:bodyPr rtlCol="0" anchor="ctr" wrap="square"/>
+          <a:bodyPr rtlCol="0" anchor="ctr" wrap="none"/>
           <a:lstStyle/>
           <a:p>
             <a:pPr algn="ctr">
@@ -8328,8 +8328,8 @@
         </p:nvSpPr>
         <p:spPr>
           <a:xfrm>
-            <a:off x="5528157" y="2829814"/>
-            <a:ext cx="1135380" cy="377444"/>
+            <a:off x="5436717" y="2829814"/>
+            <a:ext cx="1318259" cy="377444"/>
           </a:xfrm>
           <a:prstGeom prst="roundRect">
             <a:avLst/>
@@ -8356,7 +8356,7 @@
           </a:fontRef>
         </p:style>
         <p:txBody>
-          <a:bodyPr rtlCol="0" anchor="ctr" wrap="square"/>
+          <a:bodyPr rtlCol="0" anchor="ctr" wrap="none"/>
           <a:lstStyle/>
           <a:p>
             <a:pPr algn="ctr">
@@ -8417,8 +8417,8 @@
         </p:nvSpPr>
         <p:spPr>
           <a:xfrm>
-            <a:off x="8103412" y="3064764"/>
-            <a:ext cx="27431" cy="457200"/>
+            <a:off x="8103412" y="2624328"/>
+            <a:ext cx="27431" cy="1338072"/>
           </a:xfrm>
           <a:prstGeom prst="rect">
             <a:avLst/>
@@ -8462,7 +8462,7 @@
         </p:nvSpPr>
         <p:spPr>
           <a:xfrm>
-            <a:off x="8268004" y="2624328"/>
+            <a:off x="8268004" y="2739898"/>
             <a:ext cx="3192170" cy="425196"/>
           </a:xfrm>
           <a:prstGeom prst="rect">
@@ -8498,8 +8498,8 @@
         </p:nvSpPr>
         <p:spPr>
           <a:xfrm>
-            <a:off x="8268004" y="3140964"/>
-            <a:ext cx="3192170" cy="821436"/>
+            <a:off x="8268004" y="3256534"/>
+            <a:ext cx="3192170" cy="590296"/>
           </a:xfrm>
           <a:prstGeom prst="rect">
             <a:avLst/>
@@ -8535,7 +8535,7 @@
         <p:spPr>
           <a:xfrm>
             <a:off x="731520" y="4255008"/>
-            <a:ext cx="10728655" cy="722376"/>
+            <a:ext cx="10728655" cy="425196"/>
           </a:xfrm>
           <a:prstGeom prst="rect">
             <a:avLst/>
@@ -9653,8 +9653,8 @@
         </p:nvSpPr>
         <p:spPr>
           <a:xfrm>
-            <a:off x="2415387" y="1371600"/>
-            <a:ext cx="2011680" cy="377444"/>
+            <a:off x="2314422" y="1371600"/>
+            <a:ext cx="2213610" cy="377444"/>
           </a:xfrm>
           <a:prstGeom prst="roundRect">
             <a:avLst/>
@@ -9706,8 +9706,8 @@
         </p:nvSpPr>
         <p:spPr>
           <a:xfrm>
-            <a:off x="2986887" y="1913636"/>
-            <a:ext cx="868680" cy="377444"/>
+            <a:off x="2904972" y="1913636"/>
+            <a:ext cx="1032510" cy="377444"/>
           </a:xfrm>
           <a:prstGeom prst="roundRect">
             <a:avLst/>
@@ -9734,7 +9734,7 @@
           </a:fontRef>
         </p:style>
         <p:txBody>
-          <a:bodyPr rtlCol="0" anchor="ctr" wrap="square"/>
+          <a:bodyPr rtlCol="0" anchor="ctr" wrap="none"/>
           <a:lstStyle/>
           <a:p>
             <a:pPr algn="ctr">
@@ -9795,8 +9795,8 @@
         </p:nvSpPr>
         <p:spPr>
           <a:xfrm>
-            <a:off x="929487" y="3330194"/>
-            <a:ext cx="27432" cy="457200"/>
+            <a:off x="929487" y="3005328"/>
+            <a:ext cx="27432" cy="1106932"/>
           </a:xfrm>
           <a:prstGeom prst="rect">
             <a:avLst/>
@@ -9912,8 +9912,8 @@
         </p:nvSpPr>
         <p:spPr>
           <a:xfrm>
-            <a:off x="7802727" y="1371600"/>
-            <a:ext cx="1935480" cy="377444"/>
+            <a:off x="7739862" y="1371600"/>
+            <a:ext cx="2061210" cy="377444"/>
           </a:xfrm>
           <a:prstGeom prst="roundRect">
             <a:avLst/>
@@ -9965,8 +9965,8 @@
         </p:nvSpPr>
         <p:spPr>
           <a:xfrm>
-            <a:off x="7936077" y="1913636"/>
-            <a:ext cx="1668780" cy="377444"/>
+            <a:off x="7816062" y="1913636"/>
+            <a:ext cx="1908810" cy="377444"/>
           </a:xfrm>
           <a:prstGeom prst="roundRect">
             <a:avLst/>
@@ -10054,8 +10054,8 @@
         </p:nvSpPr>
         <p:spPr>
           <a:xfrm>
-            <a:off x="6278727" y="3330194"/>
-            <a:ext cx="27432" cy="457200"/>
+            <a:off x="6278727" y="3005328"/>
+            <a:ext cx="27432" cy="1106932"/>
           </a:xfrm>
           <a:prstGeom prst="rect">
             <a:avLst/>
@@ -10171,8 +10171,8 @@
         </p:nvSpPr>
         <p:spPr>
           <a:xfrm>
-            <a:off x="731520" y="4577588"/>
-            <a:ext cx="27431" cy="457200"/>
+            <a:off x="731520" y="4368292"/>
+            <a:ext cx="27431" cy="875792"/>
           </a:xfrm>
           <a:prstGeom prst="rect">
             <a:avLst/>
@@ -10289,7 +10289,7 @@
         <p:spPr>
           <a:xfrm>
             <a:off x="731520" y="5500116"/>
-            <a:ext cx="10728655" cy="722376"/>
+            <a:ext cx="10728655" cy="425196"/>
           </a:xfrm>
           <a:prstGeom prst="rect">
             <a:avLst/>
@@ -11938,8 +11938,8 @@
         </p:nvSpPr>
         <p:spPr>
           <a:xfrm>
-            <a:off x="2511907" y="1371600"/>
-            <a:ext cx="1910080" cy="377444"/>
+            <a:off x="2426817" y="1371600"/>
+            <a:ext cx="2080260" cy="377444"/>
           </a:xfrm>
           <a:prstGeom prst="roundRect">
             <a:avLst/>
@@ -11992,7 +11992,7 @@
         <p:spPr>
           <a:xfrm>
             <a:off x="1020927" y="1913636"/>
-            <a:ext cx="1188720" cy="749808"/>
+            <a:ext cx="1261110" cy="749808"/>
           </a:xfrm>
           <a:prstGeom prst="roundRect">
             <a:avLst/>
@@ -12021,7 +12021,7 @@
           </a:fontRef>
         </p:style>
         <p:txBody>
-          <a:bodyPr rtlCol="0" anchor="ctr" wrap="square"/>
+          <a:bodyPr rtlCol="0" anchor="ctr" wrap="none"/>
           <a:lstStyle/>
           <a:p>
             <a:pPr algn="ctr">
@@ -12046,8 +12046,8 @@
         </p:nvCxnSpPr>
         <p:spPr>
           <a:xfrm>
-            <a:off x="2209647" y="2288540"/>
-            <a:ext cx="346964" cy="0"/>
+            <a:off x="2282037" y="2288540"/>
+            <a:ext cx="274320" cy="0"/>
           </a:xfrm>
           <a:prstGeom prst="line">
             <a:avLst/>
@@ -12082,8 +12082,8 @@
         </p:nvSpPr>
         <p:spPr>
           <a:xfrm>
-            <a:off x="2556611" y="1913636"/>
-            <a:ext cx="1504696" cy="749808"/>
+            <a:off x="2556357" y="1913636"/>
+            <a:ext cx="1813560" cy="749808"/>
           </a:xfrm>
           <a:prstGeom prst="roundRect">
             <a:avLst/>
@@ -12112,7 +12112,7 @@
           </a:fontRef>
         </p:style>
         <p:txBody>
-          <a:bodyPr rtlCol="0" anchor="ctr" wrap="square"/>
+          <a:bodyPr rtlCol="0" anchor="ctr" wrap="none"/>
           <a:lstStyle/>
           <a:p>
             <a:pPr algn="ctr">
@@ -12137,8 +12137,8 @@
         </p:nvCxnSpPr>
         <p:spPr>
           <a:xfrm>
-            <a:off x="4061307" y="2288540"/>
-            <a:ext cx="346964" cy="0"/>
+            <a:off x="4369917" y="2288540"/>
+            <a:ext cx="274320" cy="0"/>
           </a:xfrm>
           <a:prstGeom prst="line">
             <a:avLst/>
@@ -12173,8 +12173,8 @@
         </p:nvSpPr>
         <p:spPr>
           <a:xfrm>
-            <a:off x="4408271" y="1913636"/>
-            <a:ext cx="1504696" cy="749808"/>
+            <a:off x="4644237" y="1913636"/>
+            <a:ext cx="1737360" cy="749808"/>
           </a:xfrm>
           <a:prstGeom prst="roundRect">
             <a:avLst/>
@@ -12228,8 +12228,8 @@
         </p:nvSpPr>
         <p:spPr>
           <a:xfrm>
-            <a:off x="1020927" y="3152902"/>
-            <a:ext cx="27432" cy="457200"/>
+            <a:off x="1020927" y="2828036"/>
+            <a:ext cx="27432" cy="1106932"/>
           </a:xfrm>
           <a:prstGeom prst="rect">
             <a:avLst/>
@@ -12345,8 +12345,8 @@
         </p:nvSpPr>
         <p:spPr>
           <a:xfrm>
-            <a:off x="7782407" y="1371600"/>
-            <a:ext cx="1884680" cy="377444"/>
+            <a:off x="7665567" y="1371600"/>
+            <a:ext cx="2118360" cy="377444"/>
           </a:xfrm>
           <a:prstGeom prst="roundRect">
             <a:avLst/>
@@ -12399,7 +12399,7 @@
         <p:spPr>
           <a:xfrm>
             <a:off x="6278727" y="1913636"/>
-            <a:ext cx="1667560" cy="749808"/>
+            <a:ext cx="2156460" cy="749808"/>
           </a:xfrm>
           <a:prstGeom prst="roundRect">
             <a:avLst/>
@@ -12428,7 +12428,7 @@
           </a:fontRef>
         </p:style>
         <p:txBody>
-          <a:bodyPr rtlCol="0" anchor="ctr" wrap="square"/>
+          <a:bodyPr rtlCol="0" anchor="ctr" wrap="none"/>
           <a:lstStyle/>
           <a:p>
             <a:pPr algn="ctr">
@@ -12453,7 +12453,7 @@
         </p:nvCxnSpPr>
         <p:spPr>
           <a:xfrm>
-            <a:off x="7946288" y="2288540"/>
+            <a:off x="8435187" y="2288540"/>
             <a:ext cx="274320" cy="0"/>
           </a:xfrm>
           <a:prstGeom prst="line">
@@ -12489,8 +12489,8 @@
         </p:nvSpPr>
         <p:spPr>
           <a:xfrm>
-            <a:off x="8220608" y="1913636"/>
-            <a:ext cx="1743760" cy="749808"/>
+            <a:off x="8709507" y="1913636"/>
+            <a:ext cx="2156460" cy="749808"/>
           </a:xfrm>
           <a:prstGeom prst="roundRect">
             <a:avLst/>
@@ -12544,7 +12544,7 @@
         </p:nvCxnSpPr>
         <p:spPr>
           <a:xfrm>
-            <a:off x="9964369" y="2288540"/>
+            <a:off x="10865967" y="2288540"/>
             <a:ext cx="274320" cy="0"/>
           </a:xfrm>
           <a:prstGeom prst="line">
@@ -12580,8 +12580,8 @@
         </p:nvSpPr>
         <p:spPr>
           <a:xfrm>
-            <a:off x="10238689" y="1913636"/>
-            <a:ext cx="1070660" cy="749808"/>
+            <a:off x="11140287" y="1913636"/>
+            <a:ext cx="1508760" cy="749808"/>
           </a:xfrm>
           <a:prstGeom prst="roundRect">
             <a:avLst/>
@@ -12635,8 +12635,8 @@
         </p:nvSpPr>
         <p:spPr>
           <a:xfrm>
-            <a:off x="6278727" y="3152902"/>
-            <a:ext cx="27432" cy="457200"/>
+            <a:off x="6278727" y="2828036"/>
+            <a:ext cx="27432" cy="1106932"/>
           </a:xfrm>
           <a:prstGeom prst="rect">
             <a:avLst/>
@@ -12753,7 +12753,7 @@
         <p:spPr>
           <a:xfrm>
             <a:off x="731520" y="4190999"/>
-            <a:ext cx="10728655" cy="722376"/>
+            <a:ext cx="10728655" cy="425196"/>
           </a:xfrm>
           <a:prstGeom prst="rect">
             <a:avLst/>
@@ -15108,8 +15108,8 @@
         </p:nvSpPr>
         <p:spPr>
           <a:xfrm>
-            <a:off x="1860245" y="1536700"/>
-            <a:ext cx="1148080" cy="377444"/>
+            <a:off x="1727530" y="1371600"/>
+            <a:ext cx="1413510" cy="377444"/>
           </a:xfrm>
           <a:prstGeom prst="roundRect">
             <a:avLst/>
@@ -15136,7 +15136,7 @@
           </a:fontRef>
         </p:style>
         <p:txBody>
-          <a:bodyPr rtlCol="0" anchor="ctr" wrap="square"/>
+          <a:bodyPr rtlCol="0" anchor="ctr" wrap="none"/>
           <a:lstStyle/>
           <a:p>
             <a:pPr algn="ctr">
@@ -15161,7 +15161,7 @@
         </p:nvSpPr>
         <p:spPr>
           <a:xfrm>
-            <a:off x="731520" y="2005584"/>
+            <a:off x="731520" y="1840484"/>
             <a:ext cx="3405530" cy="458216"/>
           </a:xfrm>
           <a:prstGeom prst="rect">
@@ -15197,8 +15197,8 @@
         </p:nvSpPr>
         <p:spPr>
           <a:xfrm>
-            <a:off x="5718657" y="1371600"/>
-            <a:ext cx="754380" cy="377444"/>
+            <a:off x="5627217" y="1371600"/>
+            <a:ext cx="937259" cy="377444"/>
           </a:xfrm>
           <a:prstGeom prst="roundRect">
             <a:avLst/>
@@ -15225,7 +15225,7 @@
           </a:fontRef>
         </p:style>
         <p:txBody>
-          <a:bodyPr rtlCol="0" anchor="ctr" wrap="square"/>
+          <a:bodyPr rtlCol="0" anchor="ctr" wrap="none"/>
           <a:lstStyle/>
           <a:p>
             <a:pPr algn="ctr">
@@ -15251,7 +15251,7 @@
         <p:spPr>
           <a:xfrm>
             <a:off x="4393082" y="1840484"/>
-            <a:ext cx="3405530" cy="788416"/>
+            <a:ext cx="3405530" cy="458216"/>
           </a:xfrm>
           <a:prstGeom prst="rect">
             <a:avLst/>
@@ -15286,8 +15286,8 @@
         </p:nvSpPr>
         <p:spPr>
           <a:xfrm>
-            <a:off x="9157970" y="1536700"/>
-            <a:ext cx="1198880" cy="377444"/>
+            <a:off x="9041130" y="1371600"/>
+            <a:ext cx="1432560" cy="377444"/>
           </a:xfrm>
           <a:prstGeom prst="roundRect">
             <a:avLst/>
@@ -15314,7 +15314,7 @@
           </a:fontRef>
         </p:style>
         <p:txBody>
-          <a:bodyPr rtlCol="0" anchor="ctr" wrap="square"/>
+          <a:bodyPr rtlCol="0" anchor="ctr" wrap="none"/>
           <a:lstStyle/>
           <a:p>
             <a:pPr algn="ctr">
@@ -15339,7 +15339,7 @@
         </p:nvSpPr>
         <p:spPr>
           <a:xfrm>
-            <a:off x="8054644" y="2005584"/>
+            <a:off x="8054644" y="1840484"/>
             <a:ext cx="3405530" cy="458216"/>
           </a:xfrm>
           <a:prstGeom prst="rect">
@@ -15375,8 +15375,8 @@
         </p:nvSpPr>
         <p:spPr>
           <a:xfrm>
-            <a:off x="2240127" y="2884932"/>
-            <a:ext cx="1851805" cy="749808"/>
+            <a:off x="1942947" y="2554732"/>
+            <a:ext cx="2156460" cy="749808"/>
           </a:xfrm>
           <a:prstGeom prst="roundRect">
             <a:avLst/>
@@ -15405,7 +15405,7 @@
           </a:fontRef>
         </p:style>
         <p:txBody>
-          <a:bodyPr rtlCol="0" anchor="ctr" wrap="square"/>
+          <a:bodyPr rtlCol="0" anchor="ctr" wrap="none"/>
           <a:lstStyle/>
           <a:p>
             <a:pPr algn="ctr">
@@ -15430,8 +15430,8 @@
         </p:nvCxnSpPr>
         <p:spPr>
           <a:xfrm>
-            <a:off x="4091932" y="3259836"/>
-            <a:ext cx="389273" cy="0"/>
+            <a:off x="4099407" y="2929636"/>
+            <a:ext cx="274320" cy="0"/>
           </a:xfrm>
           <a:prstGeom prst="line">
             <a:avLst/>
@@ -15466,8 +15466,8 @@
         </p:nvSpPr>
         <p:spPr>
           <a:xfrm>
-            <a:off x="4481205" y="2884932"/>
-            <a:ext cx="1902605" cy="749808"/>
+            <a:off x="4373727" y="2554732"/>
+            <a:ext cx="2156460" cy="749808"/>
           </a:xfrm>
           <a:prstGeom prst="roundRect">
             <a:avLst/>
@@ -15521,8 +15521,8 @@
         </p:nvCxnSpPr>
         <p:spPr>
           <a:xfrm>
-            <a:off x="6383811" y="3259836"/>
-            <a:ext cx="389273" cy="0"/>
+            <a:off x="6530187" y="2929636"/>
+            <a:ext cx="274320" cy="0"/>
           </a:xfrm>
           <a:prstGeom prst="line">
             <a:avLst/>
@@ -15557,8 +15557,8 @@
         </p:nvSpPr>
         <p:spPr>
           <a:xfrm>
-            <a:off x="6773084" y="2884932"/>
-            <a:ext cx="1229505" cy="749808"/>
+            <a:off x="6804507" y="2554732"/>
+            <a:ext cx="1470660" cy="749808"/>
           </a:xfrm>
           <a:prstGeom prst="roundRect">
             <a:avLst/>
@@ -15587,7 +15587,7 @@
           </a:fontRef>
         </p:style>
         <p:txBody>
-          <a:bodyPr rtlCol="0" anchor="ctr" wrap="square"/>
+          <a:bodyPr rtlCol="0" anchor="ctr" wrap="none"/>
           <a:lstStyle/>
           <a:p>
             <a:pPr algn="ctr">
@@ -15612,8 +15612,8 @@
         </p:nvCxnSpPr>
         <p:spPr>
           <a:xfrm>
-            <a:off x="8002589" y="3259836"/>
-            <a:ext cx="389273" cy="0"/>
+            <a:off x="8275167" y="2929636"/>
+            <a:ext cx="274320" cy="0"/>
           </a:xfrm>
           <a:prstGeom prst="line">
             <a:avLst/>
@@ -15648,8 +15648,8 @@
         </p:nvSpPr>
         <p:spPr>
           <a:xfrm>
-            <a:off x="8391862" y="2884932"/>
-            <a:ext cx="1559705" cy="749808"/>
+            <a:off x="8549487" y="2554732"/>
+            <a:ext cx="1699260" cy="749808"/>
           </a:xfrm>
           <a:prstGeom prst="roundRect">
             <a:avLst/>
@@ -15703,8 +15703,8 @@
         </p:nvSpPr>
         <p:spPr>
           <a:xfrm>
-            <a:off x="731520" y="4215638"/>
-            <a:ext cx="27431" cy="457200"/>
+            <a:off x="731520" y="3560572"/>
+            <a:ext cx="27431" cy="875792"/>
           </a:xfrm>
           <a:prstGeom prst="rect">
             <a:avLst/>
@@ -15748,7 +15748,7 @@
         </p:nvSpPr>
         <p:spPr>
           <a:xfrm>
-            <a:off x="896111" y="3890772"/>
+            <a:off x="896111" y="3560572"/>
             <a:ext cx="10564063" cy="425196"/>
           </a:xfrm>
           <a:prstGeom prst="rect">
@@ -15784,8 +15784,8 @@
         </p:nvSpPr>
         <p:spPr>
           <a:xfrm>
-            <a:off x="896111" y="4407408"/>
-            <a:ext cx="10564063" cy="590296"/>
+            <a:off x="896111" y="4077208"/>
+            <a:ext cx="10564063" cy="359156"/>
           </a:xfrm>
           <a:prstGeom prst="rect">
             <a:avLst/>
@@ -15820,7 +15820,7 @@
         </p:nvSpPr>
         <p:spPr>
           <a:xfrm>
-            <a:off x="731520" y="5253736"/>
+            <a:off x="731520" y="4692396"/>
             <a:ext cx="10728655" cy="425196"/>
           </a:xfrm>
           <a:prstGeom prst="rect">
@@ -17160,8 +17160,8 @@
         </p:nvSpPr>
         <p:spPr>
           <a:xfrm>
-            <a:off x="5223357" y="1371600"/>
-            <a:ext cx="1744980" cy="377444"/>
+            <a:off x="5084292" y="1371600"/>
+            <a:ext cx="2023110" cy="377444"/>
           </a:xfrm>
           <a:prstGeom prst="roundRect">
             <a:avLst/>
@@ -17213,8 +17213,8 @@
         </p:nvSpPr>
         <p:spPr>
           <a:xfrm>
-            <a:off x="2246477" y="1968500"/>
-            <a:ext cx="1483505" cy="1005840"/>
+            <a:off x="2548737" y="1968500"/>
+            <a:ext cx="1376825" cy="1005840"/>
           </a:xfrm>
           <a:prstGeom prst="roundRect">
             <a:avLst/>
@@ -17268,7 +17268,7 @@
         </p:nvCxnSpPr>
         <p:spPr>
           <a:xfrm>
-            <a:off x="3729982" y="2471419"/>
+            <a:off x="3925562" y="2471419"/>
             <a:ext cx="389273" cy="0"/>
           </a:xfrm>
           <a:prstGeom prst="line">
@@ -17304,8 +17304,8 @@
         </p:nvSpPr>
         <p:spPr>
           <a:xfrm>
-            <a:off x="4119255" y="1968500"/>
-            <a:ext cx="1394605" cy="1005840"/>
+            <a:off x="4314835" y="1968500"/>
+            <a:ext cx="1313325" cy="1005840"/>
           </a:xfrm>
           <a:prstGeom prst="roundRect">
             <a:avLst/>
@@ -17359,7 +17359,7 @@
         </p:nvCxnSpPr>
         <p:spPr>
           <a:xfrm>
-            <a:off x="5513861" y="2471419"/>
+            <a:off x="5628161" y="2471419"/>
             <a:ext cx="389273" cy="0"/>
           </a:xfrm>
           <a:prstGeom prst="line">
@@ -17395,8 +17395,8 @@
         </p:nvSpPr>
         <p:spPr>
           <a:xfrm>
-            <a:off x="5903134" y="1968500"/>
-            <a:ext cx="1686705" cy="1005840"/>
+            <a:off x="6017434" y="1968500"/>
+            <a:ext cx="1503825" cy="1005840"/>
           </a:xfrm>
           <a:prstGeom prst="roundRect">
             <a:avLst/>
@@ -17450,7 +17450,7 @@
         </p:nvCxnSpPr>
         <p:spPr>
           <a:xfrm>
-            <a:off x="7589839" y="2471419"/>
+            <a:off x="7521259" y="2471419"/>
             <a:ext cx="389273" cy="0"/>
           </a:xfrm>
           <a:prstGeom prst="line">
@@ -17486,8 +17486,8 @@
         </p:nvSpPr>
         <p:spPr>
           <a:xfrm>
-            <a:off x="7979112" y="1968500"/>
-            <a:ext cx="1966105" cy="1005840"/>
+            <a:off x="7910532" y="1968500"/>
+            <a:ext cx="1732425" cy="1005840"/>
           </a:xfrm>
           <a:prstGeom prst="roundRect">
             <a:avLst/>
@@ -17541,8 +17541,8 @@
         </p:nvSpPr>
         <p:spPr>
           <a:xfrm>
-            <a:off x="731520" y="3634231"/>
-            <a:ext cx="27431" cy="457200"/>
+            <a:off x="731520" y="3193796"/>
+            <a:ext cx="27431" cy="1106932"/>
           </a:xfrm>
           <a:prstGeom prst="rect">
             <a:avLst/>
@@ -17623,7 +17623,7 @@
         <p:spPr>
           <a:xfrm>
             <a:off x="896112" y="3710432"/>
-            <a:ext cx="3265322" cy="821436"/>
+            <a:ext cx="3265322" cy="590296"/>
           </a:xfrm>
           <a:prstGeom prst="rect">
             <a:avLst/>
@@ -17658,8 +17658,8 @@
         </p:nvSpPr>
         <p:spPr>
           <a:xfrm>
-            <a:off x="4380890" y="3634231"/>
-            <a:ext cx="27431" cy="457200"/>
+            <a:off x="4380890" y="3193796"/>
+            <a:ext cx="27431" cy="1106932"/>
           </a:xfrm>
           <a:prstGeom prst="rect">
             <a:avLst/>
@@ -17740,7 +17740,7 @@
         <p:spPr>
           <a:xfrm>
             <a:off x="4545482" y="3710432"/>
-            <a:ext cx="3265322" cy="821436"/>
+            <a:ext cx="3265322" cy="590296"/>
           </a:xfrm>
           <a:prstGeom prst="rect">
             <a:avLst/>
@@ -17775,8 +17775,8 @@
         </p:nvSpPr>
         <p:spPr>
           <a:xfrm>
-            <a:off x="8030260" y="3634231"/>
-            <a:ext cx="27431" cy="457200"/>
+            <a:off x="8030260" y="3193796"/>
+            <a:ext cx="27431" cy="1106932"/>
           </a:xfrm>
           <a:prstGeom prst="rect">
             <a:avLst/>
@@ -17857,7 +17857,7 @@
         <p:spPr>
           <a:xfrm>
             <a:off x="8194852" y="3710432"/>
-            <a:ext cx="3265322" cy="821436"/>
+            <a:ext cx="3265322" cy="590296"/>
           </a:xfrm>
           <a:prstGeom prst="rect">
             <a:avLst/>
@@ -17892,8 +17892,8 @@
         </p:nvSpPr>
         <p:spPr>
           <a:xfrm>
-            <a:off x="1657553" y="4900421"/>
-            <a:ext cx="1529080" cy="377444"/>
+            <a:off x="1534363" y="4669282"/>
+            <a:ext cx="1775459" cy="377444"/>
           </a:xfrm>
           <a:prstGeom prst="roundRect">
             <a:avLst/>
@@ -17945,7 +17945,7 @@
         </p:nvSpPr>
         <p:spPr>
           <a:xfrm>
-            <a:off x="731520" y="5369306"/>
+            <a:off x="731520" y="5138166"/>
             <a:ext cx="3381146" cy="458216"/>
           </a:xfrm>
           <a:prstGeom prst="rect">
@@ -17981,8 +17981,8 @@
         </p:nvSpPr>
         <p:spPr>
           <a:xfrm>
-            <a:off x="5407507" y="4900421"/>
-            <a:ext cx="1376680" cy="377444"/>
+            <a:off x="5284317" y="4669282"/>
+            <a:ext cx="1623060" cy="377444"/>
           </a:xfrm>
           <a:prstGeom prst="roundRect">
             <a:avLst/>
@@ -18009,7 +18009,7 @@
           </a:fontRef>
         </p:style>
         <p:txBody>
-          <a:bodyPr rtlCol="0" anchor="ctr" wrap="square"/>
+          <a:bodyPr rtlCol="0" anchor="ctr" wrap="none"/>
           <a:lstStyle/>
           <a:p>
             <a:pPr algn="ctr">
@@ -18034,7 +18034,7 @@
         </p:nvSpPr>
         <p:spPr>
           <a:xfrm>
-            <a:off x="4405274" y="5369306"/>
+            <a:off x="4405274" y="5138166"/>
             <a:ext cx="3381146" cy="458216"/>
           </a:xfrm>
           <a:prstGeom prst="rect">
@@ -18070,8 +18070,8 @@
         </p:nvSpPr>
         <p:spPr>
           <a:xfrm>
-            <a:off x="8079028" y="5135372"/>
-            <a:ext cx="27431" cy="457200"/>
+            <a:off x="8079028" y="4520184"/>
+            <a:ext cx="27431" cy="1225296"/>
           </a:xfrm>
           <a:prstGeom prst="rect">
             <a:avLst/>
@@ -18115,8 +18115,8 @@
         </p:nvSpPr>
         <p:spPr>
           <a:xfrm>
-            <a:off x="8243620" y="4751324"/>
-            <a:ext cx="3216554" cy="368808"/>
+            <a:off x="8243620" y="4579366"/>
+            <a:ext cx="3216554" cy="425196"/>
           </a:xfrm>
           <a:prstGeom prst="rect">
             <a:avLst/>
@@ -18151,8 +18151,8 @@
         </p:nvSpPr>
         <p:spPr>
           <a:xfrm>
-            <a:off x="8243620" y="5211571"/>
-            <a:ext cx="3216554" cy="765048"/>
+            <a:off x="8243620" y="5096002"/>
+            <a:ext cx="3216554" cy="590296"/>
           </a:xfrm>
           <a:prstGeom prst="rect">
             <a:avLst/>
@@ -21509,8 +21509,8 @@
         </p:nvSpPr>
         <p:spPr>
           <a:xfrm>
-            <a:off x="5331307" y="1371600"/>
-            <a:ext cx="1529080" cy="377444"/>
+            <a:off x="5246217" y="1371600"/>
+            <a:ext cx="1699260" cy="377444"/>
           </a:xfrm>
           <a:prstGeom prst="roundRect">
             <a:avLst/>
@@ -21562,8 +21562,8 @@
         </p:nvSpPr>
         <p:spPr>
           <a:xfrm>
-            <a:off x="3630777" y="2041652"/>
-            <a:ext cx="1188720" cy="749808"/>
+            <a:off x="3381222" y="2041652"/>
+            <a:ext cx="1337310" cy="749808"/>
           </a:xfrm>
           <a:prstGeom prst="roundRect">
             <a:avLst/>
@@ -21592,7 +21592,7 @@
           </a:fontRef>
         </p:style>
         <p:txBody>
-          <a:bodyPr rtlCol="0" anchor="ctr" wrap="square"/>
+          <a:bodyPr rtlCol="0" anchor="ctr" wrap="none"/>
           <a:lstStyle/>
           <a:p>
             <a:pPr algn="ctr">
@@ -21617,7 +21617,7 @@
         </p:nvCxnSpPr>
         <p:spPr>
           <a:xfrm>
-            <a:off x="4819497" y="2416556"/>
+            <a:off x="4718532" y="2416556"/>
             <a:ext cx="274320" cy="0"/>
           </a:xfrm>
           <a:prstGeom prst="line">
@@ -21653,8 +21653,8 @@
         </p:nvSpPr>
         <p:spPr>
           <a:xfrm>
-            <a:off x="5093817" y="2041652"/>
-            <a:ext cx="1239520" cy="749808"/>
+            <a:off x="4992852" y="2041652"/>
+            <a:ext cx="1337310" cy="749808"/>
           </a:xfrm>
           <a:prstGeom prst="roundRect">
             <a:avLst/>
@@ -21683,7 +21683,7 @@
           </a:fontRef>
         </p:style>
         <p:txBody>
-          <a:bodyPr rtlCol="0" anchor="ctr" wrap="square"/>
+          <a:bodyPr rtlCol="0" anchor="ctr" wrap="none"/>
           <a:lstStyle/>
           <a:p>
             <a:pPr algn="ctr">
@@ -21708,7 +21708,7 @@
         </p:nvCxnSpPr>
         <p:spPr>
           <a:xfrm>
-            <a:off x="6333337" y="2416556"/>
+            <a:off x="6330162" y="2416556"/>
             <a:ext cx="274320" cy="0"/>
           </a:xfrm>
           <a:prstGeom prst="line">
@@ -21744,8 +21744,8 @@
         </p:nvSpPr>
         <p:spPr>
           <a:xfrm>
-            <a:off x="6607657" y="2041652"/>
-            <a:ext cx="756920" cy="749808"/>
+            <a:off x="6604482" y="2041652"/>
+            <a:ext cx="899160" cy="749808"/>
           </a:xfrm>
           <a:prstGeom prst="roundRect">
             <a:avLst/>
@@ -21774,7 +21774,7 @@
           </a:fontRef>
         </p:style>
         <p:txBody>
-          <a:bodyPr rtlCol="0" anchor="ctr" wrap="square"/>
+          <a:bodyPr rtlCol="0" anchor="ctr" wrap="none"/>
           <a:lstStyle/>
           <a:p>
             <a:pPr algn="ctr">
@@ -21799,7 +21799,7 @@
         </p:nvCxnSpPr>
         <p:spPr>
           <a:xfrm>
-            <a:off x="7364577" y="2416556"/>
+            <a:off x="7503642" y="2416556"/>
             <a:ext cx="274320" cy="0"/>
           </a:xfrm>
           <a:prstGeom prst="line">
@@ -21835,8 +21835,8 @@
         </p:nvSpPr>
         <p:spPr>
           <a:xfrm>
-            <a:off x="7638897" y="2041652"/>
-            <a:ext cx="922020" cy="749808"/>
+            <a:off x="7777962" y="2041652"/>
+            <a:ext cx="1032510" cy="749808"/>
           </a:xfrm>
           <a:prstGeom prst="roundRect">
             <a:avLst/>
@@ -21865,7 +21865,7 @@
           </a:fontRef>
         </p:style>
         <p:txBody>
-          <a:bodyPr rtlCol="0" anchor="ctr" wrap="square"/>
+          <a:bodyPr rtlCol="0" anchor="ctr" wrap="none"/>
           <a:lstStyle/>
           <a:p>
             <a:pPr algn="ctr">
@@ -21890,8 +21890,8 @@
         </p:nvSpPr>
         <p:spPr>
           <a:xfrm>
-            <a:off x="731520" y="3408933"/>
-            <a:ext cx="27431" cy="457200"/>
+            <a:off x="731520" y="3084067"/>
+            <a:ext cx="27431" cy="875792"/>
           </a:xfrm>
           <a:prstGeom prst="rect">
             <a:avLst/>
@@ -21972,7 +21972,7 @@
         <p:spPr>
           <a:xfrm>
             <a:off x="896111" y="3600703"/>
-            <a:ext cx="10564063" cy="590296"/>
+            <a:ext cx="10564063" cy="359156"/>
           </a:xfrm>
           <a:prstGeom prst="rect">
             <a:avLst/>
@@ -22007,8 +22007,8 @@
         </p:nvSpPr>
         <p:spPr>
           <a:xfrm>
-            <a:off x="731520" y="4483608"/>
-            <a:ext cx="10728655" cy="722376"/>
+            <a:off x="731520" y="4252468"/>
+            <a:ext cx="10728655" cy="425196"/>
           </a:xfrm>
           <a:prstGeom prst="rect">
             <a:avLst/>
@@ -22947,8 +22947,8 @@
         </p:nvSpPr>
         <p:spPr>
           <a:xfrm>
-            <a:off x="3930497" y="1371600"/>
-            <a:ext cx="1202436" cy="749808"/>
+            <a:off x="3777462" y="1371600"/>
+            <a:ext cx="1413510" cy="749808"/>
           </a:xfrm>
           <a:prstGeom prst="roundRect">
             <a:avLst/>
@@ -22977,7 +22977,7 @@
           </a:fontRef>
         </p:style>
         <p:txBody>
-          <a:bodyPr rtlCol="0" anchor="ctr" wrap="square"/>
+          <a:bodyPr rtlCol="0" anchor="ctr" wrap="none"/>
           <a:lstStyle/>
           <a:p>
             <a:pPr algn="ctr">
@@ -23002,8 +23002,8 @@
         </p:nvCxnSpPr>
         <p:spPr>
           <a:xfrm>
-            <a:off x="5132933" y="1746504"/>
-            <a:ext cx="374904" cy="0"/>
+            <a:off x="5190972" y="1746504"/>
+            <a:ext cx="274320" cy="0"/>
           </a:xfrm>
           <a:prstGeom prst="line">
             <a:avLst/>
@@ -23038,8 +23038,8 @@
         </p:nvSpPr>
         <p:spPr>
           <a:xfrm>
-            <a:off x="5507837" y="1371600"/>
-            <a:ext cx="1150620" cy="749808"/>
+            <a:off x="5465292" y="1371600"/>
+            <a:ext cx="1223010" cy="749808"/>
           </a:xfrm>
           <a:prstGeom prst="roundRect">
             <a:avLst/>
@@ -23068,7 +23068,7 @@
           </a:fontRef>
         </p:style>
         <p:txBody>
-          <a:bodyPr rtlCol="0" anchor="ctr" wrap="square"/>
+          <a:bodyPr rtlCol="0" anchor="ctr" wrap="none"/>
           <a:lstStyle/>
           <a:p>
             <a:pPr algn="ctr">
@@ -23093,8 +23093,8 @@
         </p:nvCxnSpPr>
         <p:spPr>
           <a:xfrm>
-            <a:off x="6658457" y="1746504"/>
-            <a:ext cx="374904" cy="0"/>
+            <a:off x="6688302" y="1746504"/>
+            <a:ext cx="274320" cy="0"/>
           </a:xfrm>
           <a:prstGeom prst="line">
             <a:avLst/>
@@ -23129,8 +23129,8 @@
         </p:nvSpPr>
         <p:spPr>
           <a:xfrm>
-            <a:off x="7033361" y="1371600"/>
-            <a:ext cx="1227835" cy="749808"/>
+            <a:off x="6962622" y="1371600"/>
+            <a:ext cx="1451610" cy="749808"/>
           </a:xfrm>
           <a:prstGeom prst="roundRect">
             <a:avLst/>
@@ -23159,7 +23159,7 @@
           </a:fontRef>
         </p:style>
         <p:txBody>
-          <a:bodyPr rtlCol="0" anchor="ctr" wrap="square"/>
+          <a:bodyPr rtlCol="0" anchor="ctr" wrap="none"/>
           <a:lstStyle/>
           <a:p>
             <a:pPr algn="ctr">
@@ -23184,8 +23184,8 @@
         </p:nvSpPr>
         <p:spPr>
           <a:xfrm>
-            <a:off x="3318357" y="3113532"/>
-            <a:ext cx="1211580" cy="377444"/>
+            <a:off x="3217392" y="2816352"/>
+            <a:ext cx="1413510" cy="377444"/>
           </a:xfrm>
           <a:prstGeom prst="roundRect">
             <a:avLst/>
@@ -23212,7 +23212,7 @@
           </a:fontRef>
         </p:style>
         <p:txBody>
-          <a:bodyPr rtlCol="0" anchor="ctr" wrap="square"/>
+          <a:bodyPr rtlCol="0" anchor="ctr" wrap="none"/>
           <a:lstStyle/>
           <a:p>
             <a:pPr algn="ctr">
@@ -23237,8 +23237,8 @@
         </p:nvSpPr>
         <p:spPr>
           <a:xfrm>
-            <a:off x="2936087" y="3618992"/>
-            <a:ext cx="1976119" cy="548640"/>
+            <a:off x="3036417" y="3321812"/>
+            <a:ext cx="1775459" cy="548640"/>
           </a:xfrm>
           <a:prstGeom prst="roundRect">
             <a:avLst/>
@@ -23292,8 +23292,8 @@
         </p:nvSpPr>
         <p:spPr>
           <a:xfrm>
-            <a:off x="2929737" y="4295648"/>
-            <a:ext cx="1988819" cy="548640"/>
+            <a:off x="3045942" y="3998468"/>
+            <a:ext cx="1756410" cy="548640"/>
           </a:xfrm>
           <a:prstGeom prst="roundRect">
             <a:avLst/>
@@ -23347,8 +23347,8 @@
         </p:nvSpPr>
         <p:spPr>
           <a:xfrm>
-            <a:off x="2929737" y="4972304"/>
-            <a:ext cx="1988819" cy="548640"/>
+            <a:off x="3036417" y="4675124"/>
+            <a:ext cx="1775459" cy="548640"/>
           </a:xfrm>
           <a:prstGeom prst="roundRect">
             <a:avLst/>
@@ -23402,8 +23402,8 @@
         </p:nvSpPr>
         <p:spPr>
           <a:xfrm>
-            <a:off x="7200747" y="2340864"/>
-            <a:ext cx="1402080" cy="377444"/>
+            <a:off x="7099782" y="2340864"/>
+            <a:ext cx="1604010" cy="377444"/>
           </a:xfrm>
           <a:prstGeom prst="roundRect">
             <a:avLst/>
@@ -23483,7 +23483,7 @@
           </a:fontRef>
         </p:style>
         <p:txBody>
-          <a:bodyPr rtlCol="0" anchor="ctr" wrap="square"/>
+          <a:bodyPr rtlCol="0" anchor="ctr" wrap="none"/>
           <a:lstStyle/>
           <a:p>
             <a:pPr algn="ctr">
@@ -23513,7 +23513,7 @@
         <p:spPr>
           <a:xfrm>
             <a:off x="5981547" y="4976876"/>
-            <a:ext cx="3840480" cy="1316736"/>
+            <a:ext cx="3840480" cy="722376"/>
           </a:xfrm>
           <a:prstGeom prst="rect">
             <a:avLst/>
@@ -24347,8 +24347,8 @@
         </p:nvSpPr>
         <p:spPr>
           <a:xfrm>
-            <a:off x="2163927" y="1371600"/>
-            <a:ext cx="1267605" cy="1005840"/>
+            <a:off x="2555087" y="1371600"/>
+            <a:ext cx="1211725" cy="1005840"/>
           </a:xfrm>
           <a:prstGeom prst="roundRect">
             <a:avLst/>
@@ -24402,7 +24402,7 @@
         </p:nvCxnSpPr>
         <p:spPr>
           <a:xfrm>
-            <a:off x="3431532" y="1874519"/>
+            <a:off x="3766812" y="1874519"/>
             <a:ext cx="389273" cy="0"/>
           </a:xfrm>
           <a:prstGeom prst="line">
@@ -24438,8 +24438,8 @@
         </p:nvSpPr>
         <p:spPr>
           <a:xfrm>
-            <a:off x="3820805" y="1371600"/>
-            <a:ext cx="1737505" cy="1005840"/>
+            <a:off x="4156085" y="1371600"/>
+            <a:ext cx="1516525" cy="1005840"/>
           </a:xfrm>
           <a:prstGeom prst="roundRect">
             <a:avLst/>
@@ -24493,7 +24493,7 @@
         </p:nvCxnSpPr>
         <p:spPr>
           <a:xfrm>
-            <a:off x="5558311" y="1874519"/>
+            <a:off x="5672611" y="1874519"/>
             <a:ext cx="389273" cy="0"/>
           </a:xfrm>
           <a:prstGeom prst="line">
@@ -24529,8 +24529,8 @@
         </p:nvSpPr>
         <p:spPr>
           <a:xfrm>
-            <a:off x="5947584" y="1371600"/>
-            <a:ext cx="2169305" cy="1005840"/>
+            <a:off x="6061884" y="1371600"/>
+            <a:ext cx="1783225" cy="1005840"/>
           </a:xfrm>
           <a:prstGeom prst="roundRect">
             <a:avLst/>
@@ -24584,7 +24584,7 @@
         </p:nvCxnSpPr>
         <p:spPr>
           <a:xfrm>
-            <a:off x="8116889" y="1874519"/>
+            <a:off x="7845109" y="1874519"/>
             <a:ext cx="389273" cy="0"/>
           </a:xfrm>
           <a:prstGeom prst="line">
@@ -24620,8 +24620,8 @@
         </p:nvSpPr>
         <p:spPr>
           <a:xfrm>
-            <a:off x="8506162" y="1371600"/>
-            <a:ext cx="1521605" cy="1005840"/>
+            <a:off x="8234382" y="1371600"/>
+            <a:ext cx="1402225" cy="1005840"/>
           </a:xfrm>
           <a:prstGeom prst="roundRect">
             <a:avLst/>
@@ -24675,8 +24675,8 @@
         </p:nvSpPr>
         <p:spPr>
           <a:xfrm>
-            <a:off x="731520" y="2994914"/>
-            <a:ext cx="27431" cy="457200"/>
+            <a:off x="731520" y="2670048"/>
+            <a:ext cx="27431" cy="875792"/>
           </a:xfrm>
           <a:prstGeom prst="rect">
             <a:avLst/>
@@ -24757,7 +24757,7 @@
         <p:spPr>
           <a:xfrm>
             <a:off x="896111" y="3186684"/>
-            <a:ext cx="10564063" cy="590296"/>
+            <a:ext cx="10564063" cy="359156"/>
           </a:xfrm>
           <a:prstGeom prst="rect">
             <a:avLst/>
@@ -24792,8 +24792,8 @@
         </p:nvSpPr>
         <p:spPr>
           <a:xfrm>
-            <a:off x="731520" y="4069588"/>
-            <a:ext cx="10728655" cy="722376"/>
+            <a:off x="731520" y="3838448"/>
+            <a:ext cx="10728655" cy="425196"/>
           </a:xfrm>
           <a:prstGeom prst="rect">
             <a:avLst/>
@@ -25697,8 +25697,8 @@
         </p:nvSpPr>
         <p:spPr>
           <a:xfrm>
-            <a:off x="4855057" y="1371600"/>
-            <a:ext cx="2481580" cy="377444"/>
+            <a:off x="4712817" y="1371600"/>
+            <a:ext cx="2766060" cy="377444"/>
           </a:xfrm>
           <a:prstGeom prst="roundRect">
             <a:avLst/>
@@ -25750,8 +25750,8 @@
         </p:nvSpPr>
         <p:spPr>
           <a:xfrm>
-            <a:off x="731520" y="2579370"/>
-            <a:ext cx="27431" cy="457200"/>
+            <a:off x="731520" y="2023364"/>
+            <a:ext cx="27431" cy="1338072"/>
           </a:xfrm>
           <a:prstGeom prst="rect">
             <a:avLst/>
@@ -25832,7 +25832,7 @@
         <p:spPr>
           <a:xfrm>
             <a:off x="896112" y="2540000"/>
-            <a:ext cx="3289706" cy="1052576"/>
+            <a:ext cx="3289706" cy="821436"/>
           </a:xfrm>
           <a:prstGeom prst="rect">
             <a:avLst/>
@@ -25867,8 +25867,8 @@
         </p:nvSpPr>
         <p:spPr>
           <a:xfrm>
-            <a:off x="4368698" y="2579370"/>
-            <a:ext cx="27431" cy="457200"/>
+            <a:off x="4368698" y="2023364"/>
+            <a:ext cx="27431" cy="1338072"/>
           </a:xfrm>
           <a:prstGeom prst="rect">
             <a:avLst/>
@@ -25912,7 +25912,7 @@
         </p:nvSpPr>
         <p:spPr>
           <a:xfrm>
-            <a:off x="4533290" y="2138934"/>
+            <a:off x="4533290" y="2138933"/>
             <a:ext cx="3289706" cy="425196"/>
           </a:xfrm>
           <a:prstGeom prst="rect">
@@ -25948,8 +25948,8 @@
         </p:nvSpPr>
         <p:spPr>
           <a:xfrm>
-            <a:off x="4533290" y="2655570"/>
-            <a:ext cx="3289706" cy="821436"/>
+            <a:off x="4533290" y="2655569"/>
+            <a:ext cx="3289706" cy="590296"/>
           </a:xfrm>
           <a:prstGeom prst="rect">
             <a:avLst/>
@@ -25984,8 +25984,8 @@
         </p:nvSpPr>
         <p:spPr>
           <a:xfrm>
-            <a:off x="8005876" y="2579370"/>
-            <a:ext cx="27431" cy="457200"/>
+            <a:off x="8005876" y="2023364"/>
+            <a:ext cx="27431" cy="1338072"/>
           </a:xfrm>
           <a:prstGeom prst="rect">
             <a:avLst/>
@@ -26029,7 +26029,7 @@
         </p:nvSpPr>
         <p:spPr>
           <a:xfrm>
-            <a:off x="8170468" y="2138934"/>
+            <a:off x="8170468" y="2138933"/>
             <a:ext cx="3289706" cy="425196"/>
           </a:xfrm>
           <a:prstGeom prst="rect">
@@ -26065,8 +26065,8 @@
         </p:nvSpPr>
         <p:spPr>
           <a:xfrm>
-            <a:off x="8170468" y="2655570"/>
-            <a:ext cx="3289706" cy="821436"/>
+            <a:off x="8170468" y="2655569"/>
+            <a:ext cx="3289706" cy="590296"/>
           </a:xfrm>
           <a:prstGeom prst="rect">
             <a:avLst/>
@@ -26101,8 +26101,8 @@
         </p:nvSpPr>
         <p:spPr>
           <a:xfrm>
-            <a:off x="731520" y="3866896"/>
-            <a:ext cx="10728655" cy="722376"/>
+            <a:off x="731520" y="3635756"/>
+            <a:ext cx="10728655" cy="425196"/>
           </a:xfrm>
           <a:prstGeom prst="rect">
             <a:avLst/>
@@ -27576,8 +27576,8 @@
         </p:nvSpPr>
         <p:spPr>
           <a:xfrm>
-            <a:off x="2665577" y="1371600"/>
-            <a:ext cx="1465579" cy="377444"/>
+            <a:off x="2586837" y="1487170"/>
+            <a:ext cx="1623060" cy="377444"/>
           </a:xfrm>
           <a:prstGeom prst="roundRect">
             <a:avLst/>
@@ -27604,7 +27604,7 @@
           </a:fontRef>
         </p:style>
         <p:txBody>
-          <a:bodyPr rtlCol="0" anchor="ctr" wrap="square"/>
+          <a:bodyPr rtlCol="0" anchor="ctr" wrap="none"/>
           <a:lstStyle/>
           <a:p>
             <a:pPr algn="ctr">
@@ -27621,16 +27621,64 @@
           </a:p>
         </p:txBody>
       </p:sp>
+      <p:pic>
+        <p:nvPicPr>
+          <p:cNvPr id="6" name="Picture 5" descr="tmp_tcfotc0.png"/>
+          <p:cNvPicPr>
+            <a:picLocks noChangeAspect="1"/>
+          </p:cNvPicPr>
+          <p:nvPr/>
+        </p:nvPicPr>
+        <p:blipFill>
+          <a:blip r:embed="rId3"/>
+          <a:stretch>
+            <a:fillRect/>
+          </a:stretch>
+        </p:blipFill>
+        <p:spPr>
+          <a:xfrm>
+            <a:off x="2849727" y="2029206"/>
+            <a:ext cx="457200" cy="457200"/>
+          </a:xfrm>
+          <a:prstGeom prst="rect">
+            <a:avLst/>
+          </a:prstGeom>
+        </p:spPr>
+      </p:pic>
+      <p:pic>
+        <p:nvPicPr>
+          <p:cNvPr id="7" name="Picture 6" descr="tmpsjp_xq0v.png"/>
+          <p:cNvPicPr>
+            <a:picLocks noChangeAspect="1"/>
+          </p:cNvPicPr>
+          <p:nvPr/>
+        </p:nvPicPr>
+        <p:blipFill>
+          <a:blip r:embed="rId4"/>
+          <a:stretch>
+            <a:fillRect/>
+          </a:stretch>
+        </p:blipFill>
+        <p:spPr>
+          <a:xfrm>
+            <a:off x="3489807" y="2029206"/>
+            <a:ext cx="457200" cy="457200"/>
+          </a:xfrm>
+          <a:prstGeom prst="rect">
+            <a:avLst/>
+          </a:prstGeom>
+        </p:spPr>
+      </p:pic>
       <p:sp>
         <p:nvSpPr>
-          <p:cNvPr id="6" name="Rounded Rectangle 5"/>
+          <p:cNvPr id="8" name="Rounded Rectangle 7"/>
           <p:cNvSpPr/>
           <p:nvPr/>
         </p:nvSpPr>
         <p:spPr>
           <a:xfrm>
-            <a:off x="1131417" y="1913636"/>
-            <a:ext cx="1099820" cy="749808"/>
+            <a:off x="937107" y="2650998"/>
+            <a:ext cx="1299210" cy="749808"/>
           </a:xfrm>
           <a:prstGeom prst="roundRect">
             <a:avLst/>
@@ -27659,7 +27707,7 @@
           </a:fontRef>
         </p:style>
         <p:txBody>
-          <a:bodyPr rtlCol="0" anchor="ctr" wrap="square"/>
+          <a:bodyPr rtlCol="0" anchor="ctr" wrap="none"/>
           <a:lstStyle/>
           <a:p>
             <a:pPr algn="ctr">
@@ -27678,14 +27726,14 @@
       </p:sp>
       <p:cxnSp>
         <p:nvCxnSpPr>
-          <p:cNvPr id="7" name="Connector 6"/>
+          <p:cNvPr id="9" name="Connector 8"/>
           <p:cNvCxnSpPr/>
           <p:nvPr/>
         </p:nvCxnSpPr>
         <p:spPr>
           <a:xfrm>
-            <a:off x="2231237" y="2288540"/>
-            <a:ext cx="374904" cy="0"/>
+            <a:off x="2236317" y="3025902"/>
+            <a:ext cx="274320" cy="0"/>
           </a:xfrm>
           <a:prstGeom prst="line">
             <a:avLst/>
@@ -27714,14 +27762,14 @@
       </p:cxnSp>
       <p:sp>
         <p:nvSpPr>
-          <p:cNvPr id="8" name="Rounded Rectangle 7"/>
+          <p:cNvPr id="10" name="Rounded Rectangle 9"/>
           <p:cNvSpPr/>
           <p:nvPr/>
         </p:nvSpPr>
         <p:spPr>
           <a:xfrm>
-            <a:off x="2606141" y="1913636"/>
-            <a:ext cx="1100836" cy="749808"/>
+            <a:off x="2510637" y="2650998"/>
+            <a:ext cx="1318259" cy="749808"/>
           </a:xfrm>
           <a:prstGeom prst="roundRect">
             <a:avLst/>
@@ -27750,7 +27798,7 @@
           </a:fontRef>
         </p:style>
         <p:txBody>
-          <a:bodyPr rtlCol="0" anchor="ctr" wrap="square"/>
+          <a:bodyPr rtlCol="0" anchor="ctr" wrap="none"/>
           <a:lstStyle/>
           <a:p>
             <a:pPr algn="ctr">
@@ -27769,14 +27817,14 @@
       </p:sp>
       <p:cxnSp>
         <p:nvCxnSpPr>
-          <p:cNvPr id="9" name="Connector 8"/>
+          <p:cNvPr id="11" name="Connector 10"/>
           <p:cNvCxnSpPr/>
           <p:nvPr/>
         </p:nvCxnSpPr>
         <p:spPr>
           <a:xfrm>
-            <a:off x="3706977" y="2288540"/>
-            <a:ext cx="374904" cy="0"/>
+            <a:off x="3828897" y="3025902"/>
+            <a:ext cx="274320" cy="0"/>
           </a:xfrm>
           <a:prstGeom prst="line">
             <a:avLst/>
@@ -27805,14 +27853,14 @@
       </p:cxnSp>
       <p:sp>
         <p:nvSpPr>
-          <p:cNvPr id="10" name="Rounded Rectangle 9"/>
+          <p:cNvPr id="12" name="Rounded Rectangle 11"/>
           <p:cNvSpPr/>
           <p:nvPr/>
         </p:nvSpPr>
         <p:spPr>
           <a:xfrm>
-            <a:off x="4081881" y="1913636"/>
-            <a:ext cx="1583436" cy="749808"/>
+            <a:off x="4103217" y="2650998"/>
+            <a:ext cx="1756410" cy="749808"/>
           </a:xfrm>
           <a:prstGeom prst="roundRect">
             <a:avLst/>
@@ -27860,14 +27908,14 @@
       </p:sp>
       <p:sp>
         <p:nvSpPr>
-          <p:cNvPr id="11" name="Rectangle 10"/>
+          <p:cNvPr id="13" name="Rectangle 12"/>
           <p:cNvSpPr/>
           <p:nvPr/>
         </p:nvSpPr>
         <p:spPr>
           <a:xfrm>
-            <a:off x="883767" y="3152902"/>
-            <a:ext cx="27432" cy="457200"/>
+            <a:off x="883767" y="3565398"/>
+            <a:ext cx="27432" cy="875792"/>
           </a:xfrm>
           <a:prstGeom prst="rect">
             <a:avLst/>
@@ -27905,13 +27953,13 @@
       </p:sp>
       <p:sp>
         <p:nvSpPr>
-          <p:cNvPr id="12" name="TextBox 11"/>
+          <p:cNvPr id="14" name="TextBox 13"/>
           <p:cNvSpPr txBox="1"/>
           <p:nvPr/>
         </p:nvSpPr>
         <p:spPr>
           <a:xfrm>
-            <a:off x="1048359" y="2828036"/>
+            <a:off x="1048359" y="3565398"/>
             <a:ext cx="4864608" cy="425196"/>
           </a:xfrm>
           <a:prstGeom prst="rect">
@@ -27941,14 +27989,14 @@
       </p:sp>
       <p:sp>
         <p:nvSpPr>
-          <p:cNvPr id="13" name="TextBox 12"/>
+          <p:cNvPr id="15" name="TextBox 14"/>
           <p:cNvSpPr txBox="1"/>
           <p:nvPr/>
         </p:nvSpPr>
         <p:spPr>
           <a:xfrm>
-            <a:off x="1048359" y="3344672"/>
-            <a:ext cx="4864608" cy="590296"/>
+            <a:off x="1048359" y="4082034"/>
+            <a:ext cx="4864608" cy="359156"/>
           </a:xfrm>
           <a:prstGeom prst="rect">
             <a:avLst/>
@@ -27977,14 +28025,14 @@
       </p:sp>
       <p:sp>
         <p:nvSpPr>
-          <p:cNvPr id="14" name="Rounded Rectangle 13"/>
+          <p:cNvPr id="16" name="Rounded Rectangle 15"/>
           <p:cNvSpPr/>
           <p:nvPr/>
         </p:nvSpPr>
         <p:spPr>
           <a:xfrm>
-            <a:off x="7939887" y="1371600"/>
-            <a:ext cx="1706880" cy="377444"/>
+            <a:off x="7829397" y="1371600"/>
+            <a:ext cx="1927860" cy="377444"/>
           </a:xfrm>
           <a:prstGeom prst="roundRect">
             <a:avLst/>
@@ -28011,7 +28059,7 @@
           </a:fontRef>
         </p:style>
         <p:txBody>
-          <a:bodyPr rtlCol="0" anchor="ctr" wrap="square"/>
+          <a:bodyPr rtlCol="0" anchor="ctr" wrap="none"/>
           <a:lstStyle/>
           <a:p>
             <a:pPr algn="ctr">
@@ -28028,16 +28076,64 @@
           </a:p>
         </p:txBody>
       </p:sp>
+      <p:pic>
+        <p:nvPicPr>
+          <p:cNvPr id="17" name="Picture 16" descr="tmp_tcfotc0.png"/>
+          <p:cNvPicPr>
+            <a:picLocks noChangeAspect="1"/>
+          </p:cNvPicPr>
+          <p:nvPr/>
+        </p:nvPicPr>
+        <p:blipFill>
+          <a:blip r:embed="rId3"/>
+          <a:stretch>
+            <a:fillRect/>
+          </a:stretch>
+        </p:blipFill>
+        <p:spPr>
+          <a:xfrm>
+            <a:off x="8244687" y="1913636"/>
+            <a:ext cx="457200" cy="457200"/>
+          </a:xfrm>
+          <a:prstGeom prst="rect">
+            <a:avLst/>
+          </a:prstGeom>
+        </p:spPr>
+      </p:pic>
+      <p:pic>
+        <p:nvPicPr>
+          <p:cNvPr id="18" name="Picture 17" descr="tmpudbz1g83.png"/>
+          <p:cNvPicPr>
+            <a:picLocks noChangeAspect="1"/>
+          </p:cNvPicPr>
+          <p:nvPr/>
+        </p:nvPicPr>
+        <p:blipFill>
+          <a:blip r:embed="rId5"/>
+          <a:stretch>
+            <a:fillRect/>
+          </a:stretch>
+        </p:blipFill>
+        <p:spPr>
+          <a:xfrm>
+            <a:off x="8884767" y="1913636"/>
+            <a:ext cx="457200" cy="457200"/>
+          </a:xfrm>
+          <a:prstGeom prst="rect">
+            <a:avLst/>
+          </a:prstGeom>
+        </p:spPr>
+      </p:pic>
       <p:sp>
         <p:nvSpPr>
-          <p:cNvPr id="15" name="Rounded Rectangle 14"/>
+          <p:cNvPr id="19" name="Rounded Rectangle 18"/>
           <p:cNvSpPr/>
           <p:nvPr/>
         </p:nvSpPr>
         <p:spPr>
           <a:xfrm>
-            <a:off x="6278727" y="1913636"/>
-            <a:ext cx="1099820" cy="749808"/>
+            <a:off x="6278727" y="2535428"/>
+            <a:ext cx="1299210" cy="749808"/>
           </a:xfrm>
           <a:prstGeom prst="roundRect">
             <a:avLst/>
@@ -28066,7 +28162,7 @@
           </a:fontRef>
         </p:style>
         <p:txBody>
-          <a:bodyPr rtlCol="0" anchor="ctr" wrap="square"/>
+          <a:bodyPr rtlCol="0" anchor="ctr" wrap="none"/>
           <a:lstStyle/>
           <a:p>
             <a:pPr algn="ctr">
@@ -28085,13 +28181,13 @@
       </p:sp>
       <p:cxnSp>
         <p:nvCxnSpPr>
-          <p:cNvPr id="16" name="Connector 15"/>
+          <p:cNvPr id="20" name="Connector 19"/>
           <p:cNvCxnSpPr/>
           <p:nvPr/>
         </p:nvCxnSpPr>
         <p:spPr>
           <a:xfrm>
-            <a:off x="7378547" y="2288540"/>
+            <a:off x="7577937" y="2910332"/>
             <a:ext cx="274320" cy="0"/>
           </a:xfrm>
           <a:prstGeom prst="line">
@@ -28121,14 +28217,14 @@
       </p:cxnSp>
       <p:sp>
         <p:nvSpPr>
-          <p:cNvPr id="17" name="Rounded Rectangle 16"/>
+          <p:cNvPr id="21" name="Rounded Rectangle 20"/>
           <p:cNvSpPr/>
           <p:nvPr/>
         </p:nvSpPr>
         <p:spPr>
           <a:xfrm>
-            <a:off x="7652867" y="1913636"/>
-            <a:ext cx="1239520" cy="749808"/>
+            <a:off x="7852257" y="2535428"/>
+            <a:ext cx="1337310" cy="749808"/>
           </a:xfrm>
           <a:prstGeom prst="roundRect">
             <a:avLst/>
@@ -28157,7 +28253,7 @@
           </a:fontRef>
         </p:style>
         <p:txBody>
-          <a:bodyPr rtlCol="0" anchor="ctr" wrap="square"/>
+          <a:bodyPr rtlCol="0" anchor="ctr" wrap="none"/>
           <a:lstStyle/>
           <a:p>
             <a:pPr algn="ctr">
@@ -28176,13 +28272,13 @@
       </p:sp>
       <p:cxnSp>
         <p:nvCxnSpPr>
-          <p:cNvPr id="18" name="Connector 17"/>
+          <p:cNvPr id="22" name="Connector 21"/>
           <p:cNvCxnSpPr/>
           <p:nvPr/>
         </p:nvCxnSpPr>
         <p:spPr>
           <a:xfrm>
-            <a:off x="8892387" y="2288540"/>
+            <a:off x="9189567" y="2910332"/>
             <a:ext cx="274320" cy="0"/>
           </a:xfrm>
           <a:prstGeom prst="line">
@@ -28212,14 +28308,14 @@
       </p:cxnSp>
       <p:sp>
         <p:nvSpPr>
-          <p:cNvPr id="19" name="Rounded Rectangle 18"/>
+          <p:cNvPr id="23" name="Rounded Rectangle 22"/>
           <p:cNvSpPr/>
           <p:nvPr/>
         </p:nvSpPr>
         <p:spPr>
           <a:xfrm>
-            <a:off x="9166707" y="1913636"/>
-            <a:ext cx="756920" cy="749808"/>
+            <a:off x="9463887" y="2535428"/>
+            <a:ext cx="899160" cy="749808"/>
           </a:xfrm>
           <a:prstGeom prst="roundRect">
             <a:avLst/>
@@ -28248,7 +28344,7 @@
           </a:fontRef>
         </p:style>
         <p:txBody>
-          <a:bodyPr rtlCol="0" anchor="ctr" wrap="square"/>
+          <a:bodyPr rtlCol="0" anchor="ctr" wrap="none"/>
           <a:lstStyle/>
           <a:p>
             <a:pPr algn="ctr">
@@ -28267,13 +28363,13 @@
       </p:sp>
       <p:cxnSp>
         <p:nvCxnSpPr>
-          <p:cNvPr id="20" name="Connector 19"/>
+          <p:cNvPr id="24" name="Connector 23"/>
           <p:cNvCxnSpPr/>
           <p:nvPr/>
         </p:nvCxnSpPr>
         <p:spPr>
           <a:xfrm>
-            <a:off x="9923627" y="2288540"/>
+            <a:off x="10363047" y="2910332"/>
             <a:ext cx="274320" cy="0"/>
           </a:xfrm>
           <a:prstGeom prst="line">
@@ -28303,14 +28399,14 @@
       </p:cxnSp>
       <p:sp>
         <p:nvSpPr>
-          <p:cNvPr id="21" name="Rounded Rectangle 20"/>
+          <p:cNvPr id="25" name="Rounded Rectangle 24"/>
           <p:cNvSpPr/>
           <p:nvPr/>
         </p:nvSpPr>
         <p:spPr>
           <a:xfrm>
-            <a:off x="10197947" y="1913636"/>
-            <a:ext cx="1503934" cy="749808"/>
+            <a:off x="10637367" y="2535428"/>
+            <a:ext cx="1946909" cy="749808"/>
           </a:xfrm>
           <a:prstGeom prst="roundRect">
             <a:avLst/>
@@ -28358,14 +28454,14 @@
       </p:sp>
       <p:sp>
         <p:nvSpPr>
-          <p:cNvPr id="22" name="Rectangle 21"/>
+          <p:cNvPr id="26" name="Rectangle 25"/>
           <p:cNvSpPr/>
           <p:nvPr/>
         </p:nvSpPr>
         <p:spPr>
           <a:xfrm>
-            <a:off x="6278727" y="3152902"/>
-            <a:ext cx="27432" cy="457200"/>
+            <a:off x="6278727" y="3449828"/>
+            <a:ext cx="27432" cy="1106932"/>
           </a:xfrm>
           <a:prstGeom prst="rect">
             <a:avLst/>
@@ -28403,13 +28499,13 @@
       </p:sp>
       <p:sp>
         <p:nvSpPr>
-          <p:cNvPr id="23" name="TextBox 22"/>
+          <p:cNvPr id="27" name="TextBox 26"/>
           <p:cNvSpPr txBox="1"/>
           <p:nvPr/>
         </p:nvSpPr>
         <p:spPr>
           <a:xfrm>
-            <a:off x="6443319" y="2828036"/>
+            <a:off x="6443319" y="3449828"/>
             <a:ext cx="4864608" cy="425196"/>
           </a:xfrm>
           <a:prstGeom prst="rect">
@@ -28439,13 +28535,13 @@
       </p:sp>
       <p:sp>
         <p:nvSpPr>
-          <p:cNvPr id="24" name="TextBox 23"/>
+          <p:cNvPr id="28" name="TextBox 27"/>
           <p:cNvSpPr txBox="1"/>
           <p:nvPr/>
         </p:nvSpPr>
         <p:spPr>
           <a:xfrm>
-            <a:off x="6443319" y="3344672"/>
+            <a:off x="6443319" y="3966464"/>
             <a:ext cx="4864608" cy="590296"/>
           </a:xfrm>
           <a:prstGeom prst="rect">
@@ -28475,13 +28571,13 @@
       </p:sp>
       <p:sp>
         <p:nvSpPr>
-          <p:cNvPr id="25" name="TextBox 24"/>
+          <p:cNvPr id="29" name="TextBox 28"/>
           <p:cNvSpPr txBox="1"/>
           <p:nvPr/>
         </p:nvSpPr>
         <p:spPr>
           <a:xfrm>
-            <a:off x="731520" y="4190999"/>
+            <a:off x="731520" y="4812792"/>
             <a:ext cx="10728655" cy="425196"/>
           </a:xfrm>
           <a:prstGeom prst="rect">
@@ -28539,7 +28635,7 @@
                               </p:stCondLst>
                             </p:cTn>
                             <p:tgtEl>
-                              <p:spTgt spid="14"/>
+                              <p:spTgt spid="16"/>
                             </p:tgtEl>
                             <p:attrNameLst>
                               <p:attrName>style.visibility</p:attrName>
@@ -28566,7 +28662,7 @@
                               </p:stCondLst>
                             </p:cTn>
                             <p:tgtEl>
-                              <p:spTgt spid="6"/>
+                              <p:spTgt spid="17"/>
                             </p:tgtEl>
                             <p:attrNameLst>
                               <p:attrName>style.visibility</p:attrName>
@@ -28593,7 +28689,7 @@
                               </p:stCondLst>
                             </p:cTn>
                             <p:tgtEl>
-                              <p:spTgt spid="11"/>
+                              <p:spTgt spid="18"/>
                             </p:tgtEl>
                             <p:attrNameLst>
                               <p:attrName>style.visibility</p:attrName>
@@ -28620,7 +28716,7 @@
                               </p:stCondLst>
                             </p:cTn>
                             <p:tgtEl>
-                              <p:spTgt spid="15"/>
+                              <p:spTgt spid="12"/>
                             </p:tgtEl>
                             <p:attrNameLst>
                               <p:attrName>style.visibility</p:attrName>
@@ -28647,7 +28743,7 @@
                               </p:stCondLst>
                             </p:cTn>
                             <p:tgtEl>
-                              <p:spTgt spid="9"/>
+                              <p:spTgt spid="19"/>
                             </p:tgtEl>
                             <p:attrNameLst>
                               <p:attrName>style.visibility</p:attrName>
@@ -28674,7 +28770,7 @@
                               </p:stCondLst>
                             </p:cTn>
                             <p:tgtEl>
-                              <p:spTgt spid="13"/>
+                              <p:spTgt spid="20"/>
                             </p:tgtEl>
                             <p:attrNameLst>
                               <p:attrName>style.visibility</p:attrName>
@@ -28701,7 +28797,7 @@
                               </p:stCondLst>
                             </p:cTn>
                             <p:tgtEl>
-                              <p:spTgt spid="16"/>
+                              <p:spTgt spid="21"/>
                             </p:tgtEl>
                             <p:attrNameLst>
                               <p:attrName>style.visibility</p:attrName>
@@ -28728,7 +28824,7 @@
                               </p:stCondLst>
                             </p:cTn>
                             <p:tgtEl>
-                              <p:spTgt spid="10"/>
+                              <p:spTgt spid="22"/>
                             </p:tgtEl>
                             <p:attrNameLst>
                               <p:attrName>style.visibility</p:attrName>
@@ -28755,7 +28851,7 @@
                               </p:stCondLst>
                             </p:cTn>
                             <p:tgtEl>
-                              <p:spTgt spid="17"/>
+                              <p:spTgt spid="23"/>
                             </p:tgtEl>
                             <p:attrNameLst>
                               <p:attrName>style.visibility</p:attrName>
@@ -28782,7 +28878,7 @@
                               </p:stCondLst>
                             </p:cTn>
                             <p:tgtEl>
-                              <p:spTgt spid="18"/>
+                              <p:spTgt spid="24"/>
                             </p:tgtEl>
                             <p:attrNameLst>
                               <p:attrName>style.visibility</p:attrName>
@@ -28809,7 +28905,7 @@
                               </p:stCondLst>
                             </p:cTn>
                             <p:tgtEl>
-                              <p:spTgt spid="19"/>
+                              <p:spTgt spid="8"/>
                             </p:tgtEl>
                             <p:attrNameLst>
                               <p:attrName>style.visibility</p:attrName>
@@ -28836,7 +28932,7 @@
                               </p:stCondLst>
                             </p:cTn>
                             <p:tgtEl>
-                              <p:spTgt spid="20"/>
+                              <p:spTgt spid="13"/>
                             </p:tgtEl>
                             <p:attrNameLst>
                               <p:attrName>style.visibility</p:attrName>
@@ -28863,7 +28959,7 @@
                               </p:stCondLst>
                             </p:cTn>
                             <p:tgtEl>
-                              <p:spTgt spid="21"/>
+                              <p:spTgt spid="25"/>
                             </p:tgtEl>
                             <p:attrNameLst>
                               <p:attrName>style.visibility</p:attrName>
@@ -28890,7 +28986,7 @@
                               </p:stCondLst>
                             </p:cTn>
                             <p:tgtEl>
-                              <p:spTgt spid="6"/>
+                              <p:spTgt spid="12"/>
                             </p:tgtEl>
                             <p:attrNameLst>
                               <p:attrName>style.visibility</p:attrName>
@@ -28917,7 +29013,7 @@
                               </p:stCondLst>
                             </p:cTn>
                             <p:tgtEl>
-                              <p:spTgt spid="11"/>
+                              <p:spTgt spid="19"/>
                             </p:tgtEl>
                             <p:attrNameLst>
                               <p:attrName>style.visibility</p:attrName>
@@ -28944,7 +29040,7 @@
                               </p:stCondLst>
                             </p:cTn>
                             <p:tgtEl>
-                              <p:spTgt spid="15"/>
+                              <p:spTgt spid="26"/>
                             </p:tgtEl>
                             <p:attrNameLst>
                               <p:attrName>style.visibility</p:attrName>
@@ -28971,7 +29067,7 @@
                               </p:stCondLst>
                             </p:cTn>
                             <p:tgtEl>
-                              <p:spTgt spid="22"/>
+                              <p:spTgt spid="20"/>
                             </p:tgtEl>
                             <p:attrNameLst>
                               <p:attrName>style.visibility</p:attrName>
@@ -28998,7 +29094,7 @@
                               </p:stCondLst>
                             </p:cTn>
                             <p:tgtEl>
-                              <p:spTgt spid="9"/>
+                              <p:spTgt spid="27"/>
                             </p:tgtEl>
                             <p:attrNameLst>
                               <p:attrName>style.visibility</p:attrName>
@@ -29025,7 +29121,7 @@
                               </p:stCondLst>
                             </p:cTn>
                             <p:tgtEl>
-                              <p:spTgt spid="13"/>
+                              <p:spTgt spid="22"/>
                             </p:tgtEl>
                             <p:attrNameLst>
                               <p:attrName>style.visibility</p:attrName>
@@ -29052,7 +29148,7 @@
                               </p:stCondLst>
                             </p:cTn>
                             <p:tgtEl>
-                              <p:spTgt spid="16"/>
+                              <p:spTgt spid="28"/>
                             </p:tgtEl>
                             <p:attrNameLst>
                               <p:attrName>style.visibility</p:attrName>
@@ -29079,88 +29175,7 @@
                               </p:stCondLst>
                             </p:cTn>
                             <p:tgtEl>
-                              <p:spTgt spid="23"/>
-                            </p:tgtEl>
-                            <p:attrNameLst>
-                              <p:attrName>style.visibility</p:attrName>
-                            </p:attrNameLst>
-                          </p:cBhvr>
-                          <p:to>
-                            <p:strVal val="hidden"/>
-                          </p:to>
-                        </p:set>
-                      </p:childTnLst>
-                    </p:cTn>
-                  </p:par>
-                  <p:par>
-                    <p:cTn id="46" fill="hold">
-                      <p:stCondLst>
-                        <p:cond delay="0"/>
-                      </p:stCondLst>
-                      <p:childTnLst>
-                        <p:set>
-                          <p:cBhvr>
-                            <p:cTn id="47" dur="1" fill="hold">
-                              <p:stCondLst>
-                                <p:cond delay="0"/>
-                              </p:stCondLst>
-                            </p:cTn>
-                            <p:tgtEl>
-                              <p:spTgt spid="18"/>
-                            </p:tgtEl>
-                            <p:attrNameLst>
-                              <p:attrName>style.visibility</p:attrName>
-                            </p:attrNameLst>
-                          </p:cBhvr>
-                          <p:to>
-                            <p:strVal val="hidden"/>
-                          </p:to>
-                        </p:set>
-                      </p:childTnLst>
-                    </p:cTn>
-                  </p:par>
-                  <p:par>
-                    <p:cTn id="48" fill="hold">
-                      <p:stCondLst>
-                        <p:cond delay="0"/>
-                      </p:stCondLst>
-                      <p:childTnLst>
-                        <p:set>
-                          <p:cBhvr>
-                            <p:cTn id="49" dur="1" fill="hold">
-                              <p:stCondLst>
-                                <p:cond delay="0"/>
-                              </p:stCondLst>
-                            </p:cTn>
-                            <p:tgtEl>
-                              <p:spTgt spid="24"/>
-                            </p:tgtEl>
-                            <p:attrNameLst>
-                              <p:attrName>style.visibility</p:attrName>
-                            </p:attrNameLst>
-                          </p:cBhvr>
-                          <p:to>
-                            <p:strVal val="hidden"/>
-                          </p:to>
-                        </p:set>
-                      </p:childTnLst>
-                    </p:cTn>
-                  </p:par>
-                  <p:par>
-                    <p:cTn id="50" fill="hold">
-                      <p:stCondLst>
-                        <p:cond delay="0"/>
-                      </p:stCondLst>
-                      <p:childTnLst>
-                        <p:set>
-                          <p:cBhvr>
-                            <p:cTn id="51" dur="1" fill="hold">
-                              <p:stCondLst>
-                                <p:cond delay="0"/>
-                              </p:stCondLst>
-                            </p:cTn>
-                            <p:tgtEl>
-                              <p:spTgt spid="25"/>
+                              <p:spTgt spid="29"/>
                             </p:tgtEl>
                             <p:attrNameLst>
                               <p:attrName>style.visibility</p:attrName>
@@ -29177,31 +29192,101 @@
               </p:cTn>
             </p:par>
             <p:seq concurrent="1" nextAc="seek">
-              <p:cTn id="52" dur="indefinite" nodeType="mainSeq">
+              <p:cTn id="46" dur="indefinite" nodeType="mainSeq">
                 <p:childTnLst>
                   <p:par>
-                    <p:cTn id="53" fill="hold">
+                    <p:cTn id="47" fill="hold">
                       <p:stCondLst>
                         <p:cond delay="indefinite"/>
                       </p:stCondLst>
                       <p:childTnLst>
                         <p:par>
-                          <p:cTn id="54" fill="hold">
+                          <p:cTn id="48" fill="hold">
                             <p:stCondLst>
                               <p:cond delay="0"/>
                             </p:stCondLst>
                             <p:childTnLst>
                               <p:par>
-                                <p:cTn id="55" presetID="10" presetClass="entr" presetSubtype="0" fill="hold" grpId="0" nodeType="clickEffect">
+                                <p:cTn id="49" presetID="10" presetClass="entr" presetSubtype="0" fill="hold" grpId="0" nodeType="clickEffect">
                                   <p:stCondLst>
                                     <p:cond delay="0"/>
                                   </p:stCondLst>
                                   <p:childTnLst>
                                     <p:animEffect transition="in" filter="fade">
                                       <p:cBhvr>
+                                        <p:cTn id="50" dur="500"/>
+                                        <p:tgtEl>
+                                          <p:spTgt spid="5"/>
+                                        </p:tgtEl>
+                                      </p:cBhvr>
+                                    </p:animEffect>
+                                    <p:set>
+                                      <p:cBhvr>
+                                        <p:cTn id="51" dur="1" fill="hold">
+                                          <p:stCondLst>
+                                            <p:cond delay="0"/>
+                                          </p:stCondLst>
+                                        </p:cTn>
+                                        <p:tgtEl>
+                                          <p:spTgt spid="5"/>
+                                        </p:tgtEl>
+                                        <p:attrNameLst>
+                                          <p:attrName>style.visibility</p:attrName>
+                                        </p:attrNameLst>
+                                      </p:cBhvr>
+                                      <p:to>
+                                        <p:strVal val="visible"/>
+                                      </p:to>
+                                    </p:set>
+                                  </p:childTnLst>
+                                </p:cTn>
+                              </p:par>
+                              <p:par>
+                                <p:cTn id="52" presetID="10" presetClass="entr" presetSubtype="0" fill="hold" grpId="0" nodeType="withEffect">
+                                  <p:stCondLst>
+                                    <p:cond delay="0"/>
+                                  </p:stCondLst>
+                                  <p:childTnLst>
+                                    <p:animEffect transition="in" filter="fade">
+                                      <p:cBhvr>
+                                        <p:cTn id="53" dur="500"/>
+                                        <p:tgtEl>
+                                          <p:spTgt spid="6"/>
+                                        </p:tgtEl>
+                                      </p:cBhvr>
+                                    </p:animEffect>
+                                    <p:set>
+                                      <p:cBhvr>
+                                        <p:cTn id="54" dur="1" fill="hold">
+                                          <p:stCondLst>
+                                            <p:cond delay="0"/>
+                                          </p:stCondLst>
+                                        </p:cTn>
+                                        <p:tgtEl>
+                                          <p:spTgt spid="6"/>
+                                        </p:tgtEl>
+                                        <p:attrNameLst>
+                                          <p:attrName>style.visibility</p:attrName>
+                                        </p:attrNameLst>
+                                      </p:cBhvr>
+                                      <p:to>
+                                        <p:strVal val="visible"/>
+                                      </p:to>
+                                    </p:set>
+                                  </p:childTnLst>
+                                </p:cTn>
+                              </p:par>
+                              <p:par>
+                                <p:cTn id="55" presetID="10" presetClass="entr" presetSubtype="0" fill="hold" grpId="0" nodeType="withEffect">
+                                  <p:stCondLst>
+                                    <p:cond delay="0"/>
+                                  </p:stCondLst>
+                                  <p:childTnLst>
+                                    <p:animEffect transition="in" filter="fade">
+                                      <p:cBhvr>
                                         <p:cTn id="56" dur="500"/>
                                         <p:tgtEl>
-                                          <p:spTgt spid="5"/>
+                                          <p:spTgt spid="7"/>
                                         </p:tgtEl>
                                       </p:cBhvr>
                                     </p:animEffect>
@@ -29213,7 +29298,7 @@
                                           </p:stCondLst>
                                         </p:cTn>
                                         <p:tgtEl>
-                                          <p:spTgt spid="5"/>
+                                          <p:spTgt spid="7"/>
                                         </p:tgtEl>
                                         <p:attrNameLst>
                                           <p:attrName>style.visibility</p:attrName>
@@ -29236,7 +29321,7 @@
                                       <p:cBhvr>
                                         <p:cTn id="59" dur="500"/>
                                         <p:tgtEl>
-                                          <p:spTgt spid="6"/>
+                                          <p:spTgt spid="8"/>
                                         </p:tgtEl>
                                       </p:cBhvr>
                                     </p:animEffect>
@@ -29248,7 +29333,7 @@
                                           </p:stCondLst>
                                         </p:cTn>
                                         <p:tgtEl>
-                                          <p:spTgt spid="6"/>
+                                          <p:spTgt spid="8"/>
                                         </p:tgtEl>
                                         <p:attrNameLst>
                                           <p:attrName>style.visibility</p:attrName>
@@ -29271,7 +29356,7 @@
                                       <p:cBhvr>
                                         <p:cTn id="62" dur="500"/>
                                         <p:tgtEl>
-                                          <p:spTgt spid="7"/>
+                                          <p:spTgt spid="9"/>
                                         </p:tgtEl>
                                       </p:cBhvr>
                                     </p:animEffect>
@@ -29283,7 +29368,7 @@
                                           </p:stCondLst>
                                         </p:cTn>
                                         <p:tgtEl>
-                                          <p:spTgt spid="7"/>
+                                          <p:spTgt spid="9"/>
                                         </p:tgtEl>
                                         <p:attrNameLst>
                                           <p:attrName>style.visibility</p:attrName>
@@ -29306,7 +29391,7 @@
                                       <p:cBhvr>
                                         <p:cTn id="65" dur="500"/>
                                         <p:tgtEl>
-                                          <p:spTgt spid="8"/>
+                                          <p:spTgt spid="10"/>
                                         </p:tgtEl>
                                       </p:cBhvr>
                                     </p:animEffect>
@@ -29318,7 +29403,7 @@
                                           </p:stCondLst>
                                         </p:cTn>
                                         <p:tgtEl>
-                                          <p:spTgt spid="8"/>
+                                          <p:spTgt spid="10"/>
                                         </p:tgtEl>
                                         <p:attrNameLst>
                                           <p:attrName>style.visibility</p:attrName>
@@ -29341,7 +29426,7 @@
                                       <p:cBhvr>
                                         <p:cTn id="68" dur="500"/>
                                         <p:tgtEl>
-                                          <p:spTgt spid="9"/>
+                                          <p:spTgt spid="11"/>
                                         </p:tgtEl>
                                       </p:cBhvr>
                                     </p:animEffect>
@@ -29353,7 +29438,7 @@
                                           </p:stCondLst>
                                         </p:cTn>
                                         <p:tgtEl>
-                                          <p:spTgt spid="9"/>
+                                          <p:spTgt spid="11"/>
                                         </p:tgtEl>
                                         <p:attrNameLst>
                                           <p:attrName>style.visibility</p:attrName>
@@ -29376,7 +29461,7 @@
                                       <p:cBhvr>
                                         <p:cTn id="71" dur="500"/>
                                         <p:tgtEl>
-                                          <p:spTgt spid="10"/>
+                                          <p:spTgt spid="12"/>
                                         </p:tgtEl>
                                       </p:cBhvr>
                                     </p:animEffect>
@@ -29388,7 +29473,7 @@
                                           </p:stCondLst>
                                         </p:cTn>
                                         <p:tgtEl>
-                                          <p:spTgt spid="10"/>
+                                          <p:spTgt spid="12"/>
                                         </p:tgtEl>
                                         <p:attrNameLst>
                                           <p:attrName>style.visibility</p:attrName>
@@ -29411,7 +29496,7 @@
                                       <p:cBhvr>
                                         <p:cTn id="74" dur="500"/>
                                         <p:tgtEl>
-                                          <p:spTgt spid="6"/>
+                                          <p:spTgt spid="8"/>
                                         </p:tgtEl>
                                       </p:cBhvr>
                                     </p:animEffect>
@@ -29423,7 +29508,7 @@
                                           </p:stCondLst>
                                         </p:cTn>
                                         <p:tgtEl>
-                                          <p:spTgt spid="6"/>
+                                          <p:spTgt spid="8"/>
                                         </p:tgtEl>
                                         <p:attrNameLst>
                                           <p:attrName>style.visibility</p:attrName>
@@ -29446,7 +29531,7 @@
                                       <p:cBhvr>
                                         <p:cTn id="77" dur="500"/>
                                         <p:tgtEl>
-                                          <p:spTgt spid="11"/>
+                                          <p:spTgt spid="13"/>
                                         </p:tgtEl>
                                       </p:cBhvr>
                                     </p:animEffect>
@@ -29458,7 +29543,7 @@
                                           </p:stCondLst>
                                         </p:cTn>
                                         <p:tgtEl>
-                                          <p:spTgt spid="11"/>
+                                          <p:spTgt spid="13"/>
                                         </p:tgtEl>
                                         <p:attrNameLst>
                                           <p:attrName>style.visibility</p:attrName>
@@ -29481,7 +29566,7 @@
                                       <p:cBhvr>
                                         <p:cTn id="80" dur="500"/>
                                         <p:tgtEl>
-                                          <p:spTgt spid="7"/>
+                                          <p:spTgt spid="9"/>
                                         </p:tgtEl>
                                       </p:cBhvr>
                                     </p:animEffect>
@@ -29493,7 +29578,7 @@
                                           </p:stCondLst>
                                         </p:cTn>
                                         <p:tgtEl>
-                                          <p:spTgt spid="7"/>
+                                          <p:spTgt spid="9"/>
                                         </p:tgtEl>
                                         <p:attrNameLst>
                                           <p:attrName>style.visibility</p:attrName>
@@ -29516,7 +29601,7 @@
                                       <p:cBhvr>
                                         <p:cTn id="83" dur="500"/>
                                         <p:tgtEl>
-                                          <p:spTgt spid="12"/>
+                                          <p:spTgt spid="14"/>
                                         </p:tgtEl>
                                       </p:cBhvr>
                                     </p:animEffect>
@@ -29528,7 +29613,7 @@
                                           </p:stCondLst>
                                         </p:cTn>
                                         <p:tgtEl>
-                                          <p:spTgt spid="12"/>
+                                          <p:spTgt spid="14"/>
                                         </p:tgtEl>
                                         <p:attrNameLst>
                                           <p:attrName>style.visibility</p:attrName>
@@ -29551,7 +29636,7 @@
                                       <p:cBhvr>
                                         <p:cTn id="86" dur="500"/>
                                         <p:tgtEl>
-                                          <p:spTgt spid="9"/>
+                                          <p:spTgt spid="11"/>
                                         </p:tgtEl>
                                       </p:cBhvr>
                                     </p:animEffect>
@@ -29563,7 +29648,7 @@
                                           </p:stCondLst>
                                         </p:cTn>
                                         <p:tgtEl>
-                                          <p:spTgt spid="9"/>
+                                          <p:spTgt spid="11"/>
                                         </p:tgtEl>
                                         <p:attrNameLst>
                                           <p:attrName>style.visibility</p:attrName>
@@ -29586,7 +29671,7 @@
                                       <p:cBhvr>
                                         <p:cTn id="89" dur="500"/>
                                         <p:tgtEl>
-                                          <p:spTgt spid="13"/>
+                                          <p:spTgt spid="15"/>
                                         </p:tgtEl>
                                       </p:cBhvr>
                                     </p:animEffect>
@@ -29598,7 +29683,7 @@
                                           </p:stCondLst>
                                         </p:cTn>
                                         <p:tgtEl>
-                                          <p:spTgt spid="13"/>
+                                          <p:spTgt spid="15"/>
                                         </p:tgtEl>
                                         <p:attrNameLst>
                                           <p:attrName>style.visibility</p:attrName>
@@ -29639,7 +29724,7 @@
                                       <p:cBhvr>
                                         <p:cTn id="94" dur="500"/>
                                         <p:tgtEl>
-                                          <p:spTgt spid="14"/>
+                                          <p:spTgt spid="16"/>
                                         </p:tgtEl>
                                       </p:cBhvr>
                                     </p:animEffect>
@@ -29651,7 +29736,7 @@
                                           </p:stCondLst>
                                         </p:cTn>
                                         <p:tgtEl>
-                                          <p:spTgt spid="14"/>
+                                          <p:spTgt spid="16"/>
                                         </p:tgtEl>
                                         <p:attrNameLst>
                                           <p:attrName>style.visibility</p:attrName>
@@ -29674,7 +29759,7 @@
                                       <p:cBhvr>
                                         <p:cTn id="97" dur="500"/>
                                         <p:tgtEl>
-                                          <p:spTgt spid="6"/>
+                                          <p:spTgt spid="17"/>
                                         </p:tgtEl>
                                       </p:cBhvr>
                                     </p:animEffect>
@@ -29686,7 +29771,7 @@
                                           </p:stCondLst>
                                         </p:cTn>
                                         <p:tgtEl>
-                                          <p:spTgt spid="6"/>
+                                          <p:spTgt spid="17"/>
                                         </p:tgtEl>
                                         <p:attrNameLst>
                                           <p:attrName>style.visibility</p:attrName>
@@ -29709,7 +29794,7 @@
                                       <p:cBhvr>
                                         <p:cTn id="100" dur="500"/>
                                         <p:tgtEl>
-                                          <p:spTgt spid="11"/>
+                                          <p:spTgt spid="18"/>
                                         </p:tgtEl>
                                       </p:cBhvr>
                                     </p:animEffect>
@@ -29721,7 +29806,7 @@
                                           </p:stCondLst>
                                         </p:cTn>
                                         <p:tgtEl>
-                                          <p:spTgt spid="11"/>
+                                          <p:spTgt spid="18"/>
                                         </p:tgtEl>
                                         <p:attrNameLst>
                                           <p:attrName>style.visibility</p:attrName>
@@ -29744,7 +29829,7 @@
                                       <p:cBhvr>
                                         <p:cTn id="103" dur="500"/>
                                         <p:tgtEl>
-                                          <p:spTgt spid="15"/>
+                                          <p:spTgt spid="12"/>
                                         </p:tgtEl>
                                       </p:cBhvr>
                                     </p:animEffect>
@@ -29756,7 +29841,7 @@
                                           </p:stCondLst>
                                         </p:cTn>
                                         <p:tgtEl>
-                                          <p:spTgt spid="15"/>
+                                          <p:spTgt spid="12"/>
                                         </p:tgtEl>
                                         <p:attrNameLst>
                                           <p:attrName>style.visibility</p:attrName>
@@ -29779,7 +29864,7 @@
                                       <p:cBhvr>
                                         <p:cTn id="106" dur="500"/>
                                         <p:tgtEl>
-                                          <p:spTgt spid="9"/>
+                                          <p:spTgt spid="19"/>
                                         </p:tgtEl>
                                       </p:cBhvr>
                                     </p:animEffect>
@@ -29791,7 +29876,7 @@
                                           </p:stCondLst>
                                         </p:cTn>
                                         <p:tgtEl>
-                                          <p:spTgt spid="9"/>
+                                          <p:spTgt spid="19"/>
                                         </p:tgtEl>
                                         <p:attrNameLst>
                                           <p:attrName>style.visibility</p:attrName>
@@ -29814,7 +29899,7 @@
                                       <p:cBhvr>
                                         <p:cTn id="109" dur="500"/>
                                         <p:tgtEl>
-                                          <p:spTgt spid="13"/>
+                                          <p:spTgt spid="20"/>
                                         </p:tgtEl>
                                       </p:cBhvr>
                                     </p:animEffect>
@@ -29826,7 +29911,7 @@
                                           </p:stCondLst>
                                         </p:cTn>
                                         <p:tgtEl>
-                                          <p:spTgt spid="13"/>
+                                          <p:spTgt spid="20"/>
                                         </p:tgtEl>
                                         <p:attrNameLst>
                                           <p:attrName>style.visibility</p:attrName>
@@ -29849,7 +29934,7 @@
                                       <p:cBhvr>
                                         <p:cTn id="112" dur="500"/>
                                         <p:tgtEl>
-                                          <p:spTgt spid="16"/>
+                                          <p:spTgt spid="21"/>
                                         </p:tgtEl>
                                       </p:cBhvr>
                                     </p:animEffect>
@@ -29861,7 +29946,7 @@
                                           </p:stCondLst>
                                         </p:cTn>
                                         <p:tgtEl>
-                                          <p:spTgt spid="16"/>
+                                          <p:spTgt spid="21"/>
                                         </p:tgtEl>
                                         <p:attrNameLst>
                                           <p:attrName>style.visibility</p:attrName>
@@ -29884,7 +29969,7 @@
                                       <p:cBhvr>
                                         <p:cTn id="115" dur="500"/>
                                         <p:tgtEl>
-                                          <p:spTgt spid="10"/>
+                                          <p:spTgt spid="22"/>
                                         </p:tgtEl>
                                       </p:cBhvr>
                                     </p:animEffect>
@@ -29896,7 +29981,7 @@
                                           </p:stCondLst>
                                         </p:cTn>
                                         <p:tgtEl>
-                                          <p:spTgt spid="10"/>
+                                          <p:spTgt spid="22"/>
                                         </p:tgtEl>
                                         <p:attrNameLst>
                                           <p:attrName>style.visibility</p:attrName>
@@ -29919,7 +30004,7 @@
                                       <p:cBhvr>
                                         <p:cTn id="118" dur="500"/>
                                         <p:tgtEl>
-                                          <p:spTgt spid="17"/>
+                                          <p:spTgt spid="23"/>
                                         </p:tgtEl>
                                       </p:cBhvr>
                                     </p:animEffect>
@@ -29931,7 +30016,7 @@
                                           </p:stCondLst>
                                         </p:cTn>
                                         <p:tgtEl>
-                                          <p:spTgt spid="17"/>
+                                          <p:spTgt spid="23"/>
                                         </p:tgtEl>
                                         <p:attrNameLst>
                                           <p:attrName>style.visibility</p:attrName>
@@ -29954,7 +30039,7 @@
                                       <p:cBhvr>
                                         <p:cTn id="121" dur="500"/>
                                         <p:tgtEl>
-                                          <p:spTgt spid="18"/>
+                                          <p:spTgt spid="24"/>
                                         </p:tgtEl>
                                       </p:cBhvr>
                                     </p:animEffect>
@@ -29966,7 +30051,7 @@
                                           </p:stCondLst>
                                         </p:cTn>
                                         <p:tgtEl>
-                                          <p:spTgt spid="18"/>
+                                          <p:spTgt spid="24"/>
                                         </p:tgtEl>
                                         <p:attrNameLst>
                                           <p:attrName>style.visibility</p:attrName>
@@ -29989,7 +30074,7 @@
                                       <p:cBhvr>
                                         <p:cTn id="124" dur="500"/>
                                         <p:tgtEl>
-                                          <p:spTgt spid="19"/>
+                                          <p:spTgt spid="8"/>
                                         </p:tgtEl>
                                       </p:cBhvr>
                                     </p:animEffect>
@@ -30001,7 +30086,7 @@
                                           </p:stCondLst>
                                         </p:cTn>
                                         <p:tgtEl>
-                                          <p:spTgt spid="19"/>
+                                          <p:spTgt spid="8"/>
                                         </p:tgtEl>
                                         <p:attrNameLst>
                                           <p:attrName>style.visibility</p:attrName>
@@ -30024,7 +30109,7 @@
                                       <p:cBhvr>
                                         <p:cTn id="127" dur="500"/>
                                         <p:tgtEl>
-                                          <p:spTgt spid="20"/>
+                                          <p:spTgt spid="13"/>
                                         </p:tgtEl>
                                       </p:cBhvr>
                                     </p:animEffect>
@@ -30036,7 +30121,7 @@
                                           </p:stCondLst>
                                         </p:cTn>
                                         <p:tgtEl>
-                                          <p:spTgt spid="20"/>
+                                          <p:spTgt spid="13"/>
                                         </p:tgtEl>
                                         <p:attrNameLst>
                                           <p:attrName>style.visibility</p:attrName>
@@ -30059,7 +30144,7 @@
                                       <p:cBhvr>
                                         <p:cTn id="130" dur="500"/>
                                         <p:tgtEl>
-                                          <p:spTgt spid="21"/>
+                                          <p:spTgt spid="25"/>
                                         </p:tgtEl>
                                       </p:cBhvr>
                                     </p:animEffect>
@@ -30071,7 +30156,7 @@
                                           </p:stCondLst>
                                         </p:cTn>
                                         <p:tgtEl>
-                                          <p:spTgt spid="21"/>
+                                          <p:spTgt spid="25"/>
                                         </p:tgtEl>
                                         <p:attrNameLst>
                                           <p:attrName>style.visibility</p:attrName>
@@ -30094,7 +30179,7 @@
                                       <p:cBhvr>
                                         <p:cTn id="133" dur="500"/>
                                         <p:tgtEl>
-                                          <p:spTgt spid="6"/>
+                                          <p:spTgt spid="12"/>
                                         </p:tgtEl>
                                       </p:cBhvr>
                                     </p:animEffect>
@@ -30106,7 +30191,7 @@
                                           </p:stCondLst>
                                         </p:cTn>
                                         <p:tgtEl>
-                                          <p:spTgt spid="6"/>
+                                          <p:spTgt spid="12"/>
                                         </p:tgtEl>
                                         <p:attrNameLst>
                                           <p:attrName>style.visibility</p:attrName>
@@ -30129,7 +30214,7 @@
                                       <p:cBhvr>
                                         <p:cTn id="136" dur="500"/>
                                         <p:tgtEl>
-                                          <p:spTgt spid="11"/>
+                                          <p:spTgt spid="19"/>
                                         </p:tgtEl>
                                       </p:cBhvr>
                                     </p:animEffect>
@@ -30141,7 +30226,7 @@
                                           </p:stCondLst>
                                         </p:cTn>
                                         <p:tgtEl>
-                                          <p:spTgt spid="11"/>
+                                          <p:spTgt spid="19"/>
                                         </p:tgtEl>
                                         <p:attrNameLst>
                                           <p:attrName>style.visibility</p:attrName>
@@ -30164,7 +30249,7 @@
                                       <p:cBhvr>
                                         <p:cTn id="139" dur="500"/>
                                         <p:tgtEl>
-                                          <p:spTgt spid="15"/>
+                                          <p:spTgt spid="26"/>
                                         </p:tgtEl>
                                       </p:cBhvr>
                                     </p:animEffect>
@@ -30176,7 +30261,7 @@
                                           </p:stCondLst>
                                         </p:cTn>
                                         <p:tgtEl>
-                                          <p:spTgt spid="15"/>
+                                          <p:spTgt spid="26"/>
                                         </p:tgtEl>
                                         <p:attrNameLst>
                                           <p:attrName>style.visibility</p:attrName>
@@ -30199,7 +30284,7 @@
                                       <p:cBhvr>
                                         <p:cTn id="142" dur="500"/>
                                         <p:tgtEl>
-                                          <p:spTgt spid="22"/>
+                                          <p:spTgt spid="20"/>
                                         </p:tgtEl>
                                       </p:cBhvr>
                                     </p:animEffect>
@@ -30211,7 +30296,7 @@
                                           </p:stCondLst>
                                         </p:cTn>
                                         <p:tgtEl>
-                                          <p:spTgt spid="22"/>
+                                          <p:spTgt spid="20"/>
                                         </p:tgtEl>
                                         <p:attrNameLst>
                                           <p:attrName>style.visibility</p:attrName>
@@ -30234,7 +30319,7 @@
                                       <p:cBhvr>
                                         <p:cTn id="145" dur="500"/>
                                         <p:tgtEl>
-                                          <p:spTgt spid="9"/>
+                                          <p:spTgt spid="27"/>
                                         </p:tgtEl>
                                       </p:cBhvr>
                                     </p:animEffect>
@@ -30246,7 +30331,7 @@
                                           </p:stCondLst>
                                         </p:cTn>
                                         <p:tgtEl>
-                                          <p:spTgt spid="9"/>
+                                          <p:spTgt spid="27"/>
                                         </p:tgtEl>
                                         <p:attrNameLst>
                                           <p:attrName>style.visibility</p:attrName>
@@ -30269,7 +30354,7 @@
                                       <p:cBhvr>
                                         <p:cTn id="148" dur="500"/>
                                         <p:tgtEl>
-                                          <p:spTgt spid="13"/>
+                                          <p:spTgt spid="22"/>
                                         </p:tgtEl>
                                       </p:cBhvr>
                                     </p:animEffect>
@@ -30281,7 +30366,7 @@
                                           </p:stCondLst>
                                         </p:cTn>
                                         <p:tgtEl>
-                                          <p:spTgt spid="13"/>
+                                          <p:spTgt spid="22"/>
                                         </p:tgtEl>
                                         <p:attrNameLst>
                                           <p:attrName>style.visibility</p:attrName>
@@ -30304,7 +30389,7 @@
                                       <p:cBhvr>
                                         <p:cTn id="151" dur="500"/>
                                         <p:tgtEl>
-                                          <p:spTgt spid="16"/>
+                                          <p:spTgt spid="28"/>
                                         </p:tgtEl>
                                       </p:cBhvr>
                                     </p:animEffect>
@@ -30316,112 +30401,7 @@
                                           </p:stCondLst>
                                         </p:cTn>
                                         <p:tgtEl>
-                                          <p:spTgt spid="16"/>
-                                        </p:tgtEl>
-                                        <p:attrNameLst>
-                                          <p:attrName>style.visibility</p:attrName>
-                                        </p:attrNameLst>
-                                      </p:cBhvr>
-                                      <p:to>
-                                        <p:strVal val="visible"/>
-                                      </p:to>
-                                    </p:set>
-                                  </p:childTnLst>
-                                </p:cTn>
-                              </p:par>
-                              <p:par>
-                                <p:cTn id="153" presetID="10" presetClass="entr" presetSubtype="0" fill="hold" grpId="0" nodeType="withEffect">
-                                  <p:stCondLst>
-                                    <p:cond delay="0"/>
-                                  </p:stCondLst>
-                                  <p:childTnLst>
-                                    <p:animEffect transition="in" filter="fade">
-                                      <p:cBhvr>
-                                        <p:cTn id="154" dur="500"/>
-                                        <p:tgtEl>
-                                          <p:spTgt spid="23"/>
-                                        </p:tgtEl>
-                                      </p:cBhvr>
-                                    </p:animEffect>
-                                    <p:set>
-                                      <p:cBhvr>
-                                        <p:cTn id="155" dur="1" fill="hold">
-                                          <p:stCondLst>
-                                            <p:cond delay="0"/>
-                                          </p:stCondLst>
-                                        </p:cTn>
-                                        <p:tgtEl>
-                                          <p:spTgt spid="23"/>
-                                        </p:tgtEl>
-                                        <p:attrNameLst>
-                                          <p:attrName>style.visibility</p:attrName>
-                                        </p:attrNameLst>
-                                      </p:cBhvr>
-                                      <p:to>
-                                        <p:strVal val="visible"/>
-                                      </p:to>
-                                    </p:set>
-                                  </p:childTnLst>
-                                </p:cTn>
-                              </p:par>
-                              <p:par>
-                                <p:cTn id="156" presetID="10" presetClass="entr" presetSubtype="0" fill="hold" grpId="0" nodeType="withEffect">
-                                  <p:stCondLst>
-                                    <p:cond delay="0"/>
-                                  </p:stCondLst>
-                                  <p:childTnLst>
-                                    <p:animEffect transition="in" filter="fade">
-                                      <p:cBhvr>
-                                        <p:cTn id="157" dur="500"/>
-                                        <p:tgtEl>
-                                          <p:spTgt spid="18"/>
-                                        </p:tgtEl>
-                                      </p:cBhvr>
-                                    </p:animEffect>
-                                    <p:set>
-                                      <p:cBhvr>
-                                        <p:cTn id="158" dur="1" fill="hold">
-                                          <p:stCondLst>
-                                            <p:cond delay="0"/>
-                                          </p:stCondLst>
-                                        </p:cTn>
-                                        <p:tgtEl>
-                                          <p:spTgt spid="18"/>
-                                        </p:tgtEl>
-                                        <p:attrNameLst>
-                                          <p:attrName>style.visibility</p:attrName>
-                                        </p:attrNameLst>
-                                      </p:cBhvr>
-                                      <p:to>
-                                        <p:strVal val="visible"/>
-                                      </p:to>
-                                    </p:set>
-                                  </p:childTnLst>
-                                </p:cTn>
-                              </p:par>
-                              <p:par>
-                                <p:cTn id="159" presetID="10" presetClass="entr" presetSubtype="0" fill="hold" grpId="0" nodeType="withEffect">
-                                  <p:stCondLst>
-                                    <p:cond delay="0"/>
-                                  </p:stCondLst>
-                                  <p:childTnLst>
-                                    <p:animEffect transition="in" filter="fade">
-                                      <p:cBhvr>
-                                        <p:cTn id="160" dur="500"/>
-                                        <p:tgtEl>
-                                          <p:spTgt spid="24"/>
-                                        </p:tgtEl>
-                                      </p:cBhvr>
-                                    </p:animEffect>
-                                    <p:set>
-                                      <p:cBhvr>
-                                        <p:cTn id="161" dur="1" fill="hold">
-                                          <p:stCondLst>
-                                            <p:cond delay="0"/>
-                                          </p:stCondLst>
-                                        </p:cTn>
-                                        <p:tgtEl>
-                                          <p:spTgt spid="24"/>
+                                          <p:spTgt spid="28"/>
                                         </p:tgtEl>
                                         <p:attrNameLst>
                                           <p:attrName>style.visibility</p:attrName>
@@ -30441,40 +30421,40 @@
                     </p:cTn>
                   </p:par>
                   <p:par>
-                    <p:cTn id="162" fill="hold">
+                    <p:cTn id="153" fill="hold">
                       <p:stCondLst>
                         <p:cond delay="indefinite"/>
                       </p:stCondLst>
                       <p:childTnLst>
                         <p:par>
-                          <p:cTn id="163" fill="hold">
+                          <p:cTn id="154" fill="hold">
                             <p:stCondLst>
                               <p:cond delay="0"/>
                             </p:stCondLst>
                             <p:childTnLst>
                               <p:par>
-                                <p:cTn id="164" presetID="10" presetClass="entr" presetSubtype="0" fill="hold" grpId="0" nodeType="clickEffect">
+                                <p:cTn id="155" presetID="10" presetClass="entr" presetSubtype="0" fill="hold" grpId="0" nodeType="clickEffect">
                                   <p:stCondLst>
                                     <p:cond delay="0"/>
                                   </p:stCondLst>
                                   <p:childTnLst>
                                     <p:animEffect transition="in" filter="fade">
                                       <p:cBhvr>
-                                        <p:cTn id="165" dur="500"/>
-                                        <p:tgtEl>
-                                          <p:spTgt spid="25"/>
+                                        <p:cTn id="156" dur="500"/>
+                                        <p:tgtEl>
+                                          <p:spTgt spid="29"/>
                                         </p:tgtEl>
                                       </p:cBhvr>
                                     </p:animEffect>
                                     <p:set>
                                       <p:cBhvr>
-                                        <p:cTn id="166" dur="1" fill="hold">
+                                        <p:cTn id="157" dur="1" fill="hold">
                                           <p:stCondLst>
                                             <p:cond delay="0"/>
                                           </p:stCondLst>
                                         </p:cTn>
                                         <p:tgtEl>
-                                          <p:spTgt spid="25"/>
+                                          <p:spTgt spid="29"/>
                                         </p:tgtEl>
                                         <p:attrNameLst>
                                           <p:attrName>style.visibility</p:attrName>
@@ -30581,7 +30561,7 @@
         <p:spPr>
           <a:xfrm>
             <a:off x="731520" y="2104644"/>
-            <a:ext cx="10728655" cy="722376"/>
+            <a:ext cx="10728655" cy="425195"/>
           </a:xfrm>
           <a:prstGeom prst="rect">
             <a:avLst/>
@@ -30616,7 +30596,7 @@
         </p:nvSpPr>
         <p:spPr>
           <a:xfrm>
-            <a:off x="952347" y="3211068"/>
+            <a:off x="952347" y="2913888"/>
             <a:ext cx="3154680" cy="623316"/>
           </a:xfrm>
           <a:prstGeom prst="rect">
@@ -30652,8 +30632,8 @@
         </p:nvSpPr>
         <p:spPr>
           <a:xfrm>
-            <a:off x="952347" y="3907536"/>
-            <a:ext cx="3154680" cy="722376"/>
+            <a:off x="952347" y="3610356"/>
+            <a:ext cx="3154680" cy="425196"/>
           </a:xfrm>
           <a:prstGeom prst="rect">
             <a:avLst/>
@@ -30688,7 +30668,7 @@
         </p:nvSpPr>
         <p:spPr>
           <a:xfrm>
-            <a:off x="4518507" y="3211068"/>
+            <a:off x="4518507" y="2913888"/>
             <a:ext cx="3154680" cy="623316"/>
           </a:xfrm>
           <a:prstGeom prst="rect">
@@ -30724,8 +30704,8 @@
         </p:nvSpPr>
         <p:spPr>
           <a:xfrm>
-            <a:off x="4518507" y="3907536"/>
-            <a:ext cx="3154680" cy="722376"/>
+            <a:off x="4518507" y="3610356"/>
+            <a:ext cx="3154680" cy="425196"/>
           </a:xfrm>
           <a:prstGeom prst="rect">
             <a:avLst/>
@@ -30760,7 +30740,7 @@
         </p:nvSpPr>
         <p:spPr>
           <a:xfrm>
-            <a:off x="8084667" y="3211068"/>
+            <a:off x="8084667" y="2913888"/>
             <a:ext cx="3154680" cy="623316"/>
           </a:xfrm>
           <a:prstGeom prst="rect">
@@ -30796,8 +30776,8 @@
         </p:nvSpPr>
         <p:spPr>
           <a:xfrm>
-            <a:off x="8084667" y="3907536"/>
-            <a:ext cx="3154680" cy="722376"/>
+            <a:off x="8084667" y="3610356"/>
+            <a:ext cx="3154680" cy="425196"/>
           </a:xfrm>
           <a:prstGeom prst="rect">
             <a:avLst/>
@@ -30832,7 +30812,7 @@
         </p:nvSpPr>
         <p:spPr>
           <a:xfrm>
-            <a:off x="731520" y="5013960"/>
+            <a:off x="731520" y="4419600"/>
             <a:ext cx="10728655" cy="491236"/>
           </a:xfrm>
           <a:prstGeom prst="rect">
@@ -31598,8 +31578,8 @@
         </p:nvSpPr>
         <p:spPr>
           <a:xfrm>
-            <a:off x="731520" y="1580896"/>
-            <a:ext cx="27431" cy="457200"/>
+            <a:off x="731520" y="1371600"/>
+            <a:ext cx="27431" cy="875792"/>
           </a:xfrm>
           <a:prstGeom prst="rect">
             <a:avLst/>
@@ -31715,8 +31695,8 @@
         </p:nvSpPr>
         <p:spPr>
           <a:xfrm>
-            <a:off x="4247997" y="2466848"/>
-            <a:ext cx="756920" cy="749808"/>
+            <a:off x="4063212" y="2466848"/>
+            <a:ext cx="899160" cy="749808"/>
           </a:xfrm>
           <a:prstGeom prst="roundRect">
             <a:avLst/>
@@ -31745,7 +31725,7 @@
           </a:fontRef>
         </p:style>
         <p:txBody>
-          <a:bodyPr rtlCol="0" anchor="ctr" wrap="square"/>
+          <a:bodyPr rtlCol="0" anchor="ctr" wrap="none"/>
           <a:lstStyle/>
           <a:p>
             <a:pPr algn="ctr">
@@ -31770,7 +31750,7 @@
         </p:nvCxnSpPr>
         <p:spPr>
           <a:xfrm>
-            <a:off x="5004917" y="2841752"/>
+            <a:off x="4962372" y="2841752"/>
             <a:ext cx="274320" cy="0"/>
           </a:xfrm>
           <a:prstGeom prst="line">
@@ -31806,8 +31786,8 @@
         </p:nvSpPr>
         <p:spPr>
           <a:xfrm>
-            <a:off x="5279237" y="2466848"/>
-            <a:ext cx="1049020" cy="749808"/>
+            <a:off x="5236692" y="2466848"/>
+            <a:ext cx="1184910" cy="749808"/>
           </a:xfrm>
           <a:prstGeom prst="roundRect">
             <a:avLst/>
@@ -31836,7 +31816,7 @@
           </a:fontRef>
         </p:style>
         <p:txBody>
-          <a:bodyPr rtlCol="0" anchor="ctr" wrap="square"/>
+          <a:bodyPr rtlCol="0" anchor="ctr" wrap="none"/>
           <a:lstStyle/>
           <a:p>
             <a:pPr algn="ctr">
@@ -31861,7 +31841,7 @@
         </p:nvCxnSpPr>
         <p:spPr>
           <a:xfrm>
-            <a:off x="6328257" y="2841752"/>
+            <a:off x="6421602" y="2841752"/>
             <a:ext cx="274320" cy="0"/>
           </a:xfrm>
           <a:prstGeom prst="line">
@@ -31897,8 +31877,8 @@
         </p:nvSpPr>
         <p:spPr>
           <a:xfrm>
-            <a:off x="6602577" y="2466848"/>
-            <a:ext cx="1341120" cy="749808"/>
+            <a:off x="6695922" y="2466848"/>
+            <a:ext cx="1432560" cy="749808"/>
           </a:xfrm>
           <a:prstGeom prst="roundRect">
             <a:avLst/>
@@ -31927,7 +31907,7 @@
           </a:fontRef>
         </p:style>
         <p:txBody>
-          <a:bodyPr rtlCol="0" anchor="ctr" wrap="square"/>
+          <a:bodyPr rtlCol="0" anchor="ctr" wrap="none"/>
           <a:lstStyle/>
           <a:p>
             <a:pPr algn="ctr">
@@ -31982,7 +31962,7 @@
           </a:fontRef>
         </p:style>
         <p:txBody>
-          <a:bodyPr rtlCol="0" anchor="ctr" wrap="square"/>
+          <a:bodyPr rtlCol="0" anchor="ctr" wrap="none"/>
           <a:lstStyle/>
           <a:p>
             <a:pPr algn="ctr">
@@ -32037,7 +32017,7 @@
           </a:fontRef>
         </p:style>
         <p:txBody>
-          <a:bodyPr rtlCol="0" anchor="ctr" wrap="square"/>
+          <a:bodyPr rtlCol="0" anchor="ctr" wrap="none"/>
           <a:lstStyle/>
           <a:p>
             <a:pPr algn="ctr">
@@ -32092,7 +32072,7 @@
           </a:fontRef>
         </p:style>
         <p:txBody>
-          <a:bodyPr rtlCol="0" anchor="ctr" wrap="square"/>
+          <a:bodyPr rtlCol="0" anchor="ctr" wrap="none"/>
           <a:lstStyle/>
           <a:p>
             <a:pPr algn="ctr">
@@ -32147,7 +32127,7 @@
           </a:fontRef>
         </p:style>
         <p:txBody>
-          <a:bodyPr rtlCol="0" anchor="ctr" wrap="square"/>
+          <a:bodyPr rtlCol="0" anchor="ctr" wrap="none"/>
           <a:lstStyle/>
           <a:p>
             <a:pPr algn="ctr">
@@ -32202,7 +32182,7 @@
           </a:fontRef>
         </p:style>
         <p:txBody>
-          <a:bodyPr rtlCol="0" anchor="ctr" wrap="square"/>
+          <a:bodyPr rtlCol="0" anchor="ctr" wrap="none"/>
           <a:lstStyle/>
           <a:p>
             <a:pPr algn="ctr">
@@ -32257,7 +32237,7 @@
           </a:fontRef>
         </p:style>
         <p:txBody>
-          <a:bodyPr rtlCol="0" anchor="ctr" wrap="square"/>
+          <a:bodyPr rtlCol="0" anchor="ctr" wrap="none"/>
           <a:lstStyle/>
           <a:p>
             <a:pPr algn="ctr">
@@ -32283,7 +32263,7 @@
         <p:spPr>
           <a:xfrm>
             <a:off x="731520" y="5228336"/>
-            <a:ext cx="10728655" cy="722376"/>
+            <a:ext cx="10728655" cy="425196"/>
           </a:xfrm>
           <a:prstGeom prst="rect">
             <a:avLst/>
@@ -33579,8 +33559,8 @@
         </p:nvSpPr>
         <p:spPr>
           <a:xfrm>
-            <a:off x="2519527" y="1371600"/>
-            <a:ext cx="1380236" cy="914400"/>
+            <a:off x="2790037" y="1371600"/>
+            <a:ext cx="1326025" cy="914400"/>
           </a:xfrm>
           <a:prstGeom prst="roundRect">
             <a:avLst/>
@@ -33634,8 +33614,8 @@
         </p:nvCxnSpPr>
         <p:spPr>
           <a:xfrm>
-            <a:off x="3899763" y="1828800"/>
-            <a:ext cx="374904" cy="0"/>
+            <a:off x="4116062" y="1828800"/>
+            <a:ext cx="389273" cy="0"/>
           </a:xfrm>
           <a:prstGeom prst="line">
             <a:avLst/>
@@ -33670,8 +33650,8 @@
         </p:nvSpPr>
         <p:spPr>
           <a:xfrm>
-            <a:off x="4274667" y="1371600"/>
-            <a:ext cx="1748535" cy="914400"/>
+            <a:off x="4505335" y="1371600"/>
+            <a:ext cx="1541925" cy="914400"/>
           </a:xfrm>
           <a:prstGeom prst="roundRect">
             <a:avLst/>
@@ -33725,8 +33705,8 @@
         </p:nvCxnSpPr>
         <p:spPr>
           <a:xfrm>
-            <a:off x="6023203" y="1828800"/>
-            <a:ext cx="374904" cy="0"/>
+            <a:off x="6047261" y="1828800"/>
+            <a:ext cx="389273" cy="0"/>
           </a:xfrm>
           <a:prstGeom prst="line">
             <a:avLst/>
@@ -33761,8 +33741,8 @@
         </p:nvSpPr>
         <p:spPr>
           <a:xfrm>
-            <a:off x="6398107" y="1371600"/>
-            <a:ext cx="1404620" cy="914400"/>
+            <a:off x="6436534" y="1371600"/>
+            <a:ext cx="1237125" cy="914400"/>
           </a:xfrm>
           <a:prstGeom prst="roundRect">
             <a:avLst/>
@@ -33816,8 +33796,8 @@
         </p:nvCxnSpPr>
         <p:spPr>
           <a:xfrm>
-            <a:off x="7802727" y="1828800"/>
-            <a:ext cx="374904" cy="0"/>
+            <a:off x="7673659" y="1828800"/>
+            <a:ext cx="389273" cy="0"/>
           </a:xfrm>
           <a:prstGeom prst="line">
             <a:avLst/>
@@ -33852,8 +33832,8 @@
         </p:nvSpPr>
         <p:spPr>
           <a:xfrm>
-            <a:off x="8177631" y="1371600"/>
-            <a:ext cx="1494536" cy="914400"/>
+            <a:off x="8062932" y="1371600"/>
+            <a:ext cx="1338725" cy="914400"/>
           </a:xfrm>
           <a:prstGeom prst="roundRect">
             <a:avLst/>
@@ -33907,8 +33887,8 @@
         </p:nvSpPr>
         <p:spPr>
           <a:xfrm>
-            <a:off x="731520" y="2982468"/>
-            <a:ext cx="27431" cy="457200"/>
+            <a:off x="731520" y="2542032"/>
+            <a:ext cx="27431" cy="1106932"/>
           </a:xfrm>
           <a:prstGeom prst="rect">
             <a:avLst/>
@@ -33989,7 +33969,7 @@
         <p:spPr>
           <a:xfrm>
             <a:off x="896112" y="3058668"/>
-            <a:ext cx="3301898" cy="821436"/>
+            <a:ext cx="3301898" cy="590296"/>
           </a:xfrm>
           <a:prstGeom prst="rect">
             <a:avLst/>
@@ -34024,8 +34004,8 @@
         </p:nvSpPr>
         <p:spPr>
           <a:xfrm>
-            <a:off x="4362602" y="2982468"/>
-            <a:ext cx="27431" cy="457200"/>
+            <a:off x="4362602" y="2542032"/>
+            <a:ext cx="27431" cy="1106932"/>
           </a:xfrm>
           <a:prstGeom prst="rect">
             <a:avLst/>
@@ -34069,7 +34049,7 @@
         </p:nvSpPr>
         <p:spPr>
           <a:xfrm>
-            <a:off x="4527194" y="2657602"/>
+            <a:off x="4527194" y="2542032"/>
             <a:ext cx="3301898" cy="425196"/>
           </a:xfrm>
           <a:prstGeom prst="rect">
@@ -34105,7 +34085,7 @@
         </p:nvSpPr>
         <p:spPr>
           <a:xfrm>
-            <a:off x="4527194" y="3174238"/>
+            <a:off x="4527194" y="3058668"/>
             <a:ext cx="3301898" cy="590296"/>
           </a:xfrm>
           <a:prstGeom prst="rect">
@@ -34141,8 +34121,8 @@
         </p:nvSpPr>
         <p:spPr>
           <a:xfrm>
-            <a:off x="7993684" y="2982468"/>
-            <a:ext cx="27431" cy="457200"/>
+            <a:off x="7993684" y="2542032"/>
+            <a:ext cx="27431" cy="1106932"/>
           </a:xfrm>
           <a:prstGeom prst="rect">
             <a:avLst/>
@@ -34186,7 +34166,7 @@
         </p:nvSpPr>
         <p:spPr>
           <a:xfrm>
-            <a:off x="8158276" y="2657602"/>
+            <a:off x="8158276" y="2542032"/>
             <a:ext cx="3301898" cy="425196"/>
           </a:xfrm>
           <a:prstGeom prst="rect">
@@ -34222,7 +34202,7 @@
         </p:nvSpPr>
         <p:spPr>
           <a:xfrm>
-            <a:off x="8158276" y="3174238"/>
+            <a:off x="8158276" y="3058668"/>
             <a:ext cx="3301898" cy="590296"/>
           </a:xfrm>
           <a:prstGeom prst="rect">
@@ -34258,8 +34238,8 @@
         </p:nvSpPr>
         <p:spPr>
           <a:xfrm>
-            <a:off x="731520" y="4136136"/>
-            <a:ext cx="10728655" cy="722376"/>
+            <a:off x="731520" y="3904996"/>
+            <a:ext cx="10728655" cy="425196"/>
           </a:xfrm>
           <a:prstGeom prst="rect">
             <a:avLst/>
@@ -36501,8 +36481,8 @@
         </p:nvSpPr>
         <p:spPr>
           <a:xfrm>
-            <a:off x="3586327" y="1371600"/>
-            <a:ext cx="1239520" cy="749808"/>
+            <a:off x="3352647" y="1371600"/>
+            <a:ext cx="1337310" cy="749808"/>
           </a:xfrm>
           <a:prstGeom prst="roundRect">
             <a:avLst/>
@@ -36531,7 +36511,7 @@
           </a:fontRef>
         </p:style>
         <p:txBody>
-          <a:bodyPr rtlCol="0" anchor="ctr" wrap="square"/>
+          <a:bodyPr rtlCol="0" anchor="ctr" wrap="none"/>
           <a:lstStyle/>
           <a:p>
             <a:pPr algn="ctr">
@@ -36556,8 +36536,8 @@
         </p:nvCxnSpPr>
         <p:spPr>
           <a:xfrm>
-            <a:off x="4825847" y="1746504"/>
-            <a:ext cx="324612" cy="0"/>
+            <a:off x="4689957" y="1746504"/>
+            <a:ext cx="274320" cy="0"/>
           </a:xfrm>
           <a:prstGeom prst="line">
             <a:avLst/>
@@ -36592,8 +36572,8 @@
         </p:nvSpPr>
         <p:spPr>
           <a:xfrm>
-            <a:off x="5150459" y="1371600"/>
-            <a:ext cx="756920" cy="749808"/>
+            <a:off x="4964277" y="1371600"/>
+            <a:ext cx="899160" cy="749808"/>
           </a:xfrm>
           <a:prstGeom prst="roundRect">
             <a:avLst/>
@@ -36622,7 +36602,7 @@
           </a:fontRef>
         </p:style>
         <p:txBody>
-          <a:bodyPr rtlCol="0" anchor="ctr" wrap="square"/>
+          <a:bodyPr rtlCol="0" anchor="ctr" wrap="none"/>
           <a:lstStyle/>
           <a:p>
             <a:pPr algn="ctr">
@@ -36647,8 +36627,8 @@
         </p:nvCxnSpPr>
         <p:spPr>
           <a:xfrm>
-            <a:off x="5907379" y="1746504"/>
-            <a:ext cx="324612" cy="0"/>
+            <a:off x="5863437" y="1746504"/>
+            <a:ext cx="274320" cy="0"/>
           </a:xfrm>
           <a:prstGeom prst="line">
             <a:avLst/>
@@ -36683,8 +36663,8 @@
         </p:nvSpPr>
         <p:spPr>
           <a:xfrm>
-            <a:off x="6231991" y="1371600"/>
-            <a:ext cx="1164844" cy="749808"/>
+            <a:off x="6137757" y="1371600"/>
+            <a:ext cx="1432560" cy="749808"/>
           </a:xfrm>
           <a:prstGeom prst="roundRect">
             <a:avLst/>
@@ -36738,8 +36718,8 @@
         </p:nvCxnSpPr>
         <p:spPr>
           <a:xfrm>
-            <a:off x="7396835" y="1746504"/>
-            <a:ext cx="324612" cy="0"/>
+            <a:off x="7570317" y="1746504"/>
+            <a:ext cx="274320" cy="0"/>
           </a:xfrm>
           <a:prstGeom prst="line">
             <a:avLst/>
@@ -36774,8 +36754,8 @@
         </p:nvSpPr>
         <p:spPr>
           <a:xfrm>
-            <a:off x="7721447" y="1371600"/>
-            <a:ext cx="883919" cy="749808"/>
+            <a:off x="7844637" y="1371600"/>
+            <a:ext cx="994409" cy="749808"/>
           </a:xfrm>
           <a:prstGeom prst="roundRect">
             <a:avLst/>
@@ -36804,7 +36784,7 @@
           </a:fontRef>
         </p:style>
         <p:txBody>
-          <a:bodyPr rtlCol="0" anchor="ctr" wrap="square"/>
+          <a:bodyPr rtlCol="0" anchor="ctr" wrap="none"/>
           <a:lstStyle/>
           <a:p>
             <a:pPr algn="ctr">
@@ -36829,8 +36809,8 @@
         </p:nvSpPr>
         <p:spPr>
           <a:xfrm>
-            <a:off x="731520" y="2711196"/>
-            <a:ext cx="27431" cy="457200"/>
+            <a:off x="731520" y="2414015"/>
+            <a:ext cx="27431" cy="1051560"/>
           </a:xfrm>
           <a:prstGeom prst="rect">
             <a:avLst/>
@@ -36947,7 +36927,7 @@
         <p:spPr>
           <a:xfrm>
             <a:off x="731520" y="3758183"/>
-            <a:ext cx="10728655" cy="722376"/>
+            <a:ext cx="10728655" cy="425196"/>
           </a:xfrm>
           <a:prstGeom prst="rect">
             <a:avLst/>
@@ -37887,8 +37867,8 @@
         </p:nvSpPr>
         <p:spPr>
           <a:xfrm>
-            <a:off x="2710027" y="1371600"/>
-            <a:ext cx="1376680" cy="377444"/>
+            <a:off x="2615412" y="1371600"/>
+            <a:ext cx="1565910" cy="377444"/>
           </a:xfrm>
           <a:prstGeom prst="roundRect">
             <a:avLst/>
@@ -37915,7 +37895,7 @@
           </a:fontRef>
         </p:style>
         <p:txBody>
-          <a:bodyPr rtlCol="0" anchor="ctr" wrap="square"/>
+          <a:bodyPr rtlCol="0" anchor="ctr" wrap="none"/>
           <a:lstStyle/>
           <a:p>
             <a:pPr algn="ctr">
@@ -37940,8 +37920,8 @@
         </p:nvSpPr>
         <p:spPr>
           <a:xfrm>
-            <a:off x="2099157" y="1895347"/>
-            <a:ext cx="2598419" cy="786384"/>
+            <a:off x="2329662" y="1895347"/>
+            <a:ext cx="2137410" cy="786384"/>
           </a:xfrm>
           <a:prstGeom prst="roundRect">
             <a:avLst/>
@@ -37996,7 +37976,7 @@
         <p:spPr>
           <a:xfrm>
             <a:off x="883767" y="2828036"/>
-            <a:ext cx="5029200" cy="722376"/>
+            <a:ext cx="5029200" cy="425196"/>
           </a:xfrm>
           <a:prstGeom prst="rect">
             <a:avLst/>
@@ -38031,7 +38011,7 @@
         </p:nvSpPr>
         <p:spPr>
           <a:xfrm>
-            <a:off x="883767" y="3696715"/>
+            <a:off x="883767" y="3399536"/>
             <a:ext cx="5029200" cy="590296"/>
           </a:xfrm>
           <a:prstGeom prst="rect">
@@ -38067,8 +38047,8 @@
         </p:nvSpPr>
         <p:spPr>
           <a:xfrm>
-            <a:off x="7762087" y="1565910"/>
-            <a:ext cx="2062480" cy="377444"/>
+            <a:off x="7648422" y="1417320"/>
+            <a:ext cx="2289810" cy="377444"/>
           </a:xfrm>
           <a:prstGeom prst="roundRect">
             <a:avLst/>
@@ -38120,8 +38100,8 @@
         </p:nvSpPr>
         <p:spPr>
           <a:xfrm>
-            <a:off x="6970877" y="2089658"/>
-            <a:ext cx="795020" cy="749808"/>
+            <a:off x="6770217" y="1941068"/>
+            <a:ext cx="937259" cy="749808"/>
           </a:xfrm>
           <a:prstGeom prst="roundRect">
             <a:avLst/>
@@ -38150,7 +38130,7 @@
           </a:fontRef>
         </p:style>
         <p:txBody>
-          <a:bodyPr rtlCol="0" anchor="ctr" wrap="square"/>
+          <a:bodyPr rtlCol="0" anchor="ctr" wrap="none"/>
           <a:lstStyle/>
           <a:p>
             <a:pPr algn="ctr">
@@ -38175,7 +38155,7 @@
         </p:nvCxnSpPr>
         <p:spPr>
           <a:xfrm>
-            <a:off x="7765897" y="2464562"/>
+            <a:off x="7707477" y="2315972"/>
             <a:ext cx="274320" cy="0"/>
           </a:xfrm>
           <a:prstGeom prst="line">
@@ -38211,8 +38191,8 @@
         </p:nvSpPr>
         <p:spPr>
           <a:xfrm>
-            <a:off x="8040217" y="2089658"/>
-            <a:ext cx="1112520" cy="749808"/>
+            <a:off x="7981797" y="1941068"/>
+            <a:ext cx="1261110" cy="749808"/>
           </a:xfrm>
           <a:prstGeom prst="roundRect">
             <a:avLst/>
@@ -38266,7 +38246,7 @@
         </p:nvCxnSpPr>
         <p:spPr>
           <a:xfrm>
-            <a:off x="9152737" y="2464562"/>
+            <a:off x="9242907" y="2315972"/>
             <a:ext cx="274320" cy="0"/>
           </a:xfrm>
           <a:prstGeom prst="line">
@@ -38302,8 +38282,8 @@
         </p:nvSpPr>
         <p:spPr>
           <a:xfrm>
-            <a:off x="9427057" y="2089658"/>
-            <a:ext cx="1188720" cy="749808"/>
+            <a:off x="9517227" y="1941068"/>
+            <a:ext cx="1299210" cy="749808"/>
           </a:xfrm>
           <a:prstGeom prst="roundRect">
             <a:avLst/>
@@ -38332,7 +38312,7 @@
           </a:fontRef>
         </p:style>
         <p:txBody>
-          <a:bodyPr rtlCol="0" anchor="ctr" wrap="square"/>
+          <a:bodyPr rtlCol="0" anchor="ctr" wrap="none"/>
           <a:lstStyle/>
           <a:p>
             <a:pPr algn="ctr">
@@ -38357,8 +38337,8 @@
         </p:nvSpPr>
         <p:spPr>
           <a:xfrm>
-            <a:off x="6278727" y="3310636"/>
-            <a:ext cx="27432" cy="457200"/>
+            <a:off x="6278727" y="2837180"/>
+            <a:ext cx="27432" cy="1106932"/>
           </a:xfrm>
           <a:prstGeom prst="rect">
             <a:avLst/>
@@ -38402,7 +38382,7 @@
         </p:nvSpPr>
         <p:spPr>
           <a:xfrm>
-            <a:off x="6443319" y="2985770"/>
+            <a:off x="6443319" y="2837180"/>
             <a:ext cx="4864608" cy="425196"/>
           </a:xfrm>
           <a:prstGeom prst="rect">
@@ -38438,7 +38418,7 @@
         </p:nvSpPr>
         <p:spPr>
           <a:xfrm>
-            <a:off x="6443319" y="3502406"/>
+            <a:off x="6443319" y="3353816"/>
             <a:ext cx="4864608" cy="590296"/>
           </a:xfrm>
           <a:prstGeom prst="rect">
@@ -38474,8 +38454,8 @@
         </p:nvSpPr>
         <p:spPr>
           <a:xfrm>
-            <a:off x="731520" y="4543044"/>
-            <a:ext cx="10728655" cy="722376"/>
+            <a:off x="731520" y="4245864"/>
+            <a:ext cx="10728655" cy="425196"/>
           </a:xfrm>
           <a:prstGeom prst="rect">
             <a:avLst/>
@@ -39763,7 +39743,7 @@
           </a:fontRef>
         </p:style>
         <p:txBody>
-          <a:bodyPr rtlCol="0" anchor="ctr" wrap="square"/>
+          <a:bodyPr rtlCol="0" anchor="ctr" wrap="none"/>
           <a:lstStyle/>
           <a:p>
             <a:pPr algn="ctr">
@@ -39816,7 +39796,7 @@
           </a:fontRef>
         </p:style>
         <p:txBody>
-          <a:bodyPr rtlCol="0" anchor="ctr" wrap="square"/>
+          <a:bodyPr rtlCol="0" anchor="ctr" wrap="none"/>
           <a:lstStyle/>
           <a:p>
             <a:pPr algn="ctr">
@@ -39841,8 +39821,8 @@
         </p:nvSpPr>
         <p:spPr>
           <a:xfrm>
-            <a:off x="731520" y="5152898"/>
-            <a:ext cx="27431" cy="457200"/>
+            <a:off x="731520" y="4828032"/>
+            <a:ext cx="27431" cy="875792"/>
           </a:xfrm>
           <a:prstGeom prst="rect">
             <a:avLst/>
@@ -39923,7 +39903,7 @@
         <p:spPr>
           <a:xfrm>
             <a:off x="896112" y="5344668"/>
-            <a:ext cx="3289706" cy="590296"/>
+            <a:ext cx="3289706" cy="359156"/>
           </a:xfrm>
           <a:prstGeom prst="rect">
             <a:avLst/>
@@ -39958,8 +39938,8 @@
         </p:nvSpPr>
         <p:spPr>
           <a:xfrm>
-            <a:off x="4368698" y="5152898"/>
-            <a:ext cx="27431" cy="457200"/>
+            <a:off x="4368698" y="4828032"/>
+            <a:ext cx="27431" cy="875792"/>
           </a:xfrm>
           <a:prstGeom prst="rect">
             <a:avLst/>
@@ -40040,7 +40020,7 @@
         <p:spPr>
           <a:xfrm>
             <a:off x="4533290" y="5344668"/>
-            <a:ext cx="3289706" cy="590296"/>
+            <a:ext cx="3289706" cy="359156"/>
           </a:xfrm>
           <a:prstGeom prst="rect">
             <a:avLst/>
@@ -40075,8 +40055,8 @@
         </p:nvSpPr>
         <p:spPr>
           <a:xfrm>
-            <a:off x="8005876" y="5152898"/>
-            <a:ext cx="27431" cy="457200"/>
+            <a:off x="8005876" y="4828032"/>
+            <a:ext cx="27431" cy="875792"/>
           </a:xfrm>
           <a:prstGeom prst="rect">
             <a:avLst/>
@@ -40157,7 +40137,7 @@
         <p:spPr>
           <a:xfrm>
             <a:off x="8170468" y="5344668"/>
-            <a:ext cx="3289706" cy="590296"/>
+            <a:ext cx="3289706" cy="359156"/>
           </a:xfrm>
           <a:prstGeom prst="rect">
             <a:avLst/>
@@ -40192,7 +40172,7 @@
         </p:nvSpPr>
         <p:spPr>
           <a:xfrm>
-            <a:off x="731520" y="6062980"/>
+            <a:off x="731520" y="5831840"/>
             <a:ext cx="10728655" cy="309626"/>
           </a:xfrm>
           <a:prstGeom prst="rect">
@@ -41827,8 +41807,8 @@
         </p:nvSpPr>
         <p:spPr>
           <a:xfrm>
-            <a:off x="3708247" y="2250948"/>
-            <a:ext cx="1315720" cy="749808"/>
+            <a:off x="3491712" y="2250948"/>
+            <a:ext cx="1413510" cy="749808"/>
           </a:xfrm>
           <a:prstGeom prst="roundRect">
             <a:avLst/>
@@ -41857,7 +41837,7 @@
           </a:fontRef>
         </p:style>
         <p:txBody>
-          <a:bodyPr rtlCol="0" anchor="ctr" wrap="square"/>
+          <a:bodyPr rtlCol="0" anchor="ctr" wrap="none"/>
           <a:lstStyle/>
           <a:p>
             <a:pPr algn="ctr">
@@ -41882,8 +41862,8 @@
         </p:nvCxnSpPr>
         <p:spPr>
           <a:xfrm>
-            <a:off x="5023967" y="2625852"/>
-            <a:ext cx="341376" cy="0"/>
+            <a:off x="4905222" y="2625852"/>
+            <a:ext cx="274320" cy="0"/>
           </a:xfrm>
           <a:prstGeom prst="line">
             <a:avLst/>
@@ -41918,8 +41898,8 @@
         </p:nvSpPr>
         <p:spPr>
           <a:xfrm>
-            <a:off x="5365343" y="2250948"/>
-            <a:ext cx="1061720" cy="749808"/>
+            <a:off x="5179542" y="2250948"/>
+            <a:ext cx="1261110" cy="749808"/>
           </a:xfrm>
           <a:prstGeom prst="roundRect">
             <a:avLst/>
@@ -41948,7 +41928,7 @@
           </a:fontRef>
         </p:style>
         <p:txBody>
-          <a:bodyPr rtlCol="0" anchor="ctr" wrap="square"/>
+          <a:bodyPr rtlCol="0" anchor="ctr" wrap="none"/>
           <a:lstStyle/>
           <a:p>
             <a:pPr algn="ctr">
@@ -41973,8 +41953,8 @@
         </p:nvCxnSpPr>
         <p:spPr>
           <a:xfrm>
-            <a:off x="6427063" y="2625852"/>
-            <a:ext cx="341376" cy="0"/>
+            <a:off x="6440652" y="2625852"/>
+            <a:ext cx="274320" cy="0"/>
           </a:xfrm>
           <a:prstGeom prst="line">
             <a:avLst/>
@@ -42009,8 +41989,8 @@
         </p:nvSpPr>
         <p:spPr>
           <a:xfrm>
-            <a:off x="6768439" y="2250948"/>
-            <a:ext cx="1715007" cy="749808"/>
+            <a:off x="6714972" y="2250948"/>
+            <a:ext cx="1985010" cy="749808"/>
           </a:xfrm>
           <a:prstGeom prst="roundRect">
             <a:avLst/>
@@ -42064,8 +42044,8 @@
         </p:nvSpPr>
         <p:spPr>
           <a:xfrm>
-            <a:off x="731520" y="3581654"/>
-            <a:ext cx="27432" cy="457200"/>
+            <a:off x="731520" y="3256788"/>
+            <a:ext cx="27432" cy="875792"/>
           </a:xfrm>
           <a:prstGeom prst="rect">
             <a:avLst/>
@@ -42146,7 +42126,7 @@
         <p:spPr>
           <a:xfrm>
             <a:off x="896112" y="3773424"/>
-            <a:ext cx="5071719" cy="590296"/>
+            <a:ext cx="5071719" cy="359156"/>
           </a:xfrm>
           <a:prstGeom prst="rect">
             <a:avLst/>
@@ -42181,8 +42161,8 @@
         </p:nvSpPr>
         <p:spPr>
           <a:xfrm>
-            <a:off x="6223863" y="3581654"/>
-            <a:ext cx="27432" cy="457200"/>
+            <a:off x="6223863" y="3256788"/>
+            <a:ext cx="27432" cy="875792"/>
           </a:xfrm>
           <a:prstGeom prst="rect">
             <a:avLst/>
@@ -42263,7 +42243,7 @@
         <p:spPr>
           <a:xfrm>
             <a:off x="6388455" y="3773424"/>
-            <a:ext cx="5071719" cy="590296"/>
+            <a:ext cx="5071719" cy="359156"/>
           </a:xfrm>
           <a:prstGeom prst="rect">
             <a:avLst/>
@@ -42298,8 +42278,8 @@
         </p:nvSpPr>
         <p:spPr>
           <a:xfrm>
-            <a:off x="731520" y="4619752"/>
-            <a:ext cx="10728655" cy="722376"/>
+            <a:off x="731520" y="4388612"/>
+            <a:ext cx="10728655" cy="425196"/>
           </a:xfrm>
           <a:prstGeom prst="rect">
             <a:avLst/>
@@ -43897,8 +43877,8 @@
         </p:nvSpPr>
         <p:spPr>
           <a:xfrm>
-            <a:off x="2633827" y="1602486"/>
-            <a:ext cx="1529080" cy="377444"/>
+            <a:off x="2501112" y="1602485"/>
+            <a:ext cx="1794510" cy="377444"/>
           </a:xfrm>
           <a:prstGeom prst="roundRect">
             <a:avLst/>
@@ -43950,8 +43930,8 @@
         </p:nvSpPr>
         <p:spPr>
           <a:xfrm>
-            <a:off x="2219807" y="2126234"/>
-            <a:ext cx="2357119" cy="1005840"/>
+            <a:off x="2358237" y="2126234"/>
+            <a:ext cx="2080260" cy="1005840"/>
           </a:xfrm>
           <a:prstGeom prst="roundRect">
             <a:avLst/>
@@ -44010,7 +43990,7 @@
         <p:spPr>
           <a:xfrm>
             <a:off x="883767" y="3278378"/>
-            <a:ext cx="5029200" cy="722376"/>
+            <a:ext cx="5029200" cy="425196"/>
           </a:xfrm>
           <a:prstGeom prst="rect">
             <a:avLst/>
@@ -44045,8 +44025,8 @@
         </p:nvSpPr>
         <p:spPr>
           <a:xfrm>
-            <a:off x="8009737" y="1371600"/>
-            <a:ext cx="1567180" cy="377444"/>
+            <a:off x="7886547" y="1371600"/>
+            <a:ext cx="1813560" cy="377444"/>
           </a:xfrm>
           <a:prstGeom prst="roundRect">
             <a:avLst/>
@@ -44073,7 +44053,7 @@
           </a:fontRef>
         </p:style>
         <p:txBody>
-          <a:bodyPr rtlCol="0" anchor="ctr" wrap="square"/>
+          <a:bodyPr rtlCol="0" anchor="ctr" wrap="none"/>
           <a:lstStyle/>
           <a:p>
             <a:pPr algn="ctr">
@@ -44098,8 +44078,8 @@
         </p:nvSpPr>
         <p:spPr>
           <a:xfrm>
-            <a:off x="7430617" y="1895347"/>
-            <a:ext cx="2725419" cy="1170432"/>
+            <a:off x="7610322" y="1895347"/>
+            <a:ext cx="2366010" cy="1170432"/>
           </a:xfrm>
           <a:prstGeom prst="roundRect">
             <a:avLst/>
@@ -44162,7 +44142,7 @@
         <p:spPr>
           <a:xfrm>
             <a:off x="6278727" y="3212084"/>
-            <a:ext cx="5029200" cy="1019556"/>
+            <a:ext cx="5029200" cy="722376"/>
           </a:xfrm>
           <a:prstGeom prst="rect">
             <a:avLst/>
@@ -44197,8 +44177,8 @@
         </p:nvSpPr>
         <p:spPr>
           <a:xfrm>
-            <a:off x="731520" y="4696968"/>
-            <a:ext cx="27431" cy="457200"/>
+            <a:off x="731520" y="4190491"/>
+            <a:ext cx="27431" cy="875792"/>
           </a:xfrm>
           <a:prstGeom prst="rect">
             <a:avLst/>
@@ -44242,7 +44222,7 @@
         </p:nvSpPr>
         <p:spPr>
           <a:xfrm>
-            <a:off x="896111" y="4487672"/>
+            <a:off x="896111" y="4190491"/>
             <a:ext cx="10564063" cy="425196"/>
           </a:xfrm>
           <a:prstGeom prst="rect">
@@ -44278,7 +44258,7 @@
         </p:nvSpPr>
         <p:spPr>
           <a:xfrm>
-            <a:off x="896111" y="5004308"/>
+            <a:off x="896111" y="4707128"/>
             <a:ext cx="10564063" cy="359156"/>
           </a:xfrm>
           <a:prstGeom prst="rect">
